--- a/slides/CSC336-Lecture-06-CSS-Box-Model-and-Display.pptx
+++ b/slides/CSC336-Lecture-06-CSS-Box-Model-and-Display.pptx
@@ -4126,13 +4126,14 @@
         </p:nvPicPr>
         <p:blipFill>
           <a:blip r:embed="rId1"/>
-          <a:srcRect l="0" r="0" t="0" b="0"/>
-          <a:stretch/>
+          <a:stretch>
+            <a:fillRect/>
+          </a:stretch>
         </p:blipFill>
         <p:spPr>
           <a:xfrm>
-            <a:off x="640080" y="2057400"/>
-            <a:ext cx="10911535" cy="4114800"/>
+            <a:off x="3358315" y="2057400"/>
+            <a:ext cx="5475064" cy="4114800"/>
           </a:xfrm>
           <a:prstGeom prst="rect">
             <a:avLst/>
@@ -4682,13 +4683,14 @@
         </p:nvPicPr>
         <p:blipFill>
           <a:blip r:embed="rId1"/>
-          <a:srcRect l="0" r="0" t="0" b="0"/>
-          <a:stretch/>
+          <a:stretch>
+            <a:fillRect/>
+          </a:stretch>
         </p:blipFill>
         <p:spPr>
           <a:xfrm>
-            <a:off x="640080" y="2057400"/>
-            <a:ext cx="10911535" cy="4114800"/>
+            <a:off x="2515372" y="2057400"/>
+            <a:ext cx="7160950" cy="4114800"/>
           </a:xfrm>
           <a:prstGeom prst="rect">
             <a:avLst/>
@@ -8150,13 +8152,14 @@
         </p:nvPicPr>
         <p:blipFill>
           <a:blip r:embed="rId1"/>
-          <a:srcRect l="0" r="0" t="0" b="0"/>
-          <a:stretch/>
+          <a:stretch>
+            <a:fillRect/>
+          </a:stretch>
         </p:blipFill>
         <p:spPr>
           <a:xfrm>
-            <a:off x="640080" y="2057400"/>
-            <a:ext cx="10911535" cy="4114800"/>
+            <a:off x="3200248" y="2057400"/>
+            <a:ext cx="5791200" cy="4114800"/>
           </a:xfrm>
           <a:prstGeom prst="rect">
             <a:avLst/>
@@ -8706,13 +8709,14 @@
         </p:nvPicPr>
         <p:blipFill>
           <a:blip r:embed="rId1"/>
-          <a:srcRect l="0" r="0" t="0" b="0"/>
-          <a:stretch/>
+          <a:stretch>
+            <a:fillRect/>
+          </a:stretch>
         </p:blipFill>
         <p:spPr>
           <a:xfrm>
-            <a:off x="640080" y="2057400"/>
-            <a:ext cx="10911535" cy="4114800"/>
+            <a:off x="2696450" y="2057400"/>
+            <a:ext cx="6798794" cy="4114800"/>
           </a:xfrm>
           <a:prstGeom prst="rect">
             <a:avLst/>
@@ -9644,13 +9648,14 @@
         </p:nvPicPr>
         <p:blipFill>
           <a:blip r:embed="rId1"/>
-          <a:srcRect l="0" r="0" t="0" b="0"/>
-          <a:stretch/>
+          <a:stretch>
+            <a:fillRect/>
+          </a:stretch>
         </p:blipFill>
         <p:spPr>
           <a:xfrm>
-            <a:off x="640080" y="2331720"/>
-            <a:ext cx="10911535" cy="3840480"/>
+            <a:off x="640080" y="3004178"/>
+            <a:ext cx="10911535" cy="2495564"/>
           </a:xfrm>
           <a:prstGeom prst="rect">
             <a:avLst/>

--- a/slides/CSC336-Lecture-06-CSS-Box-Model-and-Display.pptx
+++ b/slides/CSC336-Lecture-06-CSS-Box-Model-and-Display.pptx
@@ -24,9 +24,11 @@
     <p:sldId id="272" r:id="rId18"/>
     <p:sldId id="273" r:id="rId19"/>
     <p:sldId id="274" r:id="rId20"/>
+    <p:sldId id="275" r:id="rId21"/>
+    <p:sldId id="276" r:id="rId22"/>
   </p:sldIdLst>
   <p:notesMasterIdLst>
-    <p:notesMasterId r:id="rId21"/>
+    <p:notesMasterId r:id="rId23"/>
   </p:notesMasterIdLst>
   <p:sldSz cx="12192000" cy="6858000"/>
   <p:notesSz cx="6858000" cy="12192000"/>
@@ -1512,6 +1514,182 @@
             <a:fld id="{F7021451-1387-4CA6-816F-3879F97B5CBC}" type="slidenum">
               <a:rPr lang="en-US"/>
               <a:t>2</a:t>
+            </a:fld>
+            <a:endParaRPr lang="en-US"/>
+          </a:p>
+        </p:txBody>
+      </p:sp>
+    </p:spTree>
+    <p:extLst>
+      <p:ext uri="{BB962C8B-B14F-4D97-AF65-F5344CB8AC3E}">
+        <p14:creationId xmlns:p14="http://schemas.microsoft.com/office/powerpoint/2010/main" val="1024086991"/>
+      </p:ext>
+    </p:extLst>
+  </p:cSld>
+  <p:clrMapOvr>
+    <a:masterClrMapping/>
+  </p:clrMapOvr>
+</p:notes>
+</file>
+
+<file path=ppt/notesSlides/notesSlide20.xml><?xml version="1.0" encoding="utf-8"?>
+<p:notes xmlns:a="http://schemas.openxmlformats.org/drawingml/2006/main" xmlns:r="http://schemas.openxmlformats.org/officeDocument/2006/relationships" xmlns:p="http://schemas.openxmlformats.org/presentationml/2006/main">
+  <p:cSld>
+    <p:spTree>
+      <p:nvGrpSpPr>
+        <p:cNvPr id="1" name=""/>
+        <p:cNvGrpSpPr/>
+        <p:nvPr/>
+      </p:nvGrpSpPr>
+      <p:grpSpPr>
+        <a:xfrm>
+          <a:off x="0" y="0"/>
+          <a:ext cx="0" cy="0"/>
+          <a:chOff x="0" y="0"/>
+          <a:chExt cx="0" cy="0"/>
+        </a:xfrm>
+      </p:grpSpPr>
+      <p:sp>
+        <p:nvSpPr>
+          <p:cNvPr id="2" name="Slide Image Placeholder 1"/>
+          <p:cNvSpPr>
+            <a:spLocks noGrp="1" noRot="1" noChangeAspect="1"/>
+          </p:cNvSpPr>
+          <p:nvPr>
+            <p:ph type="sldImg"/>
+          </p:nvPr>
+        </p:nvSpPr>
+        <p:spPr/>
+      </p:sp>
+      <p:sp>
+        <p:nvSpPr>
+          <p:cNvPr id="3" name="Notes Placeholder 2"/>
+          <p:cNvSpPr>
+            <a:spLocks noGrp="1"/>
+          </p:cNvSpPr>
+          <p:nvPr>
+            <p:ph type="body" idx="1"/>
+          </p:nvPr>
+        </p:nvSpPr>
+        <p:spPr/>
+        <p:txBody>
+          <a:bodyPr/>
+          <a:lstStyle/>
+          <a:p>
+            <a:r>
+              <a:rPr lang="en-US" dirty="0"/>
+              <a:t/>
+            </a:r>
+            <a:endParaRPr lang="en-US" dirty="0"/>
+          </a:p>
+        </p:txBody>
+      </p:sp>
+      <p:sp>
+        <p:nvSpPr>
+          <p:cNvPr id="4" name="Slide Number Placeholder 3"/>
+          <p:cNvSpPr>
+            <a:spLocks noGrp="1"/>
+          </p:cNvSpPr>
+          <p:nvPr>
+            <p:ph type="sldNum" sz="quarter" idx="10"/>
+          </p:nvPr>
+        </p:nvSpPr>
+        <p:spPr/>
+        <p:txBody>
+          <a:bodyPr/>
+          <a:lstStyle/>
+          <a:p>
+            <a:fld id="{F7021451-1387-4CA6-816F-3879F97B5CBC}" type="slidenum">
+              <a:rPr lang="en-US"/>
+              <a:t>20</a:t>
+            </a:fld>
+            <a:endParaRPr lang="en-US"/>
+          </a:p>
+        </p:txBody>
+      </p:sp>
+    </p:spTree>
+    <p:extLst>
+      <p:ext uri="{BB962C8B-B14F-4D97-AF65-F5344CB8AC3E}">
+        <p14:creationId xmlns:p14="http://schemas.microsoft.com/office/powerpoint/2010/main" val="1024086991"/>
+      </p:ext>
+    </p:extLst>
+  </p:cSld>
+  <p:clrMapOvr>
+    <a:masterClrMapping/>
+  </p:clrMapOvr>
+</p:notes>
+</file>
+
+<file path=ppt/notesSlides/notesSlide21.xml><?xml version="1.0" encoding="utf-8"?>
+<p:notes xmlns:a="http://schemas.openxmlformats.org/drawingml/2006/main" xmlns:r="http://schemas.openxmlformats.org/officeDocument/2006/relationships" xmlns:p="http://schemas.openxmlformats.org/presentationml/2006/main">
+  <p:cSld>
+    <p:spTree>
+      <p:nvGrpSpPr>
+        <p:cNvPr id="1" name=""/>
+        <p:cNvGrpSpPr/>
+        <p:nvPr/>
+      </p:nvGrpSpPr>
+      <p:grpSpPr>
+        <a:xfrm>
+          <a:off x="0" y="0"/>
+          <a:ext cx="0" cy="0"/>
+          <a:chOff x="0" y="0"/>
+          <a:chExt cx="0" cy="0"/>
+        </a:xfrm>
+      </p:grpSpPr>
+      <p:sp>
+        <p:nvSpPr>
+          <p:cNvPr id="2" name="Slide Image Placeholder 1"/>
+          <p:cNvSpPr>
+            <a:spLocks noGrp="1" noRot="1" noChangeAspect="1"/>
+          </p:cNvSpPr>
+          <p:nvPr>
+            <p:ph type="sldImg"/>
+          </p:nvPr>
+        </p:nvSpPr>
+        <p:spPr/>
+      </p:sp>
+      <p:sp>
+        <p:nvSpPr>
+          <p:cNvPr id="3" name="Notes Placeholder 2"/>
+          <p:cNvSpPr>
+            <a:spLocks noGrp="1"/>
+          </p:cNvSpPr>
+          <p:nvPr>
+            <p:ph type="body" idx="1"/>
+          </p:nvPr>
+        </p:nvSpPr>
+        <p:spPr/>
+        <p:txBody>
+          <a:bodyPr/>
+          <a:lstStyle/>
+          <a:p>
+            <a:r>
+              <a:rPr lang="en-US" dirty="0"/>
+              <a:t/>
+            </a:r>
+            <a:endParaRPr lang="en-US" dirty="0"/>
+          </a:p>
+        </p:txBody>
+      </p:sp>
+      <p:sp>
+        <p:nvSpPr>
+          <p:cNvPr id="4" name="Slide Number Placeholder 3"/>
+          <p:cNvSpPr>
+            <a:spLocks noGrp="1"/>
+          </p:cNvSpPr>
+          <p:nvPr>
+            <p:ph type="sldNum" sz="quarter" idx="10"/>
+          </p:nvPr>
+        </p:nvSpPr>
+        <p:spPr/>
+        <p:txBody>
+          <a:bodyPr/>
+          <a:lstStyle/>
+          <a:p>
+            <a:fld id="{F7021451-1387-4CA6-816F-3879F97B5CBC}" type="slidenum">
+              <a:rPr lang="en-US"/>
+              <a:t>21</a:t>
             </a:fld>
             <a:endParaRPr lang="en-US"/>
           </a:p>
@@ -4283,7 +4461,7 @@
                 <a:ea typeface="Calibri" pitchFamily="34" charset="-122"/>
                 <a:cs typeface="Calibri" pitchFamily="34" charset="-120"/>
               </a:rPr>
-              <a:t>A PRACTICAL EXAMPLE</a:t>
+              <a:t>A COMMON MIX-UP</a:t>
             </a:r>
             <a:endParaRPr lang="en-US" sz="1300" dirty="0"/>
           </a:p>
@@ -4322,7 +4500,7 @@
                 <a:ea typeface="Cambria" pitchFamily="34" charset="-122"/>
                 <a:cs typeface="Cambria" pitchFamily="34" charset="-120"/>
               </a:rPr>
-              <a:t>Turning a &lt;ul&gt; Into a Horizontal Menu</a:t>
+              <a:t>display: none vs. visibility: hidden</a:t>
             </a:r>
             <a:endParaRPr lang="en-US" sz="3400" dirty="0"/>
           </a:p>
@@ -4386,7 +4564,7 @@
                 <a:ea typeface="Courier New" pitchFamily="34" charset="-122"/>
                 <a:cs typeface="Courier New" pitchFamily="34" charset="-120"/>
               </a:rPr>
-              <a:t>.menu { list-style: none; margin: 0; padding: 0; }</a:t>
+              <a:t>.gone    { display: none; }      /* removed entirely — no space reserved   */</a:t>
             </a:r>
             <a:endParaRPr lang="en-US" sz="1400" dirty="0"/>
           </a:p>
@@ -4406,7 +4584,7 @@
                 <a:ea typeface="Courier New" pitchFamily="34" charset="-122"/>
                 <a:cs typeface="Courier New" pitchFamily="34" charset="-120"/>
               </a:rPr>
-              <a:t>.menu li { display: inline-block; margin-right: 20px; }</a:t>
+              <a:t>.invisible { visibility: hidden; } /* invisible, but still takes up its space */</a:t>
             </a:r>
             <a:endParaRPr lang="en-US" sz="1400" dirty="0"/>
           </a:p>
@@ -4445,7 +4623,7 @@
                 <a:ea typeface="Calibri" pitchFamily="34" charset="-122"/>
                 <a:cs typeface="Calibri" pitchFamily="34" charset="-120"/>
               </a:rPr>
-              <a:t>li is block by default — this one change turns a vertical list into a horizontal menu, with no HTML change at all.</a:t>
+              <a:t>Toggling display: none with JavaScript reflows the page (neighbors shift to fill the gap); visibility: hidden leaves a blank gap where the element used to be.</a:t>
             </a:r>
             <a:endParaRPr lang="en-US" sz="1300" dirty="0"/>
           </a:p>
@@ -4594,7 +4772,7 @@
                 <a:ea typeface="Calibri" pitchFamily="34" charset="-122"/>
                 <a:cs typeface="Calibri" pitchFamily="34" charset="-120"/>
               </a:rPr>
-              <a:t>A PRACTICAL EXAMPLE</a:t>
+              <a:t>INLINE-BLOCK IN PRACTICE</a:t>
             </a:r>
             <a:endParaRPr lang="en-US" sz="1300" dirty="0"/>
           </a:p>
@@ -4633,7 +4811,7 @@
                 <a:ea typeface="Cambria" pitchFamily="34" charset="-122"/>
                 <a:cs typeface="Cambria" pitchFamily="34" charset="-120"/>
               </a:rPr>
-              <a:t>Before and After, Rendered</a:t>
+              <a:t>A Row of Equal-Sized Buttons</a:t>
             </a:r>
             <a:endParaRPr lang="en-US" sz="3400" dirty="0"/>
           </a:p>
@@ -4647,59 +4825,224 @@
         </p:nvSpPr>
         <p:spPr>
           <a:xfrm>
-            <a:off x="530352" y="1947672"/>
-            <a:ext cx="11130991" cy="4334256"/>
+            <a:off x="640080" y="1965960"/>
+            <a:ext cx="10911535" cy="3291840"/>
           </a:xfrm>
           <a:prstGeom prst="roundRect">
             <a:avLst>
-              <a:gd name="adj" fmla="val 1266"/>
+              <a:gd name="adj" fmla="val 2222"/>
             </a:avLst>
           </a:prstGeom>
           <a:solidFill>
-            <a:srgbClr val="FFFFFF"/>
+            <a:srgbClr val="1E1E4C"/>
           </a:solidFill>
-          <a:ln w="12700">
-            <a:solidFill>
-              <a:srgbClr val="E2E2EE"/>
-            </a:solidFill>
-            <a:prstDash val="solid"/>
-          </a:ln>
-          <a:effectLst>
-            <a:outerShdw sx="100000" sy="100000" kx="0" ky="0" algn="bl" rotWithShape="0" blurRad="101600" dist="38100" dir="5400000">
-              <a:srgbClr val="000000">
-                <a:alpha val="12000"/>
-              </a:srgbClr>
-            </a:outerShdw>
-          </a:effectLst>
-        </p:spPr>
-      </p:sp>
-      <p:pic>
-        <p:nvPicPr>
-          <p:cNvPr id="5" name="Image 0" descr="D:/GitHub/mern-web-book/docs/assets/img/lecture-06/ul-menu-display.png">    </p:cNvPr>
-          <p:cNvPicPr>
-            <a:picLocks noChangeAspect="1"/>
-          </p:cNvPicPr>
-          <p:nvPr/>
-        </p:nvPicPr>
-        <p:blipFill>
-          <a:blip r:embed="rId1"/>
-          <a:stretch>
-            <a:fillRect/>
-          </a:stretch>
-        </p:blipFill>
-        <p:spPr>
-          <a:xfrm>
-            <a:off x="2515372" y="2057400"/>
-            <a:ext cx="7160950" cy="4114800"/>
-          </a:xfrm>
-          <a:prstGeom prst="rect">
-            <a:avLst/>
-          </a:prstGeom>
-        </p:spPr>
-      </p:pic>
-      <p:sp>
-        <p:nvSpPr>
-          <p:cNvPr id="6" name="Text 3"/>
+          <a:ln/>
+        </p:spPr>
+      </p:sp>
+      <p:sp>
+        <p:nvSpPr>
+          <p:cNvPr id="5" name="Text 3"/>
+          <p:cNvSpPr txBox="1"/>
+          <p:nvPr/>
+        </p:nvSpPr>
+        <p:spPr>
+          <a:xfrm>
+            <a:off x="960120" y="2194560"/>
+            <a:ext cx="10271455" cy="2834640"/>
+          </a:xfrm>
+          <a:prstGeom prst="rect">
+            <a:avLst/>
+          </a:prstGeom>
+          <a:noFill/>
+          <a:ln/>
+        </p:spPr>
+        <p:txBody>
+          <a:bodyPr wrap="square" lIns="0" tIns="0" rIns="0" bIns="0" rtlCol="0" anchor="t"/>
+          <a:lstStyle/>
+          <a:p>
+            <a:pPr indent="0" marL="0">
+              <a:lnSpc>
+                <a:spcPct val="125000"/>
+              </a:lnSpc>
+              <a:buNone/>
+            </a:pPr>
+            <a:r>
+              <a:rPr lang="en-US" sz="1400" dirty="0">
+                <a:solidFill>
+                  <a:srgbClr val="C9D3F5"/>
+                </a:solidFill>
+                <a:latin typeface="Courier New" pitchFamily="34" charset="0"/>
+                <a:ea typeface="Courier New" pitchFamily="34" charset="-122"/>
+                <a:cs typeface="Courier New" pitchFamily="34" charset="-120"/>
+              </a:rPr>
+              <a:t>.btn {</a:t>
+            </a:r>
+            <a:endParaRPr lang="en-US" sz="1400" dirty="0"/>
+          </a:p>
+          <a:p>
+            <a:pPr indent="0" marL="0">
+              <a:lnSpc>
+                <a:spcPct val="125000"/>
+              </a:lnSpc>
+              <a:buNone/>
+            </a:pPr>
+            <a:r>
+              <a:rPr lang="en-US" sz="1400" dirty="0">
+                <a:solidFill>
+                  <a:srgbClr val="C9D3F5"/>
+                </a:solidFill>
+                <a:latin typeface="Courier New" pitchFamily="34" charset="0"/>
+                <a:ea typeface="Courier New" pitchFamily="34" charset="-122"/>
+                <a:cs typeface="Courier New" pitchFamily="34" charset="-120"/>
+              </a:rPr>
+              <a:t>  display: inline-block;</a:t>
+            </a:r>
+            <a:endParaRPr lang="en-US" sz="1400" dirty="0"/>
+          </a:p>
+          <a:p>
+            <a:pPr indent="0" marL="0">
+              <a:lnSpc>
+                <a:spcPct val="125000"/>
+              </a:lnSpc>
+              <a:buNone/>
+            </a:pPr>
+            <a:r>
+              <a:rPr lang="en-US" sz="1400" dirty="0">
+                <a:solidFill>
+                  <a:srgbClr val="C9D3F5"/>
+                </a:solidFill>
+                <a:latin typeface="Courier New" pitchFamily="34" charset="0"/>
+                <a:ea typeface="Courier New" pitchFamily="34" charset="-122"/>
+                <a:cs typeface="Courier New" pitchFamily="34" charset="-120"/>
+              </a:rPr>
+              <a:t>  width: 120px;</a:t>
+            </a:r>
+            <a:endParaRPr lang="en-US" sz="1400" dirty="0"/>
+          </a:p>
+          <a:p>
+            <a:pPr indent="0" marL="0">
+              <a:lnSpc>
+                <a:spcPct val="125000"/>
+              </a:lnSpc>
+              <a:buNone/>
+            </a:pPr>
+            <a:r>
+              <a:rPr lang="en-US" sz="1400" dirty="0">
+                <a:solidFill>
+                  <a:srgbClr val="C9D3F5"/>
+                </a:solidFill>
+                <a:latin typeface="Courier New" pitchFamily="34" charset="0"/>
+                <a:ea typeface="Courier New" pitchFamily="34" charset="-122"/>
+                <a:cs typeface="Courier New" pitchFamily="34" charset="-120"/>
+              </a:rPr>
+              <a:t>  text-align: center;</a:t>
+            </a:r>
+            <a:endParaRPr lang="en-US" sz="1400" dirty="0"/>
+          </a:p>
+          <a:p>
+            <a:pPr indent="0" marL="0">
+              <a:lnSpc>
+                <a:spcPct val="125000"/>
+              </a:lnSpc>
+              <a:buNone/>
+            </a:pPr>
+            <a:r>
+              <a:rPr lang="en-US" sz="1400" dirty="0">
+                <a:solidFill>
+                  <a:srgbClr val="C9D3F5"/>
+                </a:solidFill>
+                <a:latin typeface="Courier New" pitchFamily="34" charset="0"/>
+                <a:ea typeface="Courier New" pitchFamily="34" charset="-122"/>
+                <a:cs typeface="Courier New" pitchFamily="34" charset="-120"/>
+              </a:rPr>
+              <a:t>  padding: 10px 0;</a:t>
+            </a:r>
+            <a:endParaRPr lang="en-US" sz="1400" dirty="0"/>
+          </a:p>
+          <a:p>
+            <a:pPr indent="0" marL="0">
+              <a:lnSpc>
+                <a:spcPct val="125000"/>
+              </a:lnSpc>
+              <a:buNone/>
+            </a:pPr>
+            <a:r>
+              <a:rPr lang="en-US" sz="1400" dirty="0">
+                <a:solidFill>
+                  <a:srgbClr val="C9D3F5"/>
+                </a:solidFill>
+                <a:latin typeface="Courier New" pitchFamily="34" charset="0"/>
+                <a:ea typeface="Courier New" pitchFamily="34" charset="-122"/>
+                <a:cs typeface="Courier New" pitchFamily="34" charset="-120"/>
+              </a:rPr>
+              <a:t>  margin-right: 8px;</a:t>
+            </a:r>
+            <a:endParaRPr lang="en-US" sz="1400" dirty="0"/>
+          </a:p>
+          <a:p>
+            <a:pPr indent="0" marL="0">
+              <a:lnSpc>
+                <a:spcPct val="125000"/>
+              </a:lnSpc>
+              <a:buNone/>
+            </a:pPr>
+            <a:r>
+              <a:rPr lang="en-US" sz="1400" dirty="0">
+                <a:solidFill>
+                  <a:srgbClr val="C9D3F5"/>
+                </a:solidFill>
+                <a:latin typeface="Courier New" pitchFamily="34" charset="0"/>
+                <a:ea typeface="Courier New" pitchFamily="34" charset="-122"/>
+                <a:cs typeface="Courier New" pitchFamily="34" charset="-120"/>
+              </a:rPr>
+              <a:t>}</a:t>
+            </a:r>
+            <a:endParaRPr lang="en-US" sz="1400" dirty="0"/>
+          </a:p>
+        </p:txBody>
+      </p:sp>
+      <p:sp>
+        <p:nvSpPr>
+          <p:cNvPr id="6" name="Text 4"/>
+          <p:cNvSpPr txBox="1"/>
+          <p:nvPr/>
+        </p:nvSpPr>
+        <p:spPr>
+          <a:xfrm>
+            <a:off x="640080" y="5486400"/>
+            <a:ext cx="10911535" cy="777240"/>
+          </a:xfrm>
+          <a:prstGeom prst="rect">
+            <a:avLst/>
+          </a:prstGeom>
+          <a:noFill/>
+          <a:ln/>
+        </p:spPr>
+        <p:txBody>
+          <a:bodyPr wrap="square" lIns="0" tIns="0" rIns="0" bIns="0" rtlCol="0" anchor="t"/>
+          <a:lstStyle/>
+          <a:p>
+            <a:pPr indent="0" marL="0">
+              <a:buNone/>
+            </a:pPr>
+            <a:r>
+              <a:rPr lang="en-US" sz="1300" dirty="0">
+                <a:solidFill>
+                  <a:srgbClr val="26262F"/>
+                </a:solidFill>
+                <a:latin typeface="Calibri" pitchFamily="34" charset="0"/>
+                <a:ea typeface="Calibri" pitchFamily="34" charset="-122"/>
+                <a:cs typeface="Calibri" pitchFamily="34" charset="-120"/>
+              </a:rPr>
+              <a:t>inline-block is what lets several fixed-width buttons sit on one line, side by side, without giving up width/height control the way plain inline would.</a:t>
+            </a:r>
+            <a:endParaRPr lang="en-US" sz="1300" dirty="0"/>
+          </a:p>
+        </p:txBody>
+      </p:sp>
+      <p:sp>
+        <p:nvSpPr>
+          <p:cNvPr id="7" name="Text 5"/>
           <p:cNvSpPr txBox="1"/>
           <p:nvPr/>
         </p:nvSpPr>
@@ -4738,7 +5081,7 @@
       </p:sp>
       <p:sp>
         <p:nvSpPr>
-          <p:cNvPr id="7" name="Text 4"/>
+          <p:cNvPr id="8" name="Text 6"/>
           <p:cNvSpPr txBox="1"/>
           <p:nvPr/>
         </p:nvSpPr>
@@ -4879,7 +5222,7 @@
                 <a:ea typeface="Cambria" pitchFamily="34" charset="-122"/>
                 <a:cs typeface="Cambria" pitchFamily="34" charset="-120"/>
               </a:rPr>
-              <a:t>Why Build a Menu This Way?</a:t>
+              <a:t>Turning a &lt;ul&gt; Into a Horizontal Menu</a:t>
             </a:r>
             <a:endParaRPr lang="en-US" sz="3400" dirty="0"/>
           </a:p>
@@ -4893,14 +5236,16 @@
         </p:nvSpPr>
         <p:spPr>
           <a:xfrm>
-            <a:off x="685800" y="2185416"/>
-            <a:ext cx="82296" cy="82296"/>
-          </a:xfrm>
-          <a:prstGeom prst="ellipse">
-            <a:avLst/>
+            <a:off x="640080" y="1965960"/>
+            <a:ext cx="10911535" cy="1453896"/>
+          </a:xfrm>
+          <a:prstGeom prst="roundRect">
+            <a:avLst>
+              <a:gd name="adj" fmla="val 5031"/>
+            </a:avLst>
           </a:prstGeom>
           <a:solidFill>
-            <a:srgbClr val="FF8A3D"/>
+            <a:srgbClr val="1E1E4C"/>
           </a:solidFill>
           <a:ln/>
         </p:spPr>
@@ -4913,24 +5258,86 @@
         </p:nvSpPr>
         <p:spPr>
           <a:xfrm>
-            <a:off x="960120" y="1892808"/>
-            <a:ext cx="10591495" cy="640080"/>
-          </a:xfrm>
-          <a:prstGeom prst="rect">
-            <a:avLst/>
-          </a:prstGeom>
-          <a:noFill/>
-          <a:ln/>
-        </p:spPr>
-        <p:txBody>
-          <a:bodyPr wrap="square" lIns="0" tIns="0" rIns="0" bIns="0" rtlCol="0" anchor="ctr"/>
+            <a:off x="960120" y="2194560"/>
+            <a:ext cx="10271455" cy="996696"/>
+          </a:xfrm>
+          <a:prstGeom prst="rect">
+            <a:avLst/>
+          </a:prstGeom>
+          <a:noFill/>
+          <a:ln/>
+        </p:spPr>
+        <p:txBody>
+          <a:bodyPr wrap="square" lIns="0" tIns="0" rIns="0" bIns="0" rtlCol="0" anchor="t"/>
           <a:lstStyle/>
           <a:p>
             <a:pPr indent="0" marL="0">
-              <a:buNone/>
-            </a:pPr>
-            <a:r>
-              <a:rPr lang="en-US" sz="1500" dirty="0">
+              <a:lnSpc>
+                <a:spcPct val="125000"/>
+              </a:lnSpc>
+              <a:buNone/>
+            </a:pPr>
+            <a:r>
+              <a:rPr lang="en-US" sz="1400" dirty="0">
+                <a:solidFill>
+                  <a:srgbClr val="C9D3F5"/>
+                </a:solidFill>
+                <a:latin typeface="Courier New" pitchFamily="34" charset="0"/>
+                <a:ea typeface="Courier New" pitchFamily="34" charset="-122"/>
+                <a:cs typeface="Courier New" pitchFamily="34" charset="-120"/>
+              </a:rPr>
+              <a:t>.menu { list-style: none; margin: 0; padding: 0; }</a:t>
+            </a:r>
+            <a:endParaRPr lang="en-US" sz="1400" dirty="0"/>
+          </a:p>
+          <a:p>
+            <a:pPr indent="0" marL="0">
+              <a:lnSpc>
+                <a:spcPct val="125000"/>
+              </a:lnSpc>
+              <a:buNone/>
+            </a:pPr>
+            <a:r>
+              <a:rPr lang="en-US" sz="1400" dirty="0">
+                <a:solidFill>
+                  <a:srgbClr val="C9D3F5"/>
+                </a:solidFill>
+                <a:latin typeface="Courier New" pitchFamily="34" charset="0"/>
+                <a:ea typeface="Courier New" pitchFamily="34" charset="-122"/>
+                <a:cs typeface="Courier New" pitchFamily="34" charset="-120"/>
+              </a:rPr>
+              <a:t>.menu li { display: inline-block; margin-right: 20px; }</a:t>
+            </a:r>
+            <a:endParaRPr lang="en-US" sz="1400" dirty="0"/>
+          </a:p>
+        </p:txBody>
+      </p:sp>
+      <p:sp>
+        <p:nvSpPr>
+          <p:cNvPr id="6" name="Text 4"/>
+          <p:cNvSpPr txBox="1"/>
+          <p:nvPr/>
+        </p:nvSpPr>
+        <p:spPr>
+          <a:xfrm>
+            <a:off x="640080" y="3648456"/>
+            <a:ext cx="10911535" cy="2615184"/>
+          </a:xfrm>
+          <a:prstGeom prst="rect">
+            <a:avLst/>
+          </a:prstGeom>
+          <a:noFill/>
+          <a:ln/>
+        </p:spPr>
+        <p:txBody>
+          <a:bodyPr wrap="square" lIns="0" tIns="0" rIns="0" bIns="0" rtlCol="0" anchor="t"/>
+          <a:lstStyle/>
+          <a:p>
+            <a:pPr indent="0" marL="0">
+              <a:buNone/>
+            </a:pPr>
+            <a:r>
+              <a:rPr lang="en-US" sz="1300" dirty="0">
                 <a:solidFill>
                   <a:srgbClr val="26262F"/>
                 </a:solidFill>
@@ -4938,133 +5345,15 @@
                 <a:ea typeface="Calibri" pitchFamily="34" charset="-122"/>
                 <a:cs typeface="Calibri" pitchFamily="34" charset="-120"/>
               </a:rPr>
-              <a:t>A nav menu IS, conceptually, a list of links — that's exactly what it is to a screen reader and a search engine</a:t>
-            </a:r>
-            <a:endParaRPr lang="en-US" sz="1500" dirty="0"/>
-          </a:p>
-        </p:txBody>
-      </p:sp>
-      <p:sp>
-        <p:nvSpPr>
-          <p:cNvPr id="6" name="Shape 4"/>
-          <p:cNvSpPr/>
-          <p:nvPr/>
-        </p:nvSpPr>
-        <p:spPr>
-          <a:xfrm>
-            <a:off x="685800" y="3008376"/>
-            <a:ext cx="82296" cy="82296"/>
-          </a:xfrm>
-          <a:prstGeom prst="ellipse">
-            <a:avLst/>
-          </a:prstGeom>
-          <a:solidFill>
-            <a:srgbClr val="FF8A3D"/>
-          </a:solidFill>
-          <a:ln/>
-        </p:spPr>
+              <a:t>li is block by default — this one change turns a vertical list into a horizontal menu, with no HTML change at all.</a:t>
+            </a:r>
+            <a:endParaRPr lang="en-US" sz="1300" dirty="0"/>
+          </a:p>
+        </p:txBody>
       </p:sp>
       <p:sp>
         <p:nvSpPr>
           <p:cNvPr id="7" name="Text 5"/>
-          <p:cNvSpPr txBox="1"/>
-          <p:nvPr/>
-        </p:nvSpPr>
-        <p:spPr>
-          <a:xfrm>
-            <a:off x="960120" y="2715768"/>
-            <a:ext cx="10591495" cy="640080"/>
-          </a:xfrm>
-          <a:prstGeom prst="rect">
-            <a:avLst/>
-          </a:prstGeom>
-          <a:noFill/>
-          <a:ln/>
-        </p:spPr>
-        <p:txBody>
-          <a:bodyPr wrap="square" lIns="0" tIns="0" rIns="0" bIns="0" rtlCol="0" anchor="ctr"/>
-          <a:lstStyle/>
-          <a:p>
-            <a:pPr indent="0" marL="0">
-              <a:buNone/>
-            </a:pPr>
-            <a:r>
-              <a:rPr lang="en-US" sz="1500" dirty="0">
-                <a:solidFill>
-                  <a:srgbClr val="26262F"/>
-                </a:solidFill>
-                <a:latin typeface="Calibri" pitchFamily="34" charset="0"/>
-                <a:ea typeface="Calibri" pitchFamily="34" charset="-122"/>
-                <a:cs typeface="Calibri" pitchFamily="34" charset="-120"/>
-              </a:rPr>
-              <a:t>Screen readers announce it as a list, telling users how many links there are</a:t>
-            </a:r>
-            <a:endParaRPr lang="en-US" sz="1500" dirty="0"/>
-          </a:p>
-        </p:txBody>
-      </p:sp>
-      <p:sp>
-        <p:nvSpPr>
-          <p:cNvPr id="8" name="Shape 6"/>
-          <p:cNvSpPr/>
-          <p:nvPr/>
-        </p:nvSpPr>
-        <p:spPr>
-          <a:xfrm>
-            <a:off x="685800" y="3831336"/>
-            <a:ext cx="82296" cy="82296"/>
-          </a:xfrm>
-          <a:prstGeom prst="ellipse">
-            <a:avLst/>
-          </a:prstGeom>
-          <a:solidFill>
-            <a:srgbClr val="FF8A3D"/>
-          </a:solidFill>
-          <a:ln/>
-        </p:spPr>
-      </p:sp>
-      <p:sp>
-        <p:nvSpPr>
-          <p:cNvPr id="9" name="Text 7"/>
-          <p:cNvSpPr txBox="1"/>
-          <p:nvPr/>
-        </p:nvSpPr>
-        <p:spPr>
-          <a:xfrm>
-            <a:off x="960120" y="3538728"/>
-            <a:ext cx="10591495" cy="640080"/>
-          </a:xfrm>
-          <a:prstGeom prst="rect">
-            <a:avLst/>
-          </a:prstGeom>
-          <a:noFill/>
-          <a:ln/>
-        </p:spPr>
-        <p:txBody>
-          <a:bodyPr wrap="square" lIns="0" tIns="0" rIns="0" bIns="0" rtlCol="0" anchor="ctr"/>
-          <a:lstStyle/>
-          <a:p>
-            <a:pPr indent="0" marL="0">
-              <a:buNone/>
-            </a:pPr>
-            <a:r>
-              <a:rPr lang="en-US" sz="1500" dirty="0">
-                <a:solidFill>
-                  <a:srgbClr val="26262F"/>
-                </a:solidFill>
-                <a:latin typeface="Calibri" pitchFamily="34" charset="0"/>
-                <a:ea typeface="Calibri" pitchFamily="34" charset="-122"/>
-                <a:cs typeface="Calibri" pitchFamily="34" charset="-120"/>
-              </a:rPr>
-              <a:t>The HTML never has to change later — redesign to a dropdown or hamburger menu by changing only CSS</a:t>
-            </a:r>
-            <a:endParaRPr lang="en-US" sz="1500" dirty="0"/>
-          </a:p>
-        </p:txBody>
-      </p:sp>
-      <p:sp>
-        <p:nvSpPr>
-          <p:cNvPr id="10" name="Text 8"/>
           <p:cNvSpPr txBox="1"/>
           <p:nvPr/>
         </p:nvSpPr>
@@ -5103,7 +5392,7 @@
       </p:sp>
       <p:sp>
         <p:nvSpPr>
-          <p:cNvPr id="11" name="Text 9"/>
+          <p:cNvPr id="8" name="Text 6"/>
           <p:cNvSpPr txBox="1"/>
           <p:nvPr/>
         </p:nvSpPr>
@@ -5205,7 +5494,7 @@
                 <a:ea typeface="Calibri" pitchFamily="34" charset="-122"/>
                 <a:cs typeface="Calibri" pitchFamily="34" charset="-120"/>
               </a:rPr>
-              <a:t>FINISHING TOUCHES</a:t>
+              <a:t>A PRACTICAL EXAMPLE</a:t>
             </a:r>
             <a:endParaRPr lang="en-US" sz="1300" dirty="0"/>
           </a:p>
@@ -5244,7 +5533,7 @@
                 <a:ea typeface="Cambria" pitchFamily="34" charset="-122"/>
                 <a:cs typeface="Cambria" pitchFamily="34" charset="-120"/>
               </a:rPr>
-              <a:t>Borders, Radius, and Shadow</a:t>
+              <a:t>Before and After, Rendered</a:t>
             </a:r>
             <a:endParaRPr lang="en-US" sz="3400" dirty="0"/>
           </a:p>
@@ -5258,174 +5547,59 @@
         </p:nvSpPr>
         <p:spPr>
           <a:xfrm>
-            <a:off x="640080" y="1965960"/>
-            <a:ext cx="10911535" cy="3374136"/>
+            <a:off x="530352" y="1947672"/>
+            <a:ext cx="11130991" cy="4334256"/>
           </a:xfrm>
           <a:prstGeom prst="roundRect">
             <a:avLst>
-              <a:gd name="adj" fmla="val 2168"/>
+              <a:gd name="adj" fmla="val 1266"/>
             </a:avLst>
           </a:prstGeom>
           <a:solidFill>
-            <a:srgbClr val="1E1E4C"/>
+            <a:srgbClr val="FFFFFF"/>
           </a:solidFill>
-          <a:ln/>
-        </p:spPr>
-      </p:sp>
-      <p:sp>
-        <p:nvSpPr>
-          <p:cNvPr id="5" name="Text 3"/>
-          <p:cNvSpPr txBox="1"/>
-          <p:nvPr/>
-        </p:nvSpPr>
-        <p:spPr>
-          <a:xfrm>
-            <a:off x="960120" y="2194560"/>
-            <a:ext cx="10271455" cy="2916936"/>
-          </a:xfrm>
-          <a:prstGeom prst="rect">
-            <a:avLst/>
-          </a:prstGeom>
-          <a:noFill/>
-          <a:ln/>
-        </p:spPr>
-        <p:txBody>
-          <a:bodyPr wrap="square" lIns="0" tIns="0" rIns="0" bIns="0" rtlCol="0" anchor="t"/>
-          <a:lstStyle/>
-          <a:p>
-            <a:pPr indent="0" marL="0">
-              <a:lnSpc>
-                <a:spcPct val="125000"/>
-              </a:lnSpc>
-              <a:buNone/>
-            </a:pPr>
-            <a:r>
-              <a:rPr lang="en-US" sz="1400" dirty="0">
-                <a:solidFill>
-                  <a:srgbClr val="C9D3F5"/>
-                </a:solidFill>
-                <a:latin typeface="Courier New" pitchFamily="34" charset="0"/>
-                <a:ea typeface="Courier New" pitchFamily="34" charset="-122"/>
-                <a:cs typeface="Courier New" pitchFamily="34" charset="-120"/>
-              </a:rPr>
-              <a:t>.card {</a:t>
-            </a:r>
-            <a:endParaRPr lang="en-US" sz="1400" dirty="0"/>
-          </a:p>
-          <a:p>
-            <a:pPr indent="0" marL="0">
-              <a:lnSpc>
-                <a:spcPct val="125000"/>
-              </a:lnSpc>
-              <a:buNone/>
-            </a:pPr>
-            <a:r>
-              <a:rPr lang="en-US" sz="1400" dirty="0">
-                <a:solidFill>
-                  <a:srgbClr val="C9D3F5"/>
-                </a:solidFill>
-                <a:latin typeface="Courier New" pitchFamily="34" charset="0"/>
-                <a:ea typeface="Courier New" pitchFamily="34" charset="-122"/>
-                <a:cs typeface="Courier New" pitchFamily="34" charset="-120"/>
-              </a:rPr>
-              <a:t>  border: 2px solid #333;</a:t>
-            </a:r>
-            <a:endParaRPr lang="en-US" sz="1400" dirty="0"/>
-          </a:p>
-          <a:p>
-            <a:pPr indent="0" marL="0">
-              <a:lnSpc>
-                <a:spcPct val="125000"/>
-              </a:lnSpc>
-              <a:buNone/>
-            </a:pPr>
-            <a:r>
-              <a:rPr lang="en-US" sz="1400" dirty="0">
-                <a:solidFill>
-                  <a:srgbClr val="C9D3F5"/>
-                </a:solidFill>
-                <a:latin typeface="Courier New" pitchFamily="34" charset="0"/>
-                <a:ea typeface="Courier New" pitchFamily="34" charset="-122"/>
-                <a:cs typeface="Courier New" pitchFamily="34" charset="-120"/>
-              </a:rPr>
-              <a:t>  border-radius: 8px;</a:t>
-            </a:r>
-            <a:endParaRPr lang="en-US" sz="1400" dirty="0"/>
-          </a:p>
-          <a:p>
-            <a:pPr indent="0" marL="0">
-              <a:lnSpc>
-                <a:spcPct val="125000"/>
-              </a:lnSpc>
-              <a:buNone/>
-            </a:pPr>
-            <a:r>
-              <a:rPr lang="en-US" sz="1400" dirty="0">
-                <a:solidFill>
-                  <a:srgbClr val="C9D3F5"/>
-                </a:solidFill>
-                <a:latin typeface="Courier New" pitchFamily="34" charset="0"/>
-                <a:ea typeface="Courier New" pitchFamily="34" charset="-122"/>
-                <a:cs typeface="Courier New" pitchFamily="34" charset="-120"/>
-              </a:rPr>
-              <a:t>  box-shadow: 0 4px 8px rgba(0,0,0,0.2);</a:t>
-            </a:r>
-            <a:endParaRPr lang="en-US" sz="1400" dirty="0"/>
-          </a:p>
-          <a:p>
-            <a:pPr indent="0" marL="0">
-              <a:lnSpc>
-                <a:spcPct val="125000"/>
-              </a:lnSpc>
-              <a:buNone/>
-            </a:pPr>
-            <a:r>
-              <a:rPr lang="en-US" sz="1400" dirty="0">
-                <a:solidFill>
-                  <a:srgbClr val="C9D3F5"/>
-                </a:solidFill>
-                <a:latin typeface="Courier New" pitchFamily="34" charset="0"/>
-                <a:ea typeface="Courier New" pitchFamily="34" charset="-122"/>
-                <a:cs typeface="Courier New" pitchFamily="34" charset="-120"/>
-              </a:rPr>
-              <a:t>}</a:t>
-            </a:r>
-            <a:endParaRPr lang="en-US" sz="1400" dirty="0"/>
-          </a:p>
-          <a:p>
-            <a:pPr indent="0" marL="0">
-              <a:lnSpc>
-                <a:spcPct val="125000"/>
-              </a:lnSpc>
-              <a:buNone/>
-            </a:pPr>
-            <a:endParaRPr lang="en-US" sz="1400" dirty="0"/>
-          </a:p>
-          <a:p>
-            <a:pPr indent="0" marL="0">
-              <a:lnSpc>
-                <a:spcPct val="125000"/>
-              </a:lnSpc>
-              <a:buNone/>
-            </a:pPr>
-            <a:r>
-              <a:rPr lang="en-US" sz="1400" dirty="0">
-                <a:solidFill>
-                  <a:srgbClr val="C9D3F5"/>
-                </a:solidFill>
-                <a:latin typeface="Courier New" pitchFamily="34" charset="0"/>
-                <a:ea typeface="Courier New" pitchFamily="34" charset="-122"/>
-                <a:cs typeface="Courier New" pitchFamily="34" charset="-120"/>
-              </a:rPr>
-              <a:t>.avatar { border-radius: 50%; }  /* a circle */</a:t>
-            </a:r>
-            <a:endParaRPr lang="en-US" sz="1400" dirty="0"/>
-          </a:p>
-        </p:txBody>
-      </p:sp>
-      <p:sp>
-        <p:nvSpPr>
-          <p:cNvPr id="6" name="Text 4"/>
+          <a:ln w="12700">
+            <a:solidFill>
+              <a:srgbClr val="E2E2EE"/>
+            </a:solidFill>
+            <a:prstDash val="solid"/>
+          </a:ln>
+          <a:effectLst>
+            <a:outerShdw sx="100000" sy="100000" kx="0" ky="0" algn="bl" rotWithShape="0" blurRad="101600" dist="38100" dir="5400000">
+              <a:srgbClr val="000000">
+                <a:alpha val="12000"/>
+              </a:srgbClr>
+            </a:outerShdw>
+          </a:effectLst>
+        </p:spPr>
+      </p:sp>
+      <p:pic>
+        <p:nvPicPr>
+          <p:cNvPr id="5" name="Image 0" descr="D:/GitHub/mern-web-book/docs/assets/img/lecture-06/ul-menu-display.png">    </p:cNvPr>
+          <p:cNvPicPr>
+            <a:picLocks noChangeAspect="1"/>
+          </p:cNvPicPr>
+          <p:nvPr/>
+        </p:nvPicPr>
+        <p:blipFill>
+          <a:blip r:embed="rId1"/>
+          <a:stretch>
+            <a:fillRect/>
+          </a:stretch>
+        </p:blipFill>
+        <p:spPr>
+          <a:xfrm>
+            <a:off x="2515372" y="2057400"/>
+            <a:ext cx="7160950" cy="4114800"/>
+          </a:xfrm>
+          <a:prstGeom prst="rect">
+            <a:avLst/>
+          </a:prstGeom>
+        </p:spPr>
+      </p:pic>
+      <p:sp>
+        <p:nvSpPr>
+          <p:cNvPr id="6" name="Text 3"/>
           <p:cNvSpPr txBox="1"/>
           <p:nvPr/>
         </p:nvSpPr>
@@ -5464,7 +5638,7 @@
       </p:sp>
       <p:sp>
         <p:nvSpPr>
-          <p:cNvPr id="7" name="Text 5"/>
+          <p:cNvPr id="7" name="Text 4"/>
           <p:cNvSpPr txBox="1"/>
           <p:nvPr/>
         </p:nvSpPr>
@@ -5566,7 +5740,7 @@
                 <a:ea typeface="Calibri" pitchFamily="34" charset="-122"/>
                 <a:cs typeface="Calibri" pitchFamily="34" charset="-120"/>
               </a:rPr>
-              <a:t>FINISHING TOUCHES</a:t>
+              <a:t>A PRACTICAL EXAMPLE</a:t>
             </a:r>
             <a:endParaRPr lang="en-US" sz="1300" dirty="0"/>
           </a:p>
@@ -5605,7 +5779,7 @@
                 <a:ea typeface="Cambria" pitchFamily="34" charset="-122"/>
                 <a:cs typeface="Cambria" pitchFamily="34" charset="-120"/>
               </a:rPr>
-              <a:t>Consistent Spacing Techniques</a:t>
+              <a:t>Why Build a Menu This Way?</a:t>
             </a:r>
             <a:endParaRPr lang="en-US" sz="3400" dirty="0"/>
           </a:p>
@@ -5664,7 +5838,7 @@
                 <a:ea typeface="Calibri" pitchFamily="34" charset="-122"/>
                 <a:cs typeface="Calibri" pitchFamily="34" charset="-120"/>
               </a:rPr>
-              <a:t>A spacing scale — pick a small set of values (4px, 8px, 16px, 24px) and only ever use those</a:t>
+              <a:t>A nav menu IS, conceptually, a list of links — that's exactly what it is to a screen reader and a search engine</a:t>
             </a:r>
             <a:endParaRPr lang="en-US" sz="1500" dirty="0"/>
           </a:p>
@@ -5723,7 +5897,7 @@
                 <a:ea typeface="Calibri" pitchFamily="34" charset="-122"/>
                 <a:cs typeface="Calibri" pitchFamily="34" charset="-120"/>
               </a:rPr>
-              <a:t>CSS custom properties — define --space-md: 16px once in :root, reuse everywhere with var(--space-md)</a:t>
+              <a:t>Screen readers announce it as a list, telling users how many links there are</a:t>
             </a:r>
             <a:endParaRPr lang="en-US" sz="1500" dirty="0"/>
           </a:p>
@@ -5782,7 +5956,7 @@
                 <a:ea typeface="Calibri" pitchFamily="34" charset="-122"/>
                 <a:cs typeface="Calibri" pitchFamily="34" charset="-120"/>
               </a:rPr>
-              <a:t>Change the whole site's spacing rhythm by editing one value in :root</a:t>
+              <a:t>The HTML never has to change later — redesign to a dropdown or hamburger menu by changing only CSS</a:t>
             </a:r>
             <a:endParaRPr lang="en-US" sz="1500" dirty="0"/>
           </a:p>
@@ -5880,7 +6054,7 @@
     <p:bg>
       <p:bgPr>
         <a:solidFill>
-          <a:srgbClr val="2B2B7A"/>
+          <a:srgbClr val="FFFFFF"/>
         </a:solidFill>
       </p:bgPr>
     </p:bg>
@@ -5906,24 +6080,24 @@
         </p:nvSpPr>
         <p:spPr>
           <a:xfrm>
-            <a:off x="822960" y="731520"/>
-            <a:ext cx="9144000" cy="457200"/>
-          </a:xfrm>
-          <a:prstGeom prst="rect">
-            <a:avLst/>
-          </a:prstGeom>
-          <a:noFill/>
-          <a:ln/>
-        </p:spPr>
-        <p:txBody>
-          <a:bodyPr wrap="square" lIns="0" tIns="0" rIns="0" bIns="0" rtlCol="0" anchor="ctr"/>
-          <a:lstStyle/>
-          <a:p>
-            <a:pPr indent="0" marL="0">
-              <a:buNone/>
-            </a:pPr>
-            <a:r>
-              <a:rPr lang="en-US" sz="1500" b="1" spc="400" kern="0" dirty="0">
+            <a:off x="640080" y="457200"/>
+            <a:ext cx="10058400" cy="365760"/>
+          </a:xfrm>
+          <a:prstGeom prst="rect">
+            <a:avLst/>
+          </a:prstGeom>
+          <a:noFill/>
+          <a:ln/>
+        </p:spPr>
+        <p:txBody>
+          <a:bodyPr wrap="square" lIns="0" tIns="0" rIns="0" bIns="0" rtlCol="0" anchor="ctr"/>
+          <a:lstStyle/>
+          <a:p>
+            <a:pPr algn="l" indent="0" marL="0">
+              <a:buNone/>
+            </a:pPr>
+            <a:r>
+              <a:rPr lang="en-US" sz="1300" b="1" spc="300" kern="0" dirty="0">
                 <a:solidFill>
                   <a:srgbClr val="FF8A3D"/>
                 </a:solidFill>
@@ -5931,9 +6105,9 @@
                 <a:ea typeface="Calibri" pitchFamily="34" charset="-122"/>
                 <a:cs typeface="Calibri" pitchFamily="34" charset="-120"/>
               </a:rPr>
-              <a:t>KEY TAKEAWAYS</a:t>
-            </a:r>
-            <a:endParaRPr lang="en-US" sz="1500" dirty="0"/>
+              <a:t>FINISHING TOUCHES</a:t>
+            </a:r>
+            <a:endParaRPr lang="en-US" sz="1300" dirty="0"/>
           </a:p>
         </p:txBody>
       </p:sp>
@@ -5945,32 +6119,32 @@
         </p:nvSpPr>
         <p:spPr>
           <a:xfrm>
-            <a:off x="777240" y="1188720"/>
-            <a:ext cx="10515600" cy="822960"/>
-          </a:xfrm>
-          <a:prstGeom prst="rect">
-            <a:avLst/>
-          </a:prstGeom>
-          <a:noFill/>
-          <a:ln/>
-        </p:spPr>
-        <p:txBody>
-          <a:bodyPr wrap="square" lIns="0" tIns="0" rIns="0" bIns="0" rtlCol="0" anchor="ctr"/>
-          <a:lstStyle/>
-          <a:p>
-            <a:pPr indent="0" marL="0">
+            <a:off x="640080" y="841248"/>
+            <a:ext cx="10881360" cy="914400"/>
+          </a:xfrm>
+          <a:prstGeom prst="rect">
+            <a:avLst/>
+          </a:prstGeom>
+          <a:noFill/>
+          <a:ln/>
+        </p:spPr>
+        <p:txBody>
+          <a:bodyPr wrap="square" lIns="0" tIns="0" rIns="0" bIns="0" rtlCol="0" anchor="ctr"/>
+          <a:lstStyle/>
+          <a:p>
+            <a:pPr algn="l" indent="0" marL="0">
               <a:buNone/>
             </a:pPr>
             <a:r>
               <a:rPr lang="en-US" sz="3400" b="1" dirty="0">
                 <a:solidFill>
-                  <a:srgbClr val="FFFFFF"/>
+                  <a:srgbClr val="2B2B7A"/>
                 </a:solidFill>
                 <a:latin typeface="Cambria" pitchFamily="34" charset="0"/>
                 <a:ea typeface="Cambria" pitchFamily="34" charset="-122"/>
                 <a:cs typeface="Cambria" pitchFamily="34" charset="-120"/>
               </a:rPr>
-              <a:t>Lecture 6 in Six Points</a:t>
+              <a:t>Borders, Radius, and Shadow</a:t>
             </a:r>
             <a:endParaRPr lang="en-US" sz="3400" dirty="0"/>
           </a:p>
@@ -5984,14 +6158,16 @@
         </p:nvSpPr>
         <p:spPr>
           <a:xfrm>
-            <a:off x="822960" y="2286000"/>
-            <a:ext cx="438912" cy="438912"/>
-          </a:xfrm>
-          <a:prstGeom prst="ellipse">
-            <a:avLst/>
+            <a:off x="640080" y="1965960"/>
+            <a:ext cx="10911535" cy="3374136"/>
+          </a:xfrm>
+          <a:prstGeom prst="roundRect">
+            <a:avLst>
+              <a:gd name="adj" fmla="val 2168"/>
+            </a:avLst>
           </a:prstGeom>
           <a:solidFill>
-            <a:srgbClr val="FF8A3D"/>
+            <a:srgbClr val="1E1E4C"/>
           </a:solidFill>
           <a:ln/>
         </p:spPr>
@@ -6004,569 +6180,152 @@
         </p:nvSpPr>
         <p:spPr>
           <a:xfrm>
-            <a:off x="822960" y="2286000"/>
-            <a:ext cx="438912" cy="438912"/>
-          </a:xfrm>
-          <a:prstGeom prst="rect">
-            <a:avLst/>
-          </a:prstGeom>
-          <a:noFill/>
-          <a:ln/>
-        </p:spPr>
-        <p:txBody>
-          <a:bodyPr wrap="square" lIns="0" tIns="0" rIns="0" bIns="0" rtlCol="0" anchor="ctr"/>
-          <a:lstStyle/>
-          <a:p>
-            <a:pPr algn="ctr" indent="0" marL="0">
-              <a:buNone/>
-            </a:pPr>
-            <a:r>
-              <a:rPr lang="en-US" sz="1500" b="1" dirty="0">
-                <a:solidFill>
-                  <a:srgbClr val="FFFFFF"/>
-                </a:solidFill>
-                <a:latin typeface="Calibri" pitchFamily="34" charset="0"/>
-                <a:ea typeface="Calibri" pitchFamily="34" charset="-122"/>
-                <a:cs typeface="Calibri" pitchFamily="34" charset="-120"/>
-              </a:rPr>
-              <a:t>1</a:t>
-            </a:r>
-            <a:endParaRPr lang="en-US" sz="1500" dirty="0"/>
+            <a:off x="960120" y="2194560"/>
+            <a:ext cx="10271455" cy="2916936"/>
+          </a:xfrm>
+          <a:prstGeom prst="rect">
+            <a:avLst/>
+          </a:prstGeom>
+          <a:noFill/>
+          <a:ln/>
+        </p:spPr>
+        <p:txBody>
+          <a:bodyPr wrap="square" lIns="0" tIns="0" rIns="0" bIns="0" rtlCol="0" anchor="t"/>
+          <a:lstStyle/>
+          <a:p>
+            <a:pPr indent="0" marL="0">
+              <a:lnSpc>
+                <a:spcPct val="125000"/>
+              </a:lnSpc>
+              <a:buNone/>
+            </a:pPr>
+            <a:r>
+              <a:rPr lang="en-US" sz="1400" dirty="0">
+                <a:solidFill>
+                  <a:srgbClr val="C9D3F5"/>
+                </a:solidFill>
+                <a:latin typeface="Courier New" pitchFamily="34" charset="0"/>
+                <a:ea typeface="Courier New" pitchFamily="34" charset="-122"/>
+                <a:cs typeface="Courier New" pitchFamily="34" charset="-120"/>
+              </a:rPr>
+              <a:t>.card {</a:t>
+            </a:r>
+            <a:endParaRPr lang="en-US" sz="1400" dirty="0"/>
+          </a:p>
+          <a:p>
+            <a:pPr indent="0" marL="0">
+              <a:lnSpc>
+                <a:spcPct val="125000"/>
+              </a:lnSpc>
+              <a:buNone/>
+            </a:pPr>
+            <a:r>
+              <a:rPr lang="en-US" sz="1400" dirty="0">
+                <a:solidFill>
+                  <a:srgbClr val="C9D3F5"/>
+                </a:solidFill>
+                <a:latin typeface="Courier New" pitchFamily="34" charset="0"/>
+                <a:ea typeface="Courier New" pitchFamily="34" charset="-122"/>
+                <a:cs typeface="Courier New" pitchFamily="34" charset="-120"/>
+              </a:rPr>
+              <a:t>  border: 2px solid #333;</a:t>
+            </a:r>
+            <a:endParaRPr lang="en-US" sz="1400" dirty="0"/>
+          </a:p>
+          <a:p>
+            <a:pPr indent="0" marL="0">
+              <a:lnSpc>
+                <a:spcPct val="125000"/>
+              </a:lnSpc>
+              <a:buNone/>
+            </a:pPr>
+            <a:r>
+              <a:rPr lang="en-US" sz="1400" dirty="0">
+                <a:solidFill>
+                  <a:srgbClr val="C9D3F5"/>
+                </a:solidFill>
+                <a:latin typeface="Courier New" pitchFamily="34" charset="0"/>
+                <a:ea typeface="Courier New" pitchFamily="34" charset="-122"/>
+                <a:cs typeface="Courier New" pitchFamily="34" charset="-120"/>
+              </a:rPr>
+              <a:t>  border-radius: 8px;</a:t>
+            </a:r>
+            <a:endParaRPr lang="en-US" sz="1400" dirty="0"/>
+          </a:p>
+          <a:p>
+            <a:pPr indent="0" marL="0">
+              <a:lnSpc>
+                <a:spcPct val="125000"/>
+              </a:lnSpc>
+              <a:buNone/>
+            </a:pPr>
+            <a:r>
+              <a:rPr lang="en-US" sz="1400" dirty="0">
+                <a:solidFill>
+                  <a:srgbClr val="C9D3F5"/>
+                </a:solidFill>
+                <a:latin typeface="Courier New" pitchFamily="34" charset="0"/>
+                <a:ea typeface="Courier New" pitchFamily="34" charset="-122"/>
+                <a:cs typeface="Courier New" pitchFamily="34" charset="-120"/>
+              </a:rPr>
+              <a:t>  box-shadow: 0 4px 8px rgba(0,0,0,0.2);</a:t>
+            </a:r>
+            <a:endParaRPr lang="en-US" sz="1400" dirty="0"/>
+          </a:p>
+          <a:p>
+            <a:pPr indent="0" marL="0">
+              <a:lnSpc>
+                <a:spcPct val="125000"/>
+              </a:lnSpc>
+              <a:buNone/>
+            </a:pPr>
+            <a:r>
+              <a:rPr lang="en-US" sz="1400" dirty="0">
+                <a:solidFill>
+                  <a:srgbClr val="C9D3F5"/>
+                </a:solidFill>
+                <a:latin typeface="Courier New" pitchFamily="34" charset="0"/>
+                <a:ea typeface="Courier New" pitchFamily="34" charset="-122"/>
+                <a:cs typeface="Courier New" pitchFamily="34" charset="-120"/>
+              </a:rPr>
+              <a:t>}</a:t>
+            </a:r>
+            <a:endParaRPr lang="en-US" sz="1400" dirty="0"/>
+          </a:p>
+          <a:p>
+            <a:pPr indent="0" marL="0">
+              <a:lnSpc>
+                <a:spcPct val="125000"/>
+              </a:lnSpc>
+              <a:buNone/>
+            </a:pPr>
+            <a:endParaRPr lang="en-US" sz="1400" dirty="0"/>
+          </a:p>
+          <a:p>
+            <a:pPr indent="0" marL="0">
+              <a:lnSpc>
+                <a:spcPct val="125000"/>
+              </a:lnSpc>
+              <a:buNone/>
+            </a:pPr>
+            <a:r>
+              <a:rPr lang="en-US" sz="1400" dirty="0">
+                <a:solidFill>
+                  <a:srgbClr val="C9D3F5"/>
+                </a:solidFill>
+                <a:latin typeface="Courier New" pitchFamily="34" charset="0"/>
+                <a:ea typeface="Courier New" pitchFamily="34" charset="-122"/>
+                <a:cs typeface="Courier New" pitchFamily="34" charset="-120"/>
+              </a:rPr>
+              <a:t>.avatar { border-radius: 50%; }  /* a circle */</a:t>
+            </a:r>
+            <a:endParaRPr lang="en-US" sz="1400" dirty="0"/>
           </a:p>
         </p:txBody>
       </p:sp>
       <p:sp>
         <p:nvSpPr>
           <p:cNvPr id="6" name="Text 4"/>
-          <p:cNvSpPr txBox="1"/>
-          <p:nvPr/>
-        </p:nvSpPr>
-        <p:spPr>
-          <a:xfrm>
-            <a:off x="1463040" y="2194560"/>
-            <a:ext cx="10058400" cy="640080"/>
-          </a:xfrm>
-          <a:prstGeom prst="rect">
-            <a:avLst/>
-          </a:prstGeom>
-          <a:noFill/>
-          <a:ln/>
-        </p:spPr>
-        <p:txBody>
-          <a:bodyPr wrap="square" lIns="0" tIns="0" rIns="0" bIns="0" rtlCol="0" anchor="ctr"/>
-          <a:lstStyle/>
-          <a:p>
-            <a:pPr indent="0" marL="0">
-              <a:buNone/>
-            </a:pPr>
-            <a:r>
-              <a:rPr lang="en-US" sz="1250" dirty="0">
-                <a:solidFill>
-                  <a:srgbClr val="C9D3F5"/>
-                </a:solidFill>
-                <a:latin typeface="Calibri" pitchFamily="34" charset="0"/>
-                <a:ea typeface="Calibri" pitchFamily="34" charset="-122"/>
-                <a:cs typeface="Calibri" pitchFamily="34" charset="-120"/>
-              </a:rPr>
-              <a:t>Every box has four layers: content, padding, border, margin — vertically adjacent margins can collapse to the larger value.</a:t>
-            </a:r>
-            <a:endParaRPr lang="en-US" sz="1250" dirty="0"/>
-          </a:p>
-        </p:txBody>
-      </p:sp>
-      <p:sp>
-        <p:nvSpPr>
-          <p:cNvPr id="7" name="Shape 5"/>
-          <p:cNvSpPr/>
-          <p:nvPr/>
-        </p:nvSpPr>
-        <p:spPr>
-          <a:xfrm>
-            <a:off x="822960" y="2971800"/>
-            <a:ext cx="438912" cy="438912"/>
-          </a:xfrm>
-          <a:prstGeom prst="ellipse">
-            <a:avLst/>
-          </a:prstGeom>
-          <a:solidFill>
-            <a:srgbClr val="FF8A3D"/>
-          </a:solidFill>
-          <a:ln/>
-        </p:spPr>
-      </p:sp>
-      <p:sp>
-        <p:nvSpPr>
-          <p:cNvPr id="8" name="Text 6"/>
-          <p:cNvSpPr txBox="1"/>
-          <p:nvPr/>
-        </p:nvSpPr>
-        <p:spPr>
-          <a:xfrm>
-            <a:off x="822960" y="2971800"/>
-            <a:ext cx="438912" cy="438912"/>
-          </a:xfrm>
-          <a:prstGeom prst="rect">
-            <a:avLst/>
-          </a:prstGeom>
-          <a:noFill/>
-          <a:ln/>
-        </p:spPr>
-        <p:txBody>
-          <a:bodyPr wrap="square" lIns="0" tIns="0" rIns="0" bIns="0" rtlCol="0" anchor="ctr"/>
-          <a:lstStyle/>
-          <a:p>
-            <a:pPr algn="ctr" indent="0" marL="0">
-              <a:buNone/>
-            </a:pPr>
-            <a:r>
-              <a:rPr lang="en-US" sz="1500" b="1" dirty="0">
-                <a:solidFill>
-                  <a:srgbClr val="FFFFFF"/>
-                </a:solidFill>
-                <a:latin typeface="Calibri" pitchFamily="34" charset="0"/>
-                <a:ea typeface="Calibri" pitchFamily="34" charset="-122"/>
-                <a:cs typeface="Calibri" pitchFamily="34" charset="-120"/>
-              </a:rPr>
-              <a:t>2</a:t>
-            </a:r>
-            <a:endParaRPr lang="en-US" sz="1500" dirty="0"/>
-          </a:p>
-        </p:txBody>
-      </p:sp>
-      <p:sp>
-        <p:nvSpPr>
-          <p:cNvPr id="9" name="Text 7"/>
-          <p:cNvSpPr txBox="1"/>
-          <p:nvPr/>
-        </p:nvSpPr>
-        <p:spPr>
-          <a:xfrm>
-            <a:off x="1463040" y="2880360"/>
-            <a:ext cx="10058400" cy="640080"/>
-          </a:xfrm>
-          <a:prstGeom prst="rect">
-            <a:avLst/>
-          </a:prstGeom>
-          <a:noFill/>
-          <a:ln/>
-        </p:spPr>
-        <p:txBody>
-          <a:bodyPr wrap="square" lIns="0" tIns="0" rIns="0" bIns="0" rtlCol="0" anchor="ctr"/>
-          <a:lstStyle/>
-          <a:p>
-            <a:pPr indent="0" marL="0">
-              <a:buNone/>
-            </a:pPr>
-            <a:r>
-              <a:rPr lang="en-US" sz="1250" dirty="0">
-                <a:solidFill>
-                  <a:srgbClr val="C9D3F5"/>
-                </a:solidFill>
-                <a:latin typeface="Calibri" pitchFamily="34" charset="0"/>
-                <a:ea typeface="Calibri" pitchFamily="34" charset="-122"/>
-                <a:cs typeface="Calibri" pitchFamily="34" charset="-120"/>
-              </a:rPr>
-              <a:t>box-sizing: border-box makes padding and border count inside your width, and is the practical default.</a:t>
-            </a:r>
-            <a:endParaRPr lang="en-US" sz="1250" dirty="0"/>
-          </a:p>
-        </p:txBody>
-      </p:sp>
-      <p:sp>
-        <p:nvSpPr>
-          <p:cNvPr id="10" name="Shape 8"/>
-          <p:cNvSpPr/>
-          <p:nvPr/>
-        </p:nvSpPr>
-        <p:spPr>
-          <a:xfrm>
-            <a:off x="822960" y="3657600"/>
-            <a:ext cx="438912" cy="438912"/>
-          </a:xfrm>
-          <a:prstGeom prst="ellipse">
-            <a:avLst/>
-          </a:prstGeom>
-          <a:solidFill>
-            <a:srgbClr val="FF8A3D"/>
-          </a:solidFill>
-          <a:ln/>
-        </p:spPr>
-      </p:sp>
-      <p:sp>
-        <p:nvSpPr>
-          <p:cNvPr id="11" name="Text 9"/>
-          <p:cNvSpPr txBox="1"/>
-          <p:nvPr/>
-        </p:nvSpPr>
-        <p:spPr>
-          <a:xfrm>
-            <a:off x="822960" y="3657600"/>
-            <a:ext cx="438912" cy="438912"/>
-          </a:xfrm>
-          <a:prstGeom prst="rect">
-            <a:avLst/>
-          </a:prstGeom>
-          <a:noFill/>
-          <a:ln/>
-        </p:spPr>
-        <p:txBody>
-          <a:bodyPr wrap="square" lIns="0" tIns="0" rIns="0" bIns="0" rtlCol="0" anchor="ctr"/>
-          <a:lstStyle/>
-          <a:p>
-            <a:pPr algn="ctr" indent="0" marL="0">
-              <a:buNone/>
-            </a:pPr>
-            <a:r>
-              <a:rPr lang="en-US" sz="1500" b="1" dirty="0">
-                <a:solidFill>
-                  <a:srgbClr val="FFFFFF"/>
-                </a:solidFill>
-                <a:latin typeface="Calibri" pitchFamily="34" charset="0"/>
-                <a:ea typeface="Calibri" pitchFamily="34" charset="-122"/>
-                <a:cs typeface="Calibri" pitchFamily="34" charset="-120"/>
-              </a:rPr>
-              <a:t>3</a:t>
-            </a:r>
-            <a:endParaRPr lang="en-US" sz="1500" dirty="0"/>
-          </a:p>
-        </p:txBody>
-      </p:sp>
-      <p:sp>
-        <p:nvSpPr>
-          <p:cNvPr id="12" name="Text 10"/>
-          <p:cNvSpPr txBox="1"/>
-          <p:nvPr/>
-        </p:nvSpPr>
-        <p:spPr>
-          <a:xfrm>
-            <a:off x="1463040" y="3566160"/>
-            <a:ext cx="10058400" cy="640080"/>
-          </a:xfrm>
-          <a:prstGeom prst="rect">
-            <a:avLst/>
-          </a:prstGeom>
-          <a:noFill/>
-          <a:ln/>
-        </p:spPr>
-        <p:txBody>
-          <a:bodyPr wrap="square" lIns="0" tIns="0" rIns="0" bIns="0" rtlCol="0" anchor="ctr"/>
-          <a:lstStyle/>
-          <a:p>
-            <a:pPr indent="0" marL="0">
-              <a:buNone/>
-            </a:pPr>
-            <a:r>
-              <a:rPr lang="en-US" sz="1250" dirty="0">
-                <a:solidFill>
-                  <a:srgbClr val="C9D3F5"/>
-                </a:solidFill>
-                <a:latin typeface="Calibri" pitchFamily="34" charset="0"/>
-                <a:ea typeface="Calibri" pitchFamily="34" charset="-122"/>
-                <a:cs typeface="Calibri" pitchFamily="34" charset="-120"/>
-              </a:rPr>
-              <a:t>min-/max-width/height add flexible constraints on top of a base size.</a:t>
-            </a:r>
-            <a:endParaRPr lang="en-US" sz="1250" dirty="0"/>
-          </a:p>
-        </p:txBody>
-      </p:sp>
-      <p:sp>
-        <p:nvSpPr>
-          <p:cNvPr id="13" name="Shape 11"/>
-          <p:cNvSpPr/>
-          <p:nvPr/>
-        </p:nvSpPr>
-        <p:spPr>
-          <a:xfrm>
-            <a:off x="822960" y="4343400"/>
-            <a:ext cx="438912" cy="438912"/>
-          </a:xfrm>
-          <a:prstGeom prst="ellipse">
-            <a:avLst/>
-          </a:prstGeom>
-          <a:solidFill>
-            <a:srgbClr val="FF8A3D"/>
-          </a:solidFill>
-          <a:ln/>
-        </p:spPr>
-      </p:sp>
-      <p:sp>
-        <p:nvSpPr>
-          <p:cNvPr id="14" name="Text 12"/>
-          <p:cNvSpPr txBox="1"/>
-          <p:nvPr/>
-        </p:nvSpPr>
-        <p:spPr>
-          <a:xfrm>
-            <a:off x="822960" y="4343400"/>
-            <a:ext cx="438912" cy="438912"/>
-          </a:xfrm>
-          <a:prstGeom prst="rect">
-            <a:avLst/>
-          </a:prstGeom>
-          <a:noFill/>
-          <a:ln/>
-        </p:spPr>
-        <p:txBody>
-          <a:bodyPr wrap="square" lIns="0" tIns="0" rIns="0" bIns="0" rtlCol="0" anchor="ctr"/>
-          <a:lstStyle/>
-          <a:p>
-            <a:pPr algn="ctr" indent="0" marL="0">
-              <a:buNone/>
-            </a:pPr>
-            <a:r>
-              <a:rPr lang="en-US" sz="1500" b="1" dirty="0">
-                <a:solidFill>
-                  <a:srgbClr val="FFFFFF"/>
-                </a:solidFill>
-                <a:latin typeface="Calibri" pitchFamily="34" charset="0"/>
-                <a:ea typeface="Calibri" pitchFamily="34" charset="-122"/>
-                <a:cs typeface="Calibri" pitchFamily="34" charset="-120"/>
-              </a:rPr>
-              <a:t>4</a:t>
-            </a:r>
-            <a:endParaRPr lang="en-US" sz="1500" dirty="0"/>
-          </a:p>
-        </p:txBody>
-      </p:sp>
-      <p:sp>
-        <p:nvSpPr>
-          <p:cNvPr id="15" name="Text 13"/>
-          <p:cNvSpPr txBox="1"/>
-          <p:nvPr/>
-        </p:nvSpPr>
-        <p:spPr>
-          <a:xfrm>
-            <a:off x="1463040" y="4251960"/>
-            <a:ext cx="10058400" cy="640080"/>
-          </a:xfrm>
-          <a:prstGeom prst="rect">
-            <a:avLst/>
-          </a:prstGeom>
-          <a:noFill/>
-          <a:ln/>
-        </p:spPr>
-        <p:txBody>
-          <a:bodyPr wrap="square" lIns="0" tIns="0" rIns="0" bIns="0" rtlCol="0" anchor="ctr"/>
-          <a:lstStyle/>
-          <a:p>
-            <a:pPr indent="0" marL="0">
-              <a:buNone/>
-            </a:pPr>
-            <a:r>
-              <a:rPr lang="en-US" sz="1250" dirty="0">
-                <a:solidFill>
-                  <a:srgbClr val="C9D3F5"/>
-                </a:solidFill>
-                <a:latin typeface="Calibri" pitchFamily="34" charset="0"/>
-                <a:ea typeface="Calibri" pitchFamily="34" charset="-122"/>
-                <a:cs typeface="Calibri" pitchFamily="34" charset="-120"/>
-              </a:rPr>
-              <a:t>display controls layout behavior: block fills width, inline flows in text, inline-block combines both, none removes the element entirely.</a:t>
-            </a:r>
-            <a:endParaRPr lang="en-US" sz="1250" dirty="0"/>
-          </a:p>
-        </p:txBody>
-      </p:sp>
-      <p:sp>
-        <p:nvSpPr>
-          <p:cNvPr id="16" name="Shape 14"/>
-          <p:cNvSpPr/>
-          <p:nvPr/>
-        </p:nvSpPr>
-        <p:spPr>
-          <a:xfrm>
-            <a:off x="822960" y="5029200"/>
-            <a:ext cx="438912" cy="438912"/>
-          </a:xfrm>
-          <a:prstGeom prst="ellipse">
-            <a:avLst/>
-          </a:prstGeom>
-          <a:solidFill>
-            <a:srgbClr val="FF8A3D"/>
-          </a:solidFill>
-          <a:ln/>
-        </p:spPr>
-      </p:sp>
-      <p:sp>
-        <p:nvSpPr>
-          <p:cNvPr id="17" name="Text 15"/>
-          <p:cNvSpPr txBox="1"/>
-          <p:nvPr/>
-        </p:nvSpPr>
-        <p:spPr>
-          <a:xfrm>
-            <a:off x="822960" y="5029200"/>
-            <a:ext cx="438912" cy="438912"/>
-          </a:xfrm>
-          <a:prstGeom prst="rect">
-            <a:avLst/>
-          </a:prstGeom>
-          <a:noFill/>
-          <a:ln/>
-        </p:spPr>
-        <p:txBody>
-          <a:bodyPr wrap="square" lIns="0" tIns="0" rIns="0" bIns="0" rtlCol="0" anchor="ctr"/>
-          <a:lstStyle/>
-          <a:p>
-            <a:pPr algn="ctr" indent="0" marL="0">
-              <a:buNone/>
-            </a:pPr>
-            <a:r>
-              <a:rPr lang="en-US" sz="1500" b="1" dirty="0">
-                <a:solidFill>
-                  <a:srgbClr val="FFFFFF"/>
-                </a:solidFill>
-                <a:latin typeface="Calibri" pitchFamily="34" charset="0"/>
-                <a:ea typeface="Calibri" pitchFamily="34" charset="-122"/>
-                <a:cs typeface="Calibri" pitchFamily="34" charset="-120"/>
-              </a:rPr>
-              <a:t>5</a:t>
-            </a:r>
-            <a:endParaRPr lang="en-US" sz="1500" dirty="0"/>
-          </a:p>
-        </p:txBody>
-      </p:sp>
-      <p:sp>
-        <p:nvSpPr>
-          <p:cNvPr id="18" name="Text 16"/>
-          <p:cNvSpPr txBox="1"/>
-          <p:nvPr/>
-        </p:nvSpPr>
-        <p:spPr>
-          <a:xfrm>
-            <a:off x="1463040" y="4937760"/>
-            <a:ext cx="10058400" cy="640080"/>
-          </a:xfrm>
-          <a:prstGeom prst="rect">
-            <a:avLst/>
-          </a:prstGeom>
-          <a:noFill/>
-          <a:ln/>
-        </p:spPr>
-        <p:txBody>
-          <a:bodyPr wrap="square" lIns="0" tIns="0" rIns="0" bIns="0" rtlCol="0" anchor="ctr"/>
-          <a:lstStyle/>
-          <a:p>
-            <a:pPr indent="0" marL="0">
-              <a:buNone/>
-            </a:pPr>
-            <a:r>
-              <a:rPr lang="en-US" sz="1250" dirty="0">
-                <a:solidFill>
-                  <a:srgbClr val="C9D3F5"/>
-                </a:solidFill>
-                <a:latin typeface="Calibri" pitchFamily="34" charset="0"/>
-                <a:ea typeface="Calibri" pitchFamily="34" charset="-122"/>
-                <a:cs typeface="Calibri" pitchFamily="34" charset="-120"/>
-              </a:rPr>
-              <a:t>A &lt;ul&gt; styled with li { display: inline-block; } is a real way to build a menu without losing list semantics.</a:t>
-            </a:r>
-            <a:endParaRPr lang="en-US" sz="1250" dirty="0"/>
-          </a:p>
-        </p:txBody>
-      </p:sp>
-      <p:sp>
-        <p:nvSpPr>
-          <p:cNvPr id="19" name="Shape 17"/>
-          <p:cNvSpPr/>
-          <p:nvPr/>
-        </p:nvSpPr>
-        <p:spPr>
-          <a:xfrm>
-            <a:off x="822960" y="5715000"/>
-            <a:ext cx="438912" cy="438912"/>
-          </a:xfrm>
-          <a:prstGeom prst="ellipse">
-            <a:avLst/>
-          </a:prstGeom>
-          <a:solidFill>
-            <a:srgbClr val="FF8A3D"/>
-          </a:solidFill>
-          <a:ln/>
-        </p:spPr>
-      </p:sp>
-      <p:sp>
-        <p:nvSpPr>
-          <p:cNvPr id="20" name="Text 18"/>
-          <p:cNvSpPr txBox="1"/>
-          <p:nvPr/>
-        </p:nvSpPr>
-        <p:spPr>
-          <a:xfrm>
-            <a:off x="822960" y="5715000"/>
-            <a:ext cx="438912" cy="438912"/>
-          </a:xfrm>
-          <a:prstGeom prst="rect">
-            <a:avLst/>
-          </a:prstGeom>
-          <a:noFill/>
-          <a:ln/>
-        </p:spPr>
-        <p:txBody>
-          <a:bodyPr wrap="square" lIns="0" tIns="0" rIns="0" bIns="0" rtlCol="0" anchor="ctr"/>
-          <a:lstStyle/>
-          <a:p>
-            <a:pPr algn="ctr" indent="0" marL="0">
-              <a:buNone/>
-            </a:pPr>
-            <a:r>
-              <a:rPr lang="en-US" sz="1500" b="1" dirty="0">
-                <a:solidFill>
-                  <a:srgbClr val="FFFFFF"/>
-                </a:solidFill>
-                <a:latin typeface="Calibri" pitchFamily="34" charset="0"/>
-                <a:ea typeface="Calibri" pitchFamily="34" charset="-122"/>
-                <a:cs typeface="Calibri" pitchFamily="34" charset="-120"/>
-              </a:rPr>
-              <a:t>6</a:t>
-            </a:r>
-            <a:endParaRPr lang="en-US" sz="1500" dirty="0"/>
-          </a:p>
-        </p:txBody>
-      </p:sp>
-      <p:sp>
-        <p:nvSpPr>
-          <p:cNvPr id="21" name="Text 19"/>
-          <p:cNvSpPr txBox="1"/>
-          <p:nvPr/>
-        </p:nvSpPr>
-        <p:spPr>
-          <a:xfrm>
-            <a:off x="1463040" y="5623560"/>
-            <a:ext cx="10058400" cy="640080"/>
-          </a:xfrm>
-          <a:prstGeom prst="rect">
-            <a:avLst/>
-          </a:prstGeom>
-          <a:noFill/>
-          <a:ln/>
-        </p:spPr>
-        <p:txBody>
-          <a:bodyPr wrap="square" lIns="0" tIns="0" rIns="0" bIns="0" rtlCol="0" anchor="ctr"/>
-          <a:lstStyle/>
-          <a:p>
-            <a:pPr indent="0" marL="0">
-              <a:buNone/>
-            </a:pPr>
-            <a:r>
-              <a:rPr lang="en-US" sz="1250" dirty="0">
-                <a:solidFill>
-                  <a:srgbClr val="C9D3F5"/>
-                </a:solidFill>
-                <a:latin typeface="Calibri" pitchFamily="34" charset="0"/>
-                <a:ea typeface="Calibri" pitchFamily="34" charset="-122"/>
-                <a:cs typeface="Calibri" pitchFamily="34" charset="-120"/>
-              </a:rPr>
-              <a:t>border-radius, box-shadow, and CSS custom properties keep a design finished and consistent.</a:t>
-            </a:r>
-            <a:endParaRPr lang="en-US" sz="1250" dirty="0"/>
-          </a:p>
-        </p:txBody>
-      </p:sp>
-      <p:sp>
-        <p:nvSpPr>
-          <p:cNvPr id="22" name="Text 20"/>
           <p:cNvSpPr txBox="1"/>
           <p:nvPr/>
         </p:nvSpPr>
@@ -6591,7 +6350,7 @@
             <a:r>
               <a:rPr lang="en-US" sz="900" dirty="0">
                 <a:solidFill>
-                  <a:srgbClr val="9AA3D8"/>
+                  <a:srgbClr val="5D5D72"/>
                 </a:solidFill>
                 <a:latin typeface="Calibri" pitchFamily="34" charset="0"/>
                 <a:ea typeface="Calibri" pitchFamily="34" charset="-122"/>
@@ -6605,7 +6364,7 @@
       </p:sp>
       <p:sp>
         <p:nvSpPr>
-          <p:cNvPr id="23" name="Text 21"/>
+          <p:cNvPr id="7" name="Text 5"/>
           <p:cNvSpPr txBox="1"/>
           <p:nvPr/>
         </p:nvSpPr>
@@ -6630,7 +6389,7 @@
             <a:r>
               <a:rPr lang="en-US" sz="900" dirty="0">
                 <a:solidFill>
-                  <a:srgbClr val="9AA3D8"/>
+                  <a:srgbClr val="5D5D72"/>
                 </a:solidFill>
                 <a:latin typeface="Calibri" pitchFamily="34" charset="0"/>
                 <a:ea typeface="Calibri" pitchFamily="34" charset="-122"/>
@@ -7413,6 +7172,1147 @@
                 <a:cs typeface="Calibri" pitchFamily="34" charset="-120"/>
               </a:rPr>
               <a:t>2</a:t>
+            </a:r>
+            <a:endParaRPr lang="en-US" sz="900" dirty="0"/>
+          </a:p>
+        </p:txBody>
+      </p:sp>
+    </p:spTree>
+  </p:cSld>
+  <p:clrMapOvr>
+    <a:masterClrMapping/>
+  </p:clrMapOvr>
+</p:sld>
+</file>
+
+<file path=ppt/slides/slide20.xml><?xml version="1.0" encoding="utf-8"?>
+<p:sld xmlns:a="http://schemas.openxmlformats.org/drawingml/2006/main" xmlns:r="http://schemas.openxmlformats.org/officeDocument/2006/relationships" xmlns:p="http://schemas.openxmlformats.org/presentationml/2006/main">
+  <p:cSld name="Slide 20">
+    <p:bg>
+      <p:bgPr>
+        <a:solidFill>
+          <a:srgbClr val="FFFFFF"/>
+        </a:solidFill>
+      </p:bgPr>
+    </p:bg>
+    <p:spTree>
+      <p:nvGrpSpPr>
+        <p:cNvPr id="1" name=""/>
+        <p:cNvGrpSpPr/>
+        <p:nvPr/>
+      </p:nvGrpSpPr>
+      <p:grpSpPr>
+        <a:xfrm>
+          <a:off x="0" y="0"/>
+          <a:ext cx="0" cy="0"/>
+          <a:chOff x="0" y="0"/>
+          <a:chExt cx="0" cy="0"/>
+        </a:xfrm>
+      </p:grpSpPr>
+      <p:sp>
+        <p:nvSpPr>
+          <p:cNvPr id="2" name="Text 0"/>
+          <p:cNvSpPr txBox="1"/>
+          <p:nvPr/>
+        </p:nvSpPr>
+        <p:spPr>
+          <a:xfrm>
+            <a:off x="640080" y="457200"/>
+            <a:ext cx="10058400" cy="365760"/>
+          </a:xfrm>
+          <a:prstGeom prst="rect">
+            <a:avLst/>
+          </a:prstGeom>
+          <a:noFill/>
+          <a:ln/>
+        </p:spPr>
+        <p:txBody>
+          <a:bodyPr wrap="square" lIns="0" tIns="0" rIns="0" bIns="0" rtlCol="0" anchor="ctr"/>
+          <a:lstStyle/>
+          <a:p>
+            <a:pPr algn="l" indent="0" marL="0">
+              <a:buNone/>
+            </a:pPr>
+            <a:r>
+              <a:rPr lang="en-US" sz="1300" b="1" spc="300" kern="0" dirty="0">
+                <a:solidFill>
+                  <a:srgbClr val="FF8A3D"/>
+                </a:solidFill>
+                <a:latin typeface="Calibri" pitchFamily="34" charset="0"/>
+                <a:ea typeface="Calibri" pitchFamily="34" charset="-122"/>
+                <a:cs typeface="Calibri" pitchFamily="34" charset="-120"/>
+              </a:rPr>
+              <a:t>FINISHING TOUCHES</a:t>
+            </a:r>
+            <a:endParaRPr lang="en-US" sz="1300" dirty="0"/>
+          </a:p>
+        </p:txBody>
+      </p:sp>
+      <p:sp>
+        <p:nvSpPr>
+          <p:cNvPr id="3" name="Text 1"/>
+          <p:cNvSpPr txBox="1"/>
+          <p:nvPr/>
+        </p:nvSpPr>
+        <p:spPr>
+          <a:xfrm>
+            <a:off x="640080" y="841248"/>
+            <a:ext cx="10881360" cy="914400"/>
+          </a:xfrm>
+          <a:prstGeom prst="rect">
+            <a:avLst/>
+          </a:prstGeom>
+          <a:noFill/>
+          <a:ln/>
+        </p:spPr>
+        <p:txBody>
+          <a:bodyPr wrap="square" lIns="0" tIns="0" rIns="0" bIns="0" rtlCol="0" anchor="ctr"/>
+          <a:lstStyle/>
+          <a:p>
+            <a:pPr algn="l" indent="0" marL="0">
+              <a:buNone/>
+            </a:pPr>
+            <a:r>
+              <a:rPr lang="en-US" sz="3400" b="1" dirty="0">
+                <a:solidFill>
+                  <a:srgbClr val="2B2B7A"/>
+                </a:solidFill>
+                <a:latin typeface="Cambria" pitchFamily="34" charset="0"/>
+                <a:ea typeface="Cambria" pitchFamily="34" charset="-122"/>
+                <a:cs typeface="Cambria" pitchFamily="34" charset="-120"/>
+              </a:rPr>
+              <a:t>Consistent Spacing Techniques</a:t>
+            </a:r>
+            <a:endParaRPr lang="en-US" sz="3400" dirty="0"/>
+          </a:p>
+        </p:txBody>
+      </p:sp>
+      <p:sp>
+        <p:nvSpPr>
+          <p:cNvPr id="4" name="Shape 2"/>
+          <p:cNvSpPr/>
+          <p:nvPr/>
+        </p:nvSpPr>
+        <p:spPr>
+          <a:xfrm>
+            <a:off x="685800" y="2185416"/>
+            <a:ext cx="82296" cy="82296"/>
+          </a:xfrm>
+          <a:prstGeom prst="ellipse">
+            <a:avLst/>
+          </a:prstGeom>
+          <a:solidFill>
+            <a:srgbClr val="FF8A3D"/>
+          </a:solidFill>
+          <a:ln/>
+        </p:spPr>
+      </p:sp>
+      <p:sp>
+        <p:nvSpPr>
+          <p:cNvPr id="5" name="Text 3"/>
+          <p:cNvSpPr txBox="1"/>
+          <p:nvPr/>
+        </p:nvSpPr>
+        <p:spPr>
+          <a:xfrm>
+            <a:off x="960120" y="1892808"/>
+            <a:ext cx="10591495" cy="640080"/>
+          </a:xfrm>
+          <a:prstGeom prst="rect">
+            <a:avLst/>
+          </a:prstGeom>
+          <a:noFill/>
+          <a:ln/>
+        </p:spPr>
+        <p:txBody>
+          <a:bodyPr wrap="square" lIns="0" tIns="0" rIns="0" bIns="0" rtlCol="0" anchor="ctr"/>
+          <a:lstStyle/>
+          <a:p>
+            <a:pPr indent="0" marL="0">
+              <a:buNone/>
+            </a:pPr>
+            <a:r>
+              <a:rPr lang="en-US" sz="1500" dirty="0">
+                <a:solidFill>
+                  <a:srgbClr val="26262F"/>
+                </a:solidFill>
+                <a:latin typeface="Calibri" pitchFamily="34" charset="0"/>
+                <a:ea typeface="Calibri" pitchFamily="34" charset="-122"/>
+                <a:cs typeface="Calibri" pitchFamily="34" charset="-120"/>
+              </a:rPr>
+              <a:t>A spacing scale — pick a small set of values (4px, 8px, 16px, 24px) and only ever use those</a:t>
+            </a:r>
+            <a:endParaRPr lang="en-US" sz="1500" dirty="0"/>
+          </a:p>
+        </p:txBody>
+      </p:sp>
+      <p:sp>
+        <p:nvSpPr>
+          <p:cNvPr id="6" name="Shape 4"/>
+          <p:cNvSpPr/>
+          <p:nvPr/>
+        </p:nvSpPr>
+        <p:spPr>
+          <a:xfrm>
+            <a:off x="685800" y="3008376"/>
+            <a:ext cx="82296" cy="82296"/>
+          </a:xfrm>
+          <a:prstGeom prst="ellipse">
+            <a:avLst/>
+          </a:prstGeom>
+          <a:solidFill>
+            <a:srgbClr val="FF8A3D"/>
+          </a:solidFill>
+          <a:ln/>
+        </p:spPr>
+      </p:sp>
+      <p:sp>
+        <p:nvSpPr>
+          <p:cNvPr id="7" name="Text 5"/>
+          <p:cNvSpPr txBox="1"/>
+          <p:nvPr/>
+        </p:nvSpPr>
+        <p:spPr>
+          <a:xfrm>
+            <a:off x="960120" y="2715768"/>
+            <a:ext cx="10591495" cy="640080"/>
+          </a:xfrm>
+          <a:prstGeom prst="rect">
+            <a:avLst/>
+          </a:prstGeom>
+          <a:noFill/>
+          <a:ln/>
+        </p:spPr>
+        <p:txBody>
+          <a:bodyPr wrap="square" lIns="0" tIns="0" rIns="0" bIns="0" rtlCol="0" anchor="ctr"/>
+          <a:lstStyle/>
+          <a:p>
+            <a:pPr indent="0" marL="0">
+              <a:buNone/>
+            </a:pPr>
+            <a:r>
+              <a:rPr lang="en-US" sz="1500" dirty="0">
+                <a:solidFill>
+                  <a:srgbClr val="26262F"/>
+                </a:solidFill>
+                <a:latin typeface="Calibri" pitchFamily="34" charset="0"/>
+                <a:ea typeface="Calibri" pitchFamily="34" charset="-122"/>
+                <a:cs typeface="Calibri" pitchFamily="34" charset="-120"/>
+              </a:rPr>
+              <a:t>CSS custom properties — define --space-md: 16px once in :root, reuse everywhere with var(--space-md)</a:t>
+            </a:r>
+            <a:endParaRPr lang="en-US" sz="1500" dirty="0"/>
+          </a:p>
+        </p:txBody>
+      </p:sp>
+      <p:sp>
+        <p:nvSpPr>
+          <p:cNvPr id="8" name="Shape 6"/>
+          <p:cNvSpPr/>
+          <p:nvPr/>
+        </p:nvSpPr>
+        <p:spPr>
+          <a:xfrm>
+            <a:off x="685800" y="3831336"/>
+            <a:ext cx="82296" cy="82296"/>
+          </a:xfrm>
+          <a:prstGeom prst="ellipse">
+            <a:avLst/>
+          </a:prstGeom>
+          <a:solidFill>
+            <a:srgbClr val="FF8A3D"/>
+          </a:solidFill>
+          <a:ln/>
+        </p:spPr>
+      </p:sp>
+      <p:sp>
+        <p:nvSpPr>
+          <p:cNvPr id="9" name="Text 7"/>
+          <p:cNvSpPr txBox="1"/>
+          <p:nvPr/>
+        </p:nvSpPr>
+        <p:spPr>
+          <a:xfrm>
+            <a:off x="960120" y="3538728"/>
+            <a:ext cx="10591495" cy="640080"/>
+          </a:xfrm>
+          <a:prstGeom prst="rect">
+            <a:avLst/>
+          </a:prstGeom>
+          <a:noFill/>
+          <a:ln/>
+        </p:spPr>
+        <p:txBody>
+          <a:bodyPr wrap="square" lIns="0" tIns="0" rIns="0" bIns="0" rtlCol="0" anchor="ctr"/>
+          <a:lstStyle/>
+          <a:p>
+            <a:pPr indent="0" marL="0">
+              <a:buNone/>
+            </a:pPr>
+            <a:r>
+              <a:rPr lang="en-US" sz="1500" dirty="0">
+                <a:solidFill>
+                  <a:srgbClr val="26262F"/>
+                </a:solidFill>
+                <a:latin typeface="Calibri" pitchFamily="34" charset="0"/>
+                <a:ea typeface="Calibri" pitchFamily="34" charset="-122"/>
+                <a:cs typeface="Calibri" pitchFamily="34" charset="-120"/>
+              </a:rPr>
+              <a:t>Change the whole site's spacing rhythm by editing one value in :root</a:t>
+            </a:r>
+            <a:endParaRPr lang="en-US" sz="1500" dirty="0"/>
+          </a:p>
+        </p:txBody>
+      </p:sp>
+      <p:sp>
+        <p:nvSpPr>
+          <p:cNvPr id="10" name="Text 8"/>
+          <p:cNvSpPr txBox="1"/>
+          <p:nvPr/>
+        </p:nvSpPr>
+        <p:spPr>
+          <a:xfrm>
+            <a:off x="640080" y="6446520"/>
+            <a:ext cx="8686800" cy="292608"/>
+          </a:xfrm>
+          <a:prstGeom prst="rect">
+            <a:avLst/>
+          </a:prstGeom>
+          <a:noFill/>
+          <a:ln/>
+        </p:spPr>
+        <p:txBody>
+          <a:bodyPr wrap="square" lIns="0" tIns="0" rIns="0" bIns="0" rtlCol="0" anchor="ctr"/>
+          <a:lstStyle/>
+          <a:p>
+            <a:pPr algn="l" indent="0" marL="0">
+              <a:buNone/>
+            </a:pPr>
+            <a:r>
+              <a:rPr lang="en-US" sz="900" dirty="0">
+                <a:solidFill>
+                  <a:srgbClr val="5D5D72"/>
+                </a:solidFill>
+                <a:latin typeface="Calibri" pitchFamily="34" charset="0"/>
+                <a:ea typeface="Calibri" pitchFamily="34" charset="-122"/>
+                <a:cs typeface="Calibri" pitchFamily="34" charset="-120"/>
+              </a:rPr>
+              <a:t>Usman Akram  •  COMSATS University Islamabad</a:t>
+            </a:r>
+            <a:endParaRPr lang="en-US" sz="900" dirty="0"/>
+          </a:p>
+        </p:txBody>
+      </p:sp>
+      <p:sp>
+        <p:nvSpPr>
+          <p:cNvPr id="11" name="Text 9"/>
+          <p:cNvSpPr txBox="1"/>
+          <p:nvPr/>
+        </p:nvSpPr>
+        <p:spPr>
+          <a:xfrm>
+            <a:off x="11155680" y="6446520"/>
+            <a:ext cx="457200" cy="292608"/>
+          </a:xfrm>
+          <a:prstGeom prst="rect">
+            <a:avLst/>
+          </a:prstGeom>
+          <a:noFill/>
+          <a:ln/>
+        </p:spPr>
+        <p:txBody>
+          <a:bodyPr wrap="square" lIns="0" tIns="0" rIns="0" bIns="0" rtlCol="0" anchor="ctr"/>
+          <a:lstStyle/>
+          <a:p>
+            <a:pPr algn="r" indent="0" marL="0">
+              <a:buNone/>
+            </a:pPr>
+            <a:r>
+              <a:rPr lang="en-US" sz="900" dirty="0">
+                <a:solidFill>
+                  <a:srgbClr val="5D5D72"/>
+                </a:solidFill>
+                <a:latin typeface="Calibri" pitchFamily="34" charset="0"/>
+                <a:ea typeface="Calibri" pitchFamily="34" charset="-122"/>
+                <a:cs typeface="Calibri" pitchFamily="34" charset="-120"/>
+              </a:rPr>
+              <a:t>20</a:t>
+            </a:r>
+            <a:endParaRPr lang="en-US" sz="900" dirty="0"/>
+          </a:p>
+        </p:txBody>
+      </p:sp>
+    </p:spTree>
+  </p:cSld>
+  <p:clrMapOvr>
+    <a:masterClrMapping/>
+  </p:clrMapOvr>
+</p:sld>
+</file>
+
+<file path=ppt/slides/slide21.xml><?xml version="1.0" encoding="utf-8"?>
+<p:sld xmlns:a="http://schemas.openxmlformats.org/drawingml/2006/main" xmlns:r="http://schemas.openxmlformats.org/officeDocument/2006/relationships" xmlns:p="http://schemas.openxmlformats.org/presentationml/2006/main">
+  <p:cSld name="Slide 21">
+    <p:bg>
+      <p:bgPr>
+        <a:solidFill>
+          <a:srgbClr val="2B2B7A"/>
+        </a:solidFill>
+      </p:bgPr>
+    </p:bg>
+    <p:spTree>
+      <p:nvGrpSpPr>
+        <p:cNvPr id="1" name=""/>
+        <p:cNvGrpSpPr/>
+        <p:nvPr/>
+      </p:nvGrpSpPr>
+      <p:grpSpPr>
+        <a:xfrm>
+          <a:off x="0" y="0"/>
+          <a:ext cx="0" cy="0"/>
+          <a:chOff x="0" y="0"/>
+          <a:chExt cx="0" cy="0"/>
+        </a:xfrm>
+      </p:grpSpPr>
+      <p:sp>
+        <p:nvSpPr>
+          <p:cNvPr id="2" name="Text 0"/>
+          <p:cNvSpPr txBox="1"/>
+          <p:nvPr/>
+        </p:nvSpPr>
+        <p:spPr>
+          <a:xfrm>
+            <a:off x="822960" y="731520"/>
+            <a:ext cx="9144000" cy="457200"/>
+          </a:xfrm>
+          <a:prstGeom prst="rect">
+            <a:avLst/>
+          </a:prstGeom>
+          <a:noFill/>
+          <a:ln/>
+        </p:spPr>
+        <p:txBody>
+          <a:bodyPr wrap="square" lIns="0" tIns="0" rIns="0" bIns="0" rtlCol="0" anchor="ctr"/>
+          <a:lstStyle/>
+          <a:p>
+            <a:pPr indent="0" marL="0">
+              <a:buNone/>
+            </a:pPr>
+            <a:r>
+              <a:rPr lang="en-US" sz="1500" b="1" spc="400" kern="0" dirty="0">
+                <a:solidFill>
+                  <a:srgbClr val="FF8A3D"/>
+                </a:solidFill>
+                <a:latin typeface="Calibri" pitchFamily="34" charset="0"/>
+                <a:ea typeface="Calibri" pitchFamily="34" charset="-122"/>
+                <a:cs typeface="Calibri" pitchFamily="34" charset="-120"/>
+              </a:rPr>
+              <a:t>KEY TAKEAWAYS</a:t>
+            </a:r>
+            <a:endParaRPr lang="en-US" sz="1500" dirty="0"/>
+          </a:p>
+        </p:txBody>
+      </p:sp>
+      <p:sp>
+        <p:nvSpPr>
+          <p:cNvPr id="3" name="Text 1"/>
+          <p:cNvSpPr txBox="1"/>
+          <p:nvPr/>
+        </p:nvSpPr>
+        <p:spPr>
+          <a:xfrm>
+            <a:off x="777240" y="1188720"/>
+            <a:ext cx="10515600" cy="822960"/>
+          </a:xfrm>
+          <a:prstGeom prst="rect">
+            <a:avLst/>
+          </a:prstGeom>
+          <a:noFill/>
+          <a:ln/>
+        </p:spPr>
+        <p:txBody>
+          <a:bodyPr wrap="square" lIns="0" tIns="0" rIns="0" bIns="0" rtlCol="0" anchor="ctr"/>
+          <a:lstStyle/>
+          <a:p>
+            <a:pPr indent="0" marL="0">
+              <a:buNone/>
+            </a:pPr>
+            <a:r>
+              <a:rPr lang="en-US" sz="3400" b="1" dirty="0">
+                <a:solidFill>
+                  <a:srgbClr val="FFFFFF"/>
+                </a:solidFill>
+                <a:latin typeface="Cambria" pitchFamily="34" charset="0"/>
+                <a:ea typeface="Cambria" pitchFamily="34" charset="-122"/>
+                <a:cs typeface="Cambria" pitchFamily="34" charset="-120"/>
+              </a:rPr>
+              <a:t>Lecture 6 in Six Points</a:t>
+            </a:r>
+            <a:endParaRPr lang="en-US" sz="3400" dirty="0"/>
+          </a:p>
+        </p:txBody>
+      </p:sp>
+      <p:sp>
+        <p:nvSpPr>
+          <p:cNvPr id="4" name="Shape 2"/>
+          <p:cNvSpPr/>
+          <p:nvPr/>
+        </p:nvSpPr>
+        <p:spPr>
+          <a:xfrm>
+            <a:off x="822960" y="2286000"/>
+            <a:ext cx="438912" cy="438912"/>
+          </a:xfrm>
+          <a:prstGeom prst="ellipse">
+            <a:avLst/>
+          </a:prstGeom>
+          <a:solidFill>
+            <a:srgbClr val="FF8A3D"/>
+          </a:solidFill>
+          <a:ln/>
+        </p:spPr>
+      </p:sp>
+      <p:sp>
+        <p:nvSpPr>
+          <p:cNvPr id="5" name="Text 3"/>
+          <p:cNvSpPr txBox="1"/>
+          <p:nvPr/>
+        </p:nvSpPr>
+        <p:spPr>
+          <a:xfrm>
+            <a:off x="822960" y="2286000"/>
+            <a:ext cx="438912" cy="438912"/>
+          </a:xfrm>
+          <a:prstGeom prst="rect">
+            <a:avLst/>
+          </a:prstGeom>
+          <a:noFill/>
+          <a:ln/>
+        </p:spPr>
+        <p:txBody>
+          <a:bodyPr wrap="square" lIns="0" tIns="0" rIns="0" bIns="0" rtlCol="0" anchor="ctr"/>
+          <a:lstStyle/>
+          <a:p>
+            <a:pPr algn="ctr" indent="0" marL="0">
+              <a:buNone/>
+            </a:pPr>
+            <a:r>
+              <a:rPr lang="en-US" sz="1500" b="1" dirty="0">
+                <a:solidFill>
+                  <a:srgbClr val="FFFFFF"/>
+                </a:solidFill>
+                <a:latin typeface="Calibri" pitchFamily="34" charset="0"/>
+                <a:ea typeface="Calibri" pitchFamily="34" charset="-122"/>
+                <a:cs typeface="Calibri" pitchFamily="34" charset="-120"/>
+              </a:rPr>
+              <a:t>1</a:t>
+            </a:r>
+            <a:endParaRPr lang="en-US" sz="1500" dirty="0"/>
+          </a:p>
+        </p:txBody>
+      </p:sp>
+      <p:sp>
+        <p:nvSpPr>
+          <p:cNvPr id="6" name="Text 4"/>
+          <p:cNvSpPr txBox="1"/>
+          <p:nvPr/>
+        </p:nvSpPr>
+        <p:spPr>
+          <a:xfrm>
+            <a:off x="1463040" y="2194560"/>
+            <a:ext cx="10058400" cy="640080"/>
+          </a:xfrm>
+          <a:prstGeom prst="rect">
+            <a:avLst/>
+          </a:prstGeom>
+          <a:noFill/>
+          <a:ln/>
+        </p:spPr>
+        <p:txBody>
+          <a:bodyPr wrap="square" lIns="0" tIns="0" rIns="0" bIns="0" rtlCol="0" anchor="ctr"/>
+          <a:lstStyle/>
+          <a:p>
+            <a:pPr indent="0" marL="0">
+              <a:buNone/>
+            </a:pPr>
+            <a:r>
+              <a:rPr lang="en-US" sz="1250" dirty="0">
+                <a:solidFill>
+                  <a:srgbClr val="C9D3F5"/>
+                </a:solidFill>
+                <a:latin typeface="Calibri" pitchFamily="34" charset="0"/>
+                <a:ea typeface="Calibri" pitchFamily="34" charset="-122"/>
+                <a:cs typeface="Calibri" pitchFamily="34" charset="-120"/>
+              </a:rPr>
+              <a:t>Every box has four layers: content, padding, border, margin — vertically adjacent margins can collapse to the larger value.</a:t>
+            </a:r>
+            <a:endParaRPr lang="en-US" sz="1250" dirty="0"/>
+          </a:p>
+        </p:txBody>
+      </p:sp>
+      <p:sp>
+        <p:nvSpPr>
+          <p:cNvPr id="7" name="Shape 5"/>
+          <p:cNvSpPr/>
+          <p:nvPr/>
+        </p:nvSpPr>
+        <p:spPr>
+          <a:xfrm>
+            <a:off x="822960" y="2971800"/>
+            <a:ext cx="438912" cy="438912"/>
+          </a:xfrm>
+          <a:prstGeom prst="ellipse">
+            <a:avLst/>
+          </a:prstGeom>
+          <a:solidFill>
+            <a:srgbClr val="FF8A3D"/>
+          </a:solidFill>
+          <a:ln/>
+        </p:spPr>
+      </p:sp>
+      <p:sp>
+        <p:nvSpPr>
+          <p:cNvPr id="8" name="Text 6"/>
+          <p:cNvSpPr txBox="1"/>
+          <p:nvPr/>
+        </p:nvSpPr>
+        <p:spPr>
+          <a:xfrm>
+            <a:off x="822960" y="2971800"/>
+            <a:ext cx="438912" cy="438912"/>
+          </a:xfrm>
+          <a:prstGeom prst="rect">
+            <a:avLst/>
+          </a:prstGeom>
+          <a:noFill/>
+          <a:ln/>
+        </p:spPr>
+        <p:txBody>
+          <a:bodyPr wrap="square" lIns="0" tIns="0" rIns="0" bIns="0" rtlCol="0" anchor="ctr"/>
+          <a:lstStyle/>
+          <a:p>
+            <a:pPr algn="ctr" indent="0" marL="0">
+              <a:buNone/>
+            </a:pPr>
+            <a:r>
+              <a:rPr lang="en-US" sz="1500" b="1" dirty="0">
+                <a:solidFill>
+                  <a:srgbClr val="FFFFFF"/>
+                </a:solidFill>
+                <a:latin typeface="Calibri" pitchFamily="34" charset="0"/>
+                <a:ea typeface="Calibri" pitchFamily="34" charset="-122"/>
+                <a:cs typeface="Calibri" pitchFamily="34" charset="-120"/>
+              </a:rPr>
+              <a:t>2</a:t>
+            </a:r>
+            <a:endParaRPr lang="en-US" sz="1500" dirty="0"/>
+          </a:p>
+        </p:txBody>
+      </p:sp>
+      <p:sp>
+        <p:nvSpPr>
+          <p:cNvPr id="9" name="Text 7"/>
+          <p:cNvSpPr txBox="1"/>
+          <p:nvPr/>
+        </p:nvSpPr>
+        <p:spPr>
+          <a:xfrm>
+            <a:off x="1463040" y="2880360"/>
+            <a:ext cx="10058400" cy="640080"/>
+          </a:xfrm>
+          <a:prstGeom prst="rect">
+            <a:avLst/>
+          </a:prstGeom>
+          <a:noFill/>
+          <a:ln/>
+        </p:spPr>
+        <p:txBody>
+          <a:bodyPr wrap="square" lIns="0" tIns="0" rIns="0" bIns="0" rtlCol="0" anchor="ctr"/>
+          <a:lstStyle/>
+          <a:p>
+            <a:pPr indent="0" marL="0">
+              <a:buNone/>
+            </a:pPr>
+            <a:r>
+              <a:rPr lang="en-US" sz="1250" dirty="0">
+                <a:solidFill>
+                  <a:srgbClr val="C9D3F5"/>
+                </a:solidFill>
+                <a:latin typeface="Calibri" pitchFamily="34" charset="0"/>
+                <a:ea typeface="Calibri" pitchFamily="34" charset="-122"/>
+                <a:cs typeface="Calibri" pitchFamily="34" charset="-120"/>
+              </a:rPr>
+              <a:t>box-sizing: border-box makes padding and border count inside your width, and is the practical default.</a:t>
+            </a:r>
+            <a:endParaRPr lang="en-US" sz="1250" dirty="0"/>
+          </a:p>
+        </p:txBody>
+      </p:sp>
+      <p:sp>
+        <p:nvSpPr>
+          <p:cNvPr id="10" name="Shape 8"/>
+          <p:cNvSpPr/>
+          <p:nvPr/>
+        </p:nvSpPr>
+        <p:spPr>
+          <a:xfrm>
+            <a:off x="822960" y="3657600"/>
+            <a:ext cx="438912" cy="438912"/>
+          </a:xfrm>
+          <a:prstGeom prst="ellipse">
+            <a:avLst/>
+          </a:prstGeom>
+          <a:solidFill>
+            <a:srgbClr val="FF8A3D"/>
+          </a:solidFill>
+          <a:ln/>
+        </p:spPr>
+      </p:sp>
+      <p:sp>
+        <p:nvSpPr>
+          <p:cNvPr id="11" name="Text 9"/>
+          <p:cNvSpPr txBox="1"/>
+          <p:nvPr/>
+        </p:nvSpPr>
+        <p:spPr>
+          <a:xfrm>
+            <a:off x="822960" y="3657600"/>
+            <a:ext cx="438912" cy="438912"/>
+          </a:xfrm>
+          <a:prstGeom prst="rect">
+            <a:avLst/>
+          </a:prstGeom>
+          <a:noFill/>
+          <a:ln/>
+        </p:spPr>
+        <p:txBody>
+          <a:bodyPr wrap="square" lIns="0" tIns="0" rIns="0" bIns="0" rtlCol="0" anchor="ctr"/>
+          <a:lstStyle/>
+          <a:p>
+            <a:pPr algn="ctr" indent="0" marL="0">
+              <a:buNone/>
+            </a:pPr>
+            <a:r>
+              <a:rPr lang="en-US" sz="1500" b="1" dirty="0">
+                <a:solidFill>
+                  <a:srgbClr val="FFFFFF"/>
+                </a:solidFill>
+                <a:latin typeface="Calibri" pitchFamily="34" charset="0"/>
+                <a:ea typeface="Calibri" pitchFamily="34" charset="-122"/>
+                <a:cs typeface="Calibri" pitchFamily="34" charset="-120"/>
+              </a:rPr>
+              <a:t>3</a:t>
+            </a:r>
+            <a:endParaRPr lang="en-US" sz="1500" dirty="0"/>
+          </a:p>
+        </p:txBody>
+      </p:sp>
+      <p:sp>
+        <p:nvSpPr>
+          <p:cNvPr id="12" name="Text 10"/>
+          <p:cNvSpPr txBox="1"/>
+          <p:nvPr/>
+        </p:nvSpPr>
+        <p:spPr>
+          <a:xfrm>
+            <a:off x="1463040" y="3566160"/>
+            <a:ext cx="10058400" cy="640080"/>
+          </a:xfrm>
+          <a:prstGeom prst="rect">
+            <a:avLst/>
+          </a:prstGeom>
+          <a:noFill/>
+          <a:ln/>
+        </p:spPr>
+        <p:txBody>
+          <a:bodyPr wrap="square" lIns="0" tIns="0" rIns="0" bIns="0" rtlCol="0" anchor="ctr"/>
+          <a:lstStyle/>
+          <a:p>
+            <a:pPr indent="0" marL="0">
+              <a:buNone/>
+            </a:pPr>
+            <a:r>
+              <a:rPr lang="en-US" sz="1250" dirty="0">
+                <a:solidFill>
+                  <a:srgbClr val="C9D3F5"/>
+                </a:solidFill>
+                <a:latin typeface="Calibri" pitchFamily="34" charset="0"/>
+                <a:ea typeface="Calibri" pitchFamily="34" charset="-122"/>
+                <a:cs typeface="Calibri" pitchFamily="34" charset="-120"/>
+              </a:rPr>
+              <a:t>min-/max-width/height add flexible constraints on top of a base size.</a:t>
+            </a:r>
+            <a:endParaRPr lang="en-US" sz="1250" dirty="0"/>
+          </a:p>
+        </p:txBody>
+      </p:sp>
+      <p:sp>
+        <p:nvSpPr>
+          <p:cNvPr id="13" name="Shape 11"/>
+          <p:cNvSpPr/>
+          <p:nvPr/>
+        </p:nvSpPr>
+        <p:spPr>
+          <a:xfrm>
+            <a:off x="822960" y="4343400"/>
+            <a:ext cx="438912" cy="438912"/>
+          </a:xfrm>
+          <a:prstGeom prst="ellipse">
+            <a:avLst/>
+          </a:prstGeom>
+          <a:solidFill>
+            <a:srgbClr val="FF8A3D"/>
+          </a:solidFill>
+          <a:ln/>
+        </p:spPr>
+      </p:sp>
+      <p:sp>
+        <p:nvSpPr>
+          <p:cNvPr id="14" name="Text 12"/>
+          <p:cNvSpPr txBox="1"/>
+          <p:nvPr/>
+        </p:nvSpPr>
+        <p:spPr>
+          <a:xfrm>
+            <a:off x="822960" y="4343400"/>
+            <a:ext cx="438912" cy="438912"/>
+          </a:xfrm>
+          <a:prstGeom prst="rect">
+            <a:avLst/>
+          </a:prstGeom>
+          <a:noFill/>
+          <a:ln/>
+        </p:spPr>
+        <p:txBody>
+          <a:bodyPr wrap="square" lIns="0" tIns="0" rIns="0" bIns="0" rtlCol="0" anchor="ctr"/>
+          <a:lstStyle/>
+          <a:p>
+            <a:pPr algn="ctr" indent="0" marL="0">
+              <a:buNone/>
+            </a:pPr>
+            <a:r>
+              <a:rPr lang="en-US" sz="1500" b="1" dirty="0">
+                <a:solidFill>
+                  <a:srgbClr val="FFFFFF"/>
+                </a:solidFill>
+                <a:latin typeface="Calibri" pitchFamily="34" charset="0"/>
+                <a:ea typeface="Calibri" pitchFamily="34" charset="-122"/>
+                <a:cs typeface="Calibri" pitchFamily="34" charset="-120"/>
+              </a:rPr>
+              <a:t>4</a:t>
+            </a:r>
+            <a:endParaRPr lang="en-US" sz="1500" dirty="0"/>
+          </a:p>
+        </p:txBody>
+      </p:sp>
+      <p:sp>
+        <p:nvSpPr>
+          <p:cNvPr id="15" name="Text 13"/>
+          <p:cNvSpPr txBox="1"/>
+          <p:nvPr/>
+        </p:nvSpPr>
+        <p:spPr>
+          <a:xfrm>
+            <a:off x="1463040" y="4251960"/>
+            <a:ext cx="10058400" cy="640080"/>
+          </a:xfrm>
+          <a:prstGeom prst="rect">
+            <a:avLst/>
+          </a:prstGeom>
+          <a:noFill/>
+          <a:ln/>
+        </p:spPr>
+        <p:txBody>
+          <a:bodyPr wrap="square" lIns="0" tIns="0" rIns="0" bIns="0" rtlCol="0" anchor="ctr"/>
+          <a:lstStyle/>
+          <a:p>
+            <a:pPr indent="0" marL="0">
+              <a:buNone/>
+            </a:pPr>
+            <a:r>
+              <a:rPr lang="en-US" sz="1250" dirty="0">
+                <a:solidFill>
+                  <a:srgbClr val="C9D3F5"/>
+                </a:solidFill>
+                <a:latin typeface="Calibri" pitchFamily="34" charset="0"/>
+                <a:ea typeface="Calibri" pitchFamily="34" charset="-122"/>
+                <a:cs typeface="Calibri" pitchFamily="34" charset="-120"/>
+              </a:rPr>
+              <a:t>display controls layout behavior: block fills width, inline flows in text, inline-block combines both, none removes the element entirely.</a:t>
+            </a:r>
+            <a:endParaRPr lang="en-US" sz="1250" dirty="0"/>
+          </a:p>
+        </p:txBody>
+      </p:sp>
+      <p:sp>
+        <p:nvSpPr>
+          <p:cNvPr id="16" name="Shape 14"/>
+          <p:cNvSpPr/>
+          <p:nvPr/>
+        </p:nvSpPr>
+        <p:spPr>
+          <a:xfrm>
+            <a:off x="822960" y="5029200"/>
+            <a:ext cx="438912" cy="438912"/>
+          </a:xfrm>
+          <a:prstGeom prst="ellipse">
+            <a:avLst/>
+          </a:prstGeom>
+          <a:solidFill>
+            <a:srgbClr val="FF8A3D"/>
+          </a:solidFill>
+          <a:ln/>
+        </p:spPr>
+      </p:sp>
+      <p:sp>
+        <p:nvSpPr>
+          <p:cNvPr id="17" name="Text 15"/>
+          <p:cNvSpPr txBox="1"/>
+          <p:nvPr/>
+        </p:nvSpPr>
+        <p:spPr>
+          <a:xfrm>
+            <a:off x="822960" y="5029200"/>
+            <a:ext cx="438912" cy="438912"/>
+          </a:xfrm>
+          <a:prstGeom prst="rect">
+            <a:avLst/>
+          </a:prstGeom>
+          <a:noFill/>
+          <a:ln/>
+        </p:spPr>
+        <p:txBody>
+          <a:bodyPr wrap="square" lIns="0" tIns="0" rIns="0" bIns="0" rtlCol="0" anchor="ctr"/>
+          <a:lstStyle/>
+          <a:p>
+            <a:pPr algn="ctr" indent="0" marL="0">
+              <a:buNone/>
+            </a:pPr>
+            <a:r>
+              <a:rPr lang="en-US" sz="1500" b="1" dirty="0">
+                <a:solidFill>
+                  <a:srgbClr val="FFFFFF"/>
+                </a:solidFill>
+                <a:latin typeface="Calibri" pitchFamily="34" charset="0"/>
+                <a:ea typeface="Calibri" pitchFamily="34" charset="-122"/>
+                <a:cs typeface="Calibri" pitchFamily="34" charset="-120"/>
+              </a:rPr>
+              <a:t>5</a:t>
+            </a:r>
+            <a:endParaRPr lang="en-US" sz="1500" dirty="0"/>
+          </a:p>
+        </p:txBody>
+      </p:sp>
+      <p:sp>
+        <p:nvSpPr>
+          <p:cNvPr id="18" name="Text 16"/>
+          <p:cNvSpPr txBox="1"/>
+          <p:nvPr/>
+        </p:nvSpPr>
+        <p:spPr>
+          <a:xfrm>
+            <a:off x="1463040" y="4937760"/>
+            <a:ext cx="10058400" cy="640080"/>
+          </a:xfrm>
+          <a:prstGeom prst="rect">
+            <a:avLst/>
+          </a:prstGeom>
+          <a:noFill/>
+          <a:ln/>
+        </p:spPr>
+        <p:txBody>
+          <a:bodyPr wrap="square" lIns="0" tIns="0" rIns="0" bIns="0" rtlCol="0" anchor="ctr"/>
+          <a:lstStyle/>
+          <a:p>
+            <a:pPr indent="0" marL="0">
+              <a:buNone/>
+            </a:pPr>
+            <a:r>
+              <a:rPr lang="en-US" sz="1250" dirty="0">
+                <a:solidFill>
+                  <a:srgbClr val="C9D3F5"/>
+                </a:solidFill>
+                <a:latin typeface="Calibri" pitchFamily="34" charset="0"/>
+                <a:ea typeface="Calibri" pitchFamily="34" charset="-122"/>
+                <a:cs typeface="Calibri" pitchFamily="34" charset="-120"/>
+              </a:rPr>
+              <a:t>A &lt;ul&gt; styled with li { display: inline-block; } is a real way to build a menu without losing list semantics.</a:t>
+            </a:r>
+            <a:endParaRPr lang="en-US" sz="1250" dirty="0"/>
+          </a:p>
+        </p:txBody>
+      </p:sp>
+      <p:sp>
+        <p:nvSpPr>
+          <p:cNvPr id="19" name="Shape 17"/>
+          <p:cNvSpPr/>
+          <p:nvPr/>
+        </p:nvSpPr>
+        <p:spPr>
+          <a:xfrm>
+            <a:off x="822960" y="5715000"/>
+            <a:ext cx="438912" cy="438912"/>
+          </a:xfrm>
+          <a:prstGeom prst="ellipse">
+            <a:avLst/>
+          </a:prstGeom>
+          <a:solidFill>
+            <a:srgbClr val="FF8A3D"/>
+          </a:solidFill>
+          <a:ln/>
+        </p:spPr>
+      </p:sp>
+      <p:sp>
+        <p:nvSpPr>
+          <p:cNvPr id="20" name="Text 18"/>
+          <p:cNvSpPr txBox="1"/>
+          <p:nvPr/>
+        </p:nvSpPr>
+        <p:spPr>
+          <a:xfrm>
+            <a:off x="822960" y="5715000"/>
+            <a:ext cx="438912" cy="438912"/>
+          </a:xfrm>
+          <a:prstGeom prst="rect">
+            <a:avLst/>
+          </a:prstGeom>
+          <a:noFill/>
+          <a:ln/>
+        </p:spPr>
+        <p:txBody>
+          <a:bodyPr wrap="square" lIns="0" tIns="0" rIns="0" bIns="0" rtlCol="0" anchor="ctr"/>
+          <a:lstStyle/>
+          <a:p>
+            <a:pPr algn="ctr" indent="0" marL="0">
+              <a:buNone/>
+            </a:pPr>
+            <a:r>
+              <a:rPr lang="en-US" sz="1500" b="1" dirty="0">
+                <a:solidFill>
+                  <a:srgbClr val="FFFFFF"/>
+                </a:solidFill>
+                <a:latin typeface="Calibri" pitchFamily="34" charset="0"/>
+                <a:ea typeface="Calibri" pitchFamily="34" charset="-122"/>
+                <a:cs typeface="Calibri" pitchFamily="34" charset="-120"/>
+              </a:rPr>
+              <a:t>6</a:t>
+            </a:r>
+            <a:endParaRPr lang="en-US" sz="1500" dirty="0"/>
+          </a:p>
+        </p:txBody>
+      </p:sp>
+      <p:sp>
+        <p:nvSpPr>
+          <p:cNvPr id="21" name="Text 19"/>
+          <p:cNvSpPr txBox="1"/>
+          <p:nvPr/>
+        </p:nvSpPr>
+        <p:spPr>
+          <a:xfrm>
+            <a:off x="1463040" y="5623560"/>
+            <a:ext cx="10058400" cy="640080"/>
+          </a:xfrm>
+          <a:prstGeom prst="rect">
+            <a:avLst/>
+          </a:prstGeom>
+          <a:noFill/>
+          <a:ln/>
+        </p:spPr>
+        <p:txBody>
+          <a:bodyPr wrap="square" lIns="0" tIns="0" rIns="0" bIns="0" rtlCol="0" anchor="ctr"/>
+          <a:lstStyle/>
+          <a:p>
+            <a:pPr indent="0" marL="0">
+              <a:buNone/>
+            </a:pPr>
+            <a:r>
+              <a:rPr lang="en-US" sz="1250" dirty="0">
+                <a:solidFill>
+                  <a:srgbClr val="C9D3F5"/>
+                </a:solidFill>
+                <a:latin typeface="Calibri" pitchFamily="34" charset="0"/>
+                <a:ea typeface="Calibri" pitchFamily="34" charset="-122"/>
+                <a:cs typeface="Calibri" pitchFamily="34" charset="-120"/>
+              </a:rPr>
+              <a:t>border-radius, box-shadow, and CSS custom properties keep a design finished and consistent.</a:t>
+            </a:r>
+            <a:endParaRPr lang="en-US" sz="1250" dirty="0"/>
+          </a:p>
+        </p:txBody>
+      </p:sp>
+      <p:sp>
+        <p:nvSpPr>
+          <p:cNvPr id="22" name="Text 20"/>
+          <p:cNvSpPr txBox="1"/>
+          <p:nvPr/>
+        </p:nvSpPr>
+        <p:spPr>
+          <a:xfrm>
+            <a:off x="640080" y="6446520"/>
+            <a:ext cx="8686800" cy="292608"/>
+          </a:xfrm>
+          <a:prstGeom prst="rect">
+            <a:avLst/>
+          </a:prstGeom>
+          <a:noFill/>
+          <a:ln/>
+        </p:spPr>
+        <p:txBody>
+          <a:bodyPr wrap="square" lIns="0" tIns="0" rIns="0" bIns="0" rtlCol="0" anchor="ctr"/>
+          <a:lstStyle/>
+          <a:p>
+            <a:pPr algn="l" indent="0" marL="0">
+              <a:buNone/>
+            </a:pPr>
+            <a:r>
+              <a:rPr lang="en-US" sz="900" dirty="0">
+                <a:solidFill>
+                  <a:srgbClr val="9AA3D8"/>
+                </a:solidFill>
+                <a:latin typeface="Calibri" pitchFamily="34" charset="0"/>
+                <a:ea typeface="Calibri" pitchFamily="34" charset="-122"/>
+                <a:cs typeface="Calibri" pitchFamily="34" charset="-120"/>
+              </a:rPr>
+              <a:t>Usman Akram  •  COMSATS University Islamabad</a:t>
+            </a:r>
+            <a:endParaRPr lang="en-US" sz="900" dirty="0"/>
+          </a:p>
+        </p:txBody>
+      </p:sp>
+      <p:sp>
+        <p:nvSpPr>
+          <p:cNvPr id="23" name="Text 21"/>
+          <p:cNvSpPr txBox="1"/>
+          <p:nvPr/>
+        </p:nvSpPr>
+        <p:spPr>
+          <a:xfrm>
+            <a:off x="11155680" y="6446520"/>
+            <a:ext cx="457200" cy="292608"/>
+          </a:xfrm>
+          <a:prstGeom prst="rect">
+            <a:avLst/>
+          </a:prstGeom>
+          <a:noFill/>
+          <a:ln/>
+        </p:spPr>
+        <p:txBody>
+          <a:bodyPr wrap="square" lIns="0" tIns="0" rIns="0" bIns="0" rtlCol="0" anchor="ctr"/>
+          <a:lstStyle/>
+          <a:p>
+            <a:pPr algn="r" indent="0" marL="0">
+              <a:buNone/>
+            </a:pPr>
+            <a:r>
+              <a:rPr lang="en-US" sz="900" dirty="0">
+                <a:solidFill>
+                  <a:srgbClr val="9AA3D8"/>
+                </a:solidFill>
+                <a:latin typeface="Calibri" pitchFamily="34" charset="0"/>
+                <a:ea typeface="Calibri" pitchFamily="34" charset="-122"/>
+                <a:cs typeface="Calibri" pitchFamily="34" charset="-120"/>
+              </a:rPr>
+              <a:t>21</a:t>
             </a:r>
             <a:endParaRPr lang="en-US" sz="900" dirty="0"/>
           </a:p>

--- a/slides/CSC336-Lecture-06-CSS-Box-Model-and-Display.pptx
+++ b/slides/CSC336-Lecture-06-CSS-Box-Model-and-Display.pptx
@@ -4268,12 +4268,156 @@
         </p:nvSpPr>
         <p:spPr>
           <a:xfrm>
-            <a:off x="530352" y="1947672"/>
-            <a:ext cx="11130991" cy="4334256"/>
+            <a:off x="640080" y="1965960"/>
+            <a:ext cx="10911535" cy="1739265"/>
           </a:xfrm>
           <a:prstGeom prst="roundRect">
             <a:avLst>
-              <a:gd name="adj" fmla="val 1266"/>
+              <a:gd name="adj" fmla="val 4206"/>
+            </a:avLst>
+          </a:prstGeom>
+          <a:solidFill>
+            <a:srgbClr val="1E1E4C"/>
+          </a:solidFill>
+          <a:ln/>
+        </p:spPr>
+      </p:sp>
+      <p:sp>
+        <p:nvSpPr>
+          <p:cNvPr id="5" name="Text 3"/>
+          <p:cNvSpPr txBox="1"/>
+          <p:nvPr/>
+        </p:nvSpPr>
+        <p:spPr>
+          <a:xfrm>
+            <a:off x="960120" y="2194560"/>
+            <a:ext cx="10271455" cy="1282065"/>
+          </a:xfrm>
+          <a:prstGeom prst="rect">
+            <a:avLst/>
+          </a:prstGeom>
+          <a:noFill/>
+          <a:ln/>
+        </p:spPr>
+        <p:txBody>
+          <a:bodyPr wrap="square" lIns="0" tIns="0" rIns="0" bIns="0" rtlCol="0" anchor="t"/>
+          <a:lstStyle/>
+          <a:p>
+            <a:pPr indent="0" marL="0">
+              <a:lnSpc>
+                <a:spcPct val="125000"/>
+              </a:lnSpc>
+              <a:buNone/>
+            </a:pPr>
+            <a:r>
+              <a:rPr lang="en-US" sz="1250" dirty="0">
+                <a:solidFill>
+                  <a:srgbClr val="C9D3F5"/>
+                </a:solidFill>
+                <a:latin typeface="Courier New" pitchFamily="34" charset="0"/>
+                <a:ea typeface="Courier New" pitchFamily="34" charset="-122"/>
+                <a:cs typeface="Courier New" pitchFamily="34" charset="-120"/>
+              </a:rPr>
+              <a:t>.section { display: block; }        /* new line, full width  */</a:t>
+            </a:r>
+            <a:endParaRPr lang="en-US" sz="1250" dirty="0"/>
+          </a:p>
+          <a:p>
+            <a:pPr indent="0" marL="0">
+              <a:lnSpc>
+                <a:spcPct val="125000"/>
+              </a:lnSpc>
+              <a:buNone/>
+            </a:pPr>
+            <a:r>
+              <a:rPr lang="en-US" sz="1250" dirty="0">
+                <a:solidFill>
+                  <a:srgbClr val="C9D3F5"/>
+                </a:solidFill>
+                <a:latin typeface="Courier New" pitchFamily="34" charset="0"/>
+                <a:ea typeface="Courier New" pitchFamily="34" charset="-122"/>
+                <a:cs typeface="Courier New" pitchFamily="34" charset="-120"/>
+              </a:rPr>
+              <a:t>.tag     { display: inline; }       /* flows in text, no w/h */</a:t>
+            </a:r>
+            <a:endParaRPr lang="en-US" sz="1250" dirty="0"/>
+          </a:p>
+          <a:p>
+            <a:pPr indent="0" marL="0">
+              <a:lnSpc>
+                <a:spcPct val="125000"/>
+              </a:lnSpc>
+              <a:buNone/>
+            </a:pPr>
+            <a:r>
+              <a:rPr lang="en-US" sz="1250" dirty="0">
+                <a:solidFill>
+                  <a:srgbClr val="C9D3F5"/>
+                </a:solidFill>
+                <a:latin typeface="Courier New" pitchFamily="34" charset="0"/>
+                <a:ea typeface="Courier New" pitchFamily="34" charset="-122"/>
+                <a:cs typeface="Courier New" pitchFamily="34" charset="-120"/>
+              </a:rPr>
+              <a:t>.button  { display: inline-block;   /* inline + respects w/h */</a:t>
+            </a:r>
+            <a:endParaRPr lang="en-US" sz="1250" dirty="0"/>
+          </a:p>
+          <a:p>
+            <a:pPr indent="0" marL="0">
+              <a:lnSpc>
+                <a:spcPct val="125000"/>
+              </a:lnSpc>
+              <a:buNone/>
+            </a:pPr>
+            <a:r>
+              <a:rPr lang="en-US" sz="1250" dirty="0">
+                <a:solidFill>
+                  <a:srgbClr val="C9D3F5"/>
+                </a:solidFill>
+                <a:latin typeface="Courier New" pitchFamily="34" charset="0"/>
+                <a:ea typeface="Courier New" pitchFamily="34" charset="-122"/>
+                <a:cs typeface="Courier New" pitchFamily="34" charset="-120"/>
+              </a:rPr>
+              <a:t>           width: 120px; height: 40px; }</a:t>
+            </a:r>
+            <a:endParaRPr lang="en-US" sz="1250" dirty="0"/>
+          </a:p>
+          <a:p>
+            <a:pPr indent="0" marL="0">
+              <a:lnSpc>
+                <a:spcPct val="125000"/>
+              </a:lnSpc>
+              <a:buNone/>
+            </a:pPr>
+            <a:r>
+              <a:rPr lang="en-US" sz="1250" dirty="0">
+                <a:solidFill>
+                  <a:srgbClr val="C9D3F5"/>
+                </a:solidFill>
+                <a:latin typeface="Courier New" pitchFamily="34" charset="0"/>
+                <a:ea typeface="Courier New" pitchFamily="34" charset="-122"/>
+                <a:cs typeface="Courier New" pitchFamily="34" charset="-120"/>
+              </a:rPr>
+              <a:t>.hidden-panel { display: none; }    /* removed entirely      */</a:t>
+            </a:r>
+            <a:endParaRPr lang="en-US" sz="1250" dirty="0"/>
+          </a:p>
+        </p:txBody>
+      </p:sp>
+      <p:sp>
+        <p:nvSpPr>
+          <p:cNvPr id="6" name="Shape 4"/>
+          <p:cNvSpPr/>
+          <p:nvPr/>
+        </p:nvSpPr>
+        <p:spPr>
+          <a:xfrm>
+            <a:off x="530352" y="3869817"/>
+            <a:ext cx="11130991" cy="2457831"/>
+          </a:xfrm>
+          <a:prstGeom prst="roundRect">
+            <a:avLst>
+              <a:gd name="adj" fmla="val 2232"/>
             </a:avLst>
           </a:prstGeom>
           <a:solidFill>
@@ -4296,7 +4440,7 @@
       </p:sp>
       <p:pic>
         <p:nvPicPr>
-          <p:cNvPr id="5" name="Image 0" descr="D:/GitHub/mern-web-book/docs/assets/img/lecture-06/display-comparison.png">    </p:cNvPr>
+          <p:cNvPr id="7" name="Image 0" descr="D:/GitHub/mern-web-book/docs/assets/img/lecture-06/display-comparison.png">    </p:cNvPr>
           <p:cNvPicPr>
             <a:picLocks noChangeAspect="1"/>
           </p:cNvPicPr>
@@ -4310,8 +4454,8 @@
         </p:blipFill>
         <p:spPr>
           <a:xfrm>
-            <a:off x="3358315" y="2057400"/>
-            <a:ext cx="5475064" cy="4114800"/>
+            <a:off x="4606681" y="3979545"/>
+            <a:ext cx="2978334" cy="2238375"/>
           </a:xfrm>
           <a:prstGeom prst="rect">
             <a:avLst/>
@@ -4320,7 +4464,7 @@
       </p:pic>
       <p:sp>
         <p:nvSpPr>
-          <p:cNvPr id="6" name="Text 3"/>
+          <p:cNvPr id="8" name="Text 5"/>
           <p:cNvSpPr txBox="1"/>
           <p:nvPr/>
         </p:nvSpPr>
@@ -4359,7 +4503,7 @@
       </p:sp>
       <p:sp>
         <p:nvSpPr>
-          <p:cNvPr id="7" name="Text 4"/>
+          <p:cNvPr id="9" name="Text 6"/>
           <p:cNvSpPr txBox="1"/>
           <p:nvPr/>
         </p:nvSpPr>
@@ -4515,11 +4659,11 @@
         <p:spPr>
           <a:xfrm>
             <a:off x="640080" y="1965960"/>
-            <a:ext cx="10911535" cy="1453896"/>
+            <a:ext cx="10911535" cy="1082040"/>
           </a:xfrm>
           <a:prstGeom prst="roundRect">
             <a:avLst>
-              <a:gd name="adj" fmla="val 5031"/>
+              <a:gd name="adj" fmla="val 6761"/>
             </a:avLst>
           </a:prstGeom>
           <a:solidFill>
@@ -4537,7 +4681,7 @@
         <p:spPr>
           <a:xfrm>
             <a:off x="960120" y="2194560"/>
-            <a:ext cx="10271455" cy="996696"/>
+            <a:ext cx="10271455" cy="624840"/>
           </a:xfrm>
           <a:prstGeom prst="rect">
             <a:avLst/>
@@ -4598,8 +4742,8 @@
         </p:nvSpPr>
         <p:spPr>
           <a:xfrm>
-            <a:off x="640080" y="3648456"/>
-            <a:ext cx="10911535" cy="2615184"/>
+            <a:off x="640080" y="3276600"/>
+            <a:ext cx="10911535" cy="2987040"/>
           </a:xfrm>
           <a:prstGeom prst="rect">
             <a:avLst/>
@@ -4826,11 +4970,11 @@
         <p:spPr>
           <a:xfrm>
             <a:off x="640080" y="1965960"/>
-            <a:ext cx="10911535" cy="3291840"/>
+            <a:ext cx="10911535" cy="2415540"/>
           </a:xfrm>
           <a:prstGeom prst="roundRect">
             <a:avLst>
-              <a:gd name="adj" fmla="val 2222"/>
+              <a:gd name="adj" fmla="val 3028"/>
             </a:avLst>
           </a:prstGeom>
           <a:solidFill>
@@ -4848,7 +4992,7 @@
         <p:spPr>
           <a:xfrm>
             <a:off x="960120" y="2194560"/>
-            <a:ext cx="10271455" cy="2834640"/>
+            <a:ext cx="10271455" cy="1958340"/>
           </a:xfrm>
           <a:prstGeom prst="rect">
             <a:avLst/>
@@ -5009,8 +5153,8 @@
         </p:nvSpPr>
         <p:spPr>
           <a:xfrm>
-            <a:off x="640080" y="5486400"/>
-            <a:ext cx="10911535" cy="777240"/>
+            <a:off x="640080" y="4610100"/>
+            <a:ext cx="10911535" cy="1653540"/>
           </a:xfrm>
           <a:prstGeom prst="rect">
             <a:avLst/>
@@ -5237,11 +5381,11 @@
         <p:spPr>
           <a:xfrm>
             <a:off x="640080" y="1965960"/>
-            <a:ext cx="10911535" cy="1453896"/>
+            <a:ext cx="10911535" cy="1082040"/>
           </a:xfrm>
           <a:prstGeom prst="roundRect">
             <a:avLst>
-              <a:gd name="adj" fmla="val 5031"/>
+              <a:gd name="adj" fmla="val 6761"/>
             </a:avLst>
           </a:prstGeom>
           <a:solidFill>
@@ -5259,7 +5403,7 @@
         <p:spPr>
           <a:xfrm>
             <a:off x="960120" y="2194560"/>
-            <a:ext cx="10271455" cy="996696"/>
+            <a:ext cx="10271455" cy="624840"/>
           </a:xfrm>
           <a:prstGeom prst="rect">
             <a:avLst/>
@@ -5320,8 +5464,8 @@
         </p:nvSpPr>
         <p:spPr>
           <a:xfrm>
-            <a:off x="640080" y="3648456"/>
-            <a:ext cx="10911535" cy="2615184"/>
+            <a:off x="640080" y="3276600"/>
+            <a:ext cx="10911535" cy="2987040"/>
           </a:xfrm>
           <a:prstGeom prst="rect">
             <a:avLst/>
@@ -6159,11 +6303,11 @@
         <p:spPr>
           <a:xfrm>
             <a:off x="640080" y="1965960"/>
-            <a:ext cx="10911535" cy="3374136"/>
+            <a:ext cx="10911535" cy="2415540"/>
           </a:xfrm>
           <a:prstGeom prst="roundRect">
             <a:avLst>
-              <a:gd name="adj" fmla="val 2168"/>
+              <a:gd name="adj" fmla="val 3028"/>
             </a:avLst>
           </a:prstGeom>
           <a:solidFill>
@@ -6181,7 +6325,7 @@
         <p:spPr>
           <a:xfrm>
             <a:off x="960120" y="2194560"/>
-            <a:ext cx="10271455" cy="2916936"/>
+            <a:ext cx="10271455" cy="1958340"/>
           </a:xfrm>
           <a:prstGeom prst="rect">
             <a:avLst/>
@@ -9016,12 +9160,136 @@
         </p:nvSpPr>
         <p:spPr>
           <a:xfrm>
-            <a:off x="530352" y="1947672"/>
-            <a:ext cx="11130991" cy="4334256"/>
+            <a:off x="640080" y="1965960"/>
+            <a:ext cx="10911535" cy="1501140"/>
           </a:xfrm>
           <a:prstGeom prst="roundRect">
             <a:avLst>
-              <a:gd name="adj" fmla="val 1266"/>
+              <a:gd name="adj" fmla="val 4873"/>
+            </a:avLst>
+          </a:prstGeom>
+          <a:solidFill>
+            <a:srgbClr val="1E1E4C"/>
+          </a:solidFill>
+          <a:ln/>
+        </p:spPr>
+      </p:sp>
+      <p:sp>
+        <p:nvSpPr>
+          <p:cNvPr id="5" name="Text 3"/>
+          <p:cNvSpPr txBox="1"/>
+          <p:nvPr/>
+        </p:nvSpPr>
+        <p:spPr>
+          <a:xfrm>
+            <a:off x="960120" y="2194560"/>
+            <a:ext cx="10271455" cy="1043940"/>
+          </a:xfrm>
+          <a:prstGeom prst="rect">
+            <a:avLst/>
+          </a:prstGeom>
+          <a:noFill/>
+          <a:ln/>
+        </p:spPr>
+        <p:txBody>
+          <a:bodyPr wrap="square" lIns="0" tIns="0" rIns="0" bIns="0" rtlCol="0" anchor="t"/>
+          <a:lstStyle/>
+          <a:p>
+            <a:pPr indent="0" marL="0">
+              <a:lnSpc>
+                <a:spcPct val="125000"/>
+              </a:lnSpc>
+              <a:buNone/>
+            </a:pPr>
+            <a:r>
+              <a:rPr lang="en-US" sz="1250" dirty="0">
+                <a:solidFill>
+                  <a:srgbClr val="C9D3F5"/>
+                </a:solidFill>
+                <a:latin typeface="Courier New" pitchFamily="34" charset="0"/>
+                <a:ea typeface="Courier New" pitchFamily="34" charset="-122"/>
+                <a:cs typeface="Courier New" pitchFamily="34" charset="-120"/>
+              </a:rPr>
+              <a:t>.content { width: 300px; height: 150px; background: steelblue; }</a:t>
+            </a:r>
+            <a:endParaRPr lang="en-US" sz="1250" dirty="0"/>
+          </a:p>
+          <a:p>
+            <a:pPr indent="0" marL="0">
+              <a:lnSpc>
+                <a:spcPct val="125000"/>
+              </a:lnSpc>
+              <a:buNone/>
+            </a:pPr>
+            <a:r>
+              <a:rPr lang="en-US" sz="1250" dirty="0">
+                <a:solidFill>
+                  <a:srgbClr val="C9D3F5"/>
+                </a:solidFill>
+                <a:latin typeface="Courier New" pitchFamily="34" charset="0"/>
+                <a:ea typeface="Courier New" pitchFamily="34" charset="-122"/>
+                <a:cs typeface="Courier New" pitchFamily="34" charset="-120"/>
+              </a:rPr>
+              <a:t>.padding { padding: 20px; background: seagreen; }</a:t>
+            </a:r>
+            <a:endParaRPr lang="en-US" sz="1250" dirty="0"/>
+          </a:p>
+          <a:p>
+            <a:pPr indent="0" marL="0">
+              <a:lnSpc>
+                <a:spcPct val="125000"/>
+              </a:lnSpc>
+              <a:buNone/>
+            </a:pPr>
+            <a:r>
+              <a:rPr lang="en-US" sz="1250" dirty="0">
+                <a:solidFill>
+                  <a:srgbClr val="C9D3F5"/>
+                </a:solidFill>
+                <a:latin typeface="Courier New" pitchFamily="34" charset="0"/>
+                <a:ea typeface="Courier New" pitchFamily="34" charset="-122"/>
+                <a:cs typeface="Courier New" pitchFamily="34" charset="-120"/>
+              </a:rPr>
+              <a:t>.border  { border: 20px solid darkorange; }</a:t>
+            </a:r>
+            <a:endParaRPr lang="en-US" sz="1250" dirty="0"/>
+          </a:p>
+          <a:p>
+            <a:pPr indent="0" marL="0">
+              <a:lnSpc>
+                <a:spcPct val="125000"/>
+              </a:lnSpc>
+              <a:buNone/>
+            </a:pPr>
+            <a:r>
+              <a:rPr lang="en-US" sz="1250" dirty="0">
+                <a:solidFill>
+                  <a:srgbClr val="C9D3F5"/>
+                </a:solidFill>
+                <a:latin typeface="Courier New" pitchFamily="34" charset="0"/>
+                <a:ea typeface="Courier New" pitchFamily="34" charset="-122"/>
+                <a:cs typeface="Courier New" pitchFamily="34" charset="-120"/>
+              </a:rPr>
+              <a:t>.margin  { margin: 20px; background: wheat; }</a:t>
+            </a:r>
+            <a:endParaRPr lang="en-US" sz="1250" dirty="0"/>
+          </a:p>
+        </p:txBody>
+      </p:sp>
+      <p:sp>
+        <p:nvSpPr>
+          <p:cNvPr id="6" name="Shape 4"/>
+          <p:cNvSpPr/>
+          <p:nvPr/>
+        </p:nvSpPr>
+        <p:spPr>
+          <a:xfrm>
+            <a:off x="530352" y="3631692"/>
+            <a:ext cx="11130991" cy="2695956"/>
+          </a:xfrm>
+          <a:prstGeom prst="roundRect">
+            <a:avLst>
+              <a:gd name="adj" fmla="val 2035"/>
             </a:avLst>
           </a:prstGeom>
           <a:solidFill>
@@ -9044,7 +9312,7 @@
       </p:sp>
       <p:pic>
         <p:nvPicPr>
-          <p:cNvPr id="5" name="Image 0" descr="D:/GitHub/mern-web-book/docs/assets/img/lecture-06/box-model-layers.png">    </p:cNvPr>
+          <p:cNvPr id="7" name="Image 0" descr="D:/GitHub/mern-web-book/docs/assets/img/lecture-06/box-model-layers.png">    </p:cNvPr>
           <p:cNvPicPr>
             <a:picLocks noChangeAspect="1"/>
           </p:cNvPicPr>
@@ -9058,8 +9326,8 @@
         </p:blipFill>
         <p:spPr>
           <a:xfrm>
-            <a:off x="3200248" y="2057400"/>
-            <a:ext cx="5791200" cy="4114800"/>
+            <a:off x="4353125" y="3741420"/>
+            <a:ext cx="3485444" cy="2476500"/>
           </a:xfrm>
           <a:prstGeom prst="rect">
             <a:avLst/>
@@ -9068,7 +9336,7 @@
       </p:pic>
       <p:sp>
         <p:nvSpPr>
-          <p:cNvPr id="6" name="Text 3"/>
+          <p:cNvPr id="8" name="Text 5"/>
           <p:cNvSpPr txBox="1"/>
           <p:nvPr/>
         </p:nvSpPr>
@@ -9107,7 +9375,7 @@
       </p:sp>
       <p:sp>
         <p:nvSpPr>
-          <p:cNvPr id="7" name="Text 4"/>
+          <p:cNvPr id="9" name="Text 6"/>
           <p:cNvSpPr txBox="1"/>
           <p:nvPr/>
         </p:nvSpPr>
@@ -9263,11 +9531,11 @@
         <p:spPr>
           <a:xfrm>
             <a:off x="640080" y="1965960"/>
-            <a:ext cx="10911535" cy="1453896"/>
+            <a:ext cx="10911535" cy="1082040"/>
           </a:xfrm>
           <a:prstGeom prst="roundRect">
             <a:avLst>
-              <a:gd name="adj" fmla="val 5031"/>
+              <a:gd name="adj" fmla="val 6761"/>
             </a:avLst>
           </a:prstGeom>
           <a:solidFill>
@@ -9285,7 +9553,7 @@
         <p:spPr>
           <a:xfrm>
             <a:off x="960120" y="2194560"/>
-            <a:ext cx="10271455" cy="996696"/>
+            <a:ext cx="10271455" cy="624840"/>
           </a:xfrm>
           <a:prstGeom prst="rect">
             <a:avLst/>
@@ -9346,8 +9614,8 @@
         </p:nvSpPr>
         <p:spPr>
           <a:xfrm>
-            <a:off x="640080" y="3648456"/>
-            <a:ext cx="10911535" cy="2615184"/>
+            <a:off x="640080" y="3276600"/>
+            <a:ext cx="10911535" cy="2987040"/>
           </a:xfrm>
           <a:prstGeom prst="rect">
             <a:avLst/>
@@ -10113,11 +10381,11 @@
         <p:spPr>
           <a:xfrm>
             <a:off x="640080" y="1965960"/>
-            <a:ext cx="10911535" cy="3374136"/>
+            <a:ext cx="10911535" cy="2415540"/>
           </a:xfrm>
           <a:prstGeom prst="roundRect">
             <a:avLst>
-              <a:gd name="adj" fmla="val 2168"/>
+              <a:gd name="adj" fmla="val 3028"/>
             </a:avLst>
           </a:prstGeom>
           <a:solidFill>
@@ -10135,7 +10403,7 @@
         <p:spPr>
           <a:xfrm>
             <a:off x="960120" y="2194560"/>
-            <a:ext cx="10271455" cy="2916936"/>
+            <a:ext cx="10271455" cy="1958340"/>
           </a:xfrm>
           <a:prstGeom prst="rect">
             <a:avLst/>

--- a/slides/CSC336-Lecture-06-CSS-Box-Model-and-Display.pptx
+++ b/slides/CSC336-Lecture-06-CSS-Box-Model-and-Display.pptx
@@ -26,9 +26,11 @@
     <p:sldId id="274" r:id="rId20"/>
     <p:sldId id="275" r:id="rId21"/>
     <p:sldId id="276" r:id="rId22"/>
+    <p:sldId id="277" r:id="rId23"/>
+    <p:sldId id="278" r:id="rId24"/>
   </p:sldIdLst>
   <p:notesMasterIdLst>
-    <p:notesMasterId r:id="rId23"/>
+    <p:notesMasterId r:id="rId25"/>
   </p:notesMasterIdLst>
   <p:sldSz cx="12192000" cy="6858000"/>
   <p:notesSz cx="6858000" cy="12192000"/>
@@ -1690,6 +1692,182 @@
             <a:fld id="{F7021451-1387-4CA6-816F-3879F97B5CBC}" type="slidenum">
               <a:rPr lang="en-US"/>
               <a:t>21</a:t>
+            </a:fld>
+            <a:endParaRPr lang="en-US"/>
+          </a:p>
+        </p:txBody>
+      </p:sp>
+    </p:spTree>
+    <p:extLst>
+      <p:ext uri="{BB962C8B-B14F-4D97-AF65-F5344CB8AC3E}">
+        <p14:creationId xmlns:p14="http://schemas.microsoft.com/office/powerpoint/2010/main" val="1024086991"/>
+      </p:ext>
+    </p:extLst>
+  </p:cSld>
+  <p:clrMapOvr>
+    <a:masterClrMapping/>
+  </p:clrMapOvr>
+</p:notes>
+</file>
+
+<file path=ppt/notesSlides/notesSlide22.xml><?xml version="1.0" encoding="utf-8"?>
+<p:notes xmlns:a="http://schemas.openxmlformats.org/drawingml/2006/main" xmlns:r="http://schemas.openxmlformats.org/officeDocument/2006/relationships" xmlns:p="http://schemas.openxmlformats.org/presentationml/2006/main">
+  <p:cSld>
+    <p:spTree>
+      <p:nvGrpSpPr>
+        <p:cNvPr id="1" name=""/>
+        <p:cNvGrpSpPr/>
+        <p:nvPr/>
+      </p:nvGrpSpPr>
+      <p:grpSpPr>
+        <a:xfrm>
+          <a:off x="0" y="0"/>
+          <a:ext cx="0" cy="0"/>
+          <a:chOff x="0" y="0"/>
+          <a:chExt cx="0" cy="0"/>
+        </a:xfrm>
+      </p:grpSpPr>
+      <p:sp>
+        <p:nvSpPr>
+          <p:cNvPr id="2" name="Slide Image Placeholder 1"/>
+          <p:cNvSpPr>
+            <a:spLocks noGrp="1" noRot="1" noChangeAspect="1"/>
+          </p:cNvSpPr>
+          <p:nvPr>
+            <p:ph type="sldImg"/>
+          </p:nvPr>
+        </p:nvSpPr>
+        <p:spPr/>
+      </p:sp>
+      <p:sp>
+        <p:nvSpPr>
+          <p:cNvPr id="3" name="Notes Placeholder 2"/>
+          <p:cNvSpPr>
+            <a:spLocks noGrp="1"/>
+          </p:cNvSpPr>
+          <p:nvPr>
+            <p:ph type="body" idx="1"/>
+          </p:nvPr>
+        </p:nvSpPr>
+        <p:spPr/>
+        <p:txBody>
+          <a:bodyPr/>
+          <a:lstStyle/>
+          <a:p>
+            <a:r>
+              <a:rPr lang="en-US" dirty="0"/>
+              <a:t/>
+            </a:r>
+            <a:endParaRPr lang="en-US" dirty="0"/>
+          </a:p>
+        </p:txBody>
+      </p:sp>
+      <p:sp>
+        <p:nvSpPr>
+          <p:cNvPr id="4" name="Slide Number Placeholder 3"/>
+          <p:cNvSpPr>
+            <a:spLocks noGrp="1"/>
+          </p:cNvSpPr>
+          <p:nvPr>
+            <p:ph type="sldNum" sz="quarter" idx="10"/>
+          </p:nvPr>
+        </p:nvSpPr>
+        <p:spPr/>
+        <p:txBody>
+          <a:bodyPr/>
+          <a:lstStyle/>
+          <a:p>
+            <a:fld id="{F7021451-1387-4CA6-816F-3879F97B5CBC}" type="slidenum">
+              <a:rPr lang="en-US"/>
+              <a:t>22</a:t>
+            </a:fld>
+            <a:endParaRPr lang="en-US"/>
+          </a:p>
+        </p:txBody>
+      </p:sp>
+    </p:spTree>
+    <p:extLst>
+      <p:ext uri="{BB962C8B-B14F-4D97-AF65-F5344CB8AC3E}">
+        <p14:creationId xmlns:p14="http://schemas.microsoft.com/office/powerpoint/2010/main" val="1024086991"/>
+      </p:ext>
+    </p:extLst>
+  </p:cSld>
+  <p:clrMapOvr>
+    <a:masterClrMapping/>
+  </p:clrMapOvr>
+</p:notes>
+</file>
+
+<file path=ppt/notesSlides/notesSlide23.xml><?xml version="1.0" encoding="utf-8"?>
+<p:notes xmlns:a="http://schemas.openxmlformats.org/drawingml/2006/main" xmlns:r="http://schemas.openxmlformats.org/officeDocument/2006/relationships" xmlns:p="http://schemas.openxmlformats.org/presentationml/2006/main">
+  <p:cSld>
+    <p:spTree>
+      <p:nvGrpSpPr>
+        <p:cNvPr id="1" name=""/>
+        <p:cNvGrpSpPr/>
+        <p:nvPr/>
+      </p:nvGrpSpPr>
+      <p:grpSpPr>
+        <a:xfrm>
+          <a:off x="0" y="0"/>
+          <a:ext cx="0" cy="0"/>
+          <a:chOff x="0" y="0"/>
+          <a:chExt cx="0" cy="0"/>
+        </a:xfrm>
+      </p:grpSpPr>
+      <p:sp>
+        <p:nvSpPr>
+          <p:cNvPr id="2" name="Slide Image Placeholder 1"/>
+          <p:cNvSpPr>
+            <a:spLocks noGrp="1" noRot="1" noChangeAspect="1"/>
+          </p:cNvSpPr>
+          <p:nvPr>
+            <p:ph type="sldImg"/>
+          </p:nvPr>
+        </p:nvSpPr>
+        <p:spPr/>
+      </p:sp>
+      <p:sp>
+        <p:nvSpPr>
+          <p:cNvPr id="3" name="Notes Placeholder 2"/>
+          <p:cNvSpPr>
+            <a:spLocks noGrp="1"/>
+          </p:cNvSpPr>
+          <p:nvPr>
+            <p:ph type="body" idx="1"/>
+          </p:nvPr>
+        </p:nvSpPr>
+        <p:spPr/>
+        <p:txBody>
+          <a:bodyPr/>
+          <a:lstStyle/>
+          <a:p>
+            <a:r>
+              <a:rPr lang="en-US" dirty="0"/>
+              <a:t/>
+            </a:r>
+            <a:endParaRPr lang="en-US" dirty="0"/>
+          </a:p>
+        </p:txBody>
+      </p:sp>
+      <p:sp>
+        <p:nvSpPr>
+          <p:cNvPr id="4" name="Slide Number Placeholder 3"/>
+          <p:cNvSpPr>
+            <a:spLocks noGrp="1"/>
+          </p:cNvSpPr>
+          <p:nvPr>
+            <p:ph type="sldNum" sz="quarter" idx="10"/>
+          </p:nvPr>
+        </p:nvSpPr>
+        <p:spPr/>
+        <p:txBody>
+          <a:bodyPr/>
+          <a:lstStyle/>
+          <a:p>
+            <a:fld id="{F7021451-1387-4CA6-816F-3879F97B5CBC}" type="slidenum">
+              <a:rPr lang="en-US"/>
+              <a:t>23</a:t>
             </a:fld>
             <a:endParaRPr lang="en-US"/>
           </a:p>
@@ -6761,7 +6939,7 @@
         </p:nvSpPr>
         <p:spPr>
           <a:xfrm>
-            <a:off x="685800" y="2679192"/>
+            <a:off x="685800" y="2689860"/>
             <a:ext cx="457200" cy="457200"/>
           </a:xfrm>
           <a:prstGeom prst="ellipse">
@@ -6781,7 +6959,7 @@
         </p:nvSpPr>
         <p:spPr>
           <a:xfrm>
-            <a:off x="685800" y="2679192"/>
+            <a:off x="685800" y="2689860"/>
             <a:ext cx="457200" cy="457200"/>
           </a:xfrm>
           <a:prstGeom prst="rect">
@@ -6820,7 +6998,7 @@
         </p:nvSpPr>
         <p:spPr>
           <a:xfrm>
-            <a:off x="1371600" y="2606040"/>
+            <a:off x="1371600" y="2616708"/>
             <a:ext cx="10180015" cy="640080"/>
           </a:xfrm>
           <a:prstGeom prst="rect">
@@ -6859,7 +7037,7 @@
         </p:nvSpPr>
         <p:spPr>
           <a:xfrm>
-            <a:off x="685800" y="3392424"/>
+            <a:off x="685800" y="3413760"/>
             <a:ext cx="457200" cy="457200"/>
           </a:xfrm>
           <a:prstGeom prst="ellipse">
@@ -6879,7 +7057,7 @@
         </p:nvSpPr>
         <p:spPr>
           <a:xfrm>
-            <a:off x="685800" y="3392424"/>
+            <a:off x="685800" y="3413760"/>
             <a:ext cx="457200" cy="457200"/>
           </a:xfrm>
           <a:prstGeom prst="rect">
@@ -6918,7 +7096,7 @@
         </p:nvSpPr>
         <p:spPr>
           <a:xfrm>
-            <a:off x="1371600" y="3319272"/>
+            <a:off x="1371600" y="3340608"/>
             <a:ext cx="10180015" cy="640080"/>
           </a:xfrm>
           <a:prstGeom prst="rect">
@@ -6957,7 +7135,7 @@
         </p:nvSpPr>
         <p:spPr>
           <a:xfrm>
-            <a:off x="685800" y="4105656"/>
+            <a:off x="685800" y="4137660"/>
             <a:ext cx="457200" cy="457200"/>
           </a:xfrm>
           <a:prstGeom prst="ellipse">
@@ -6977,7 +7155,7 @@
         </p:nvSpPr>
         <p:spPr>
           <a:xfrm>
-            <a:off x="685800" y="4105656"/>
+            <a:off x="685800" y="4137660"/>
             <a:ext cx="457200" cy="457200"/>
           </a:xfrm>
           <a:prstGeom prst="rect">
@@ -7016,7 +7194,7 @@
         </p:nvSpPr>
         <p:spPr>
           <a:xfrm>
-            <a:off x="1371600" y="4032504"/>
+            <a:off x="1371600" y="4064508"/>
             <a:ext cx="10180015" cy="640080"/>
           </a:xfrm>
           <a:prstGeom prst="rect">
@@ -7055,7 +7233,7 @@
         </p:nvSpPr>
         <p:spPr>
           <a:xfrm>
-            <a:off x="685800" y="4818888"/>
+            <a:off x="685800" y="4861560"/>
             <a:ext cx="457200" cy="457200"/>
           </a:xfrm>
           <a:prstGeom prst="ellipse">
@@ -7075,7 +7253,7 @@
         </p:nvSpPr>
         <p:spPr>
           <a:xfrm>
-            <a:off x="685800" y="4818888"/>
+            <a:off x="685800" y="4861560"/>
             <a:ext cx="457200" cy="457200"/>
           </a:xfrm>
           <a:prstGeom prst="rect">
@@ -7114,7 +7292,7 @@
         </p:nvSpPr>
         <p:spPr>
           <a:xfrm>
-            <a:off x="1371600" y="4745736"/>
+            <a:off x="1371600" y="4788408"/>
             <a:ext cx="10180015" cy="640080"/>
           </a:xfrm>
           <a:prstGeom prst="rect">
@@ -7153,7 +7331,7 @@
         </p:nvSpPr>
         <p:spPr>
           <a:xfrm>
-            <a:off x="685800" y="5532120"/>
+            <a:off x="685800" y="5585460"/>
             <a:ext cx="457200" cy="457200"/>
           </a:xfrm>
           <a:prstGeom prst="ellipse">
@@ -7173,7 +7351,7 @@
         </p:nvSpPr>
         <p:spPr>
           <a:xfrm>
-            <a:off x="685800" y="5532120"/>
+            <a:off x="685800" y="5585460"/>
             <a:ext cx="457200" cy="457200"/>
           </a:xfrm>
           <a:prstGeom prst="rect">
@@ -7212,7 +7390,7 @@
         </p:nvSpPr>
         <p:spPr>
           <a:xfrm>
-            <a:off x="1371600" y="5458968"/>
+            <a:off x="1371600" y="5512308"/>
             <a:ext cx="10180015" cy="640080"/>
           </a:xfrm>
           <a:prstGeom prst="rect">
@@ -7425,7 +7603,7 @@
                 <a:ea typeface="Cambria" pitchFamily="34" charset="-122"/>
                 <a:cs typeface="Cambria" pitchFamily="34" charset="-120"/>
               </a:rPr>
-              <a:t>Consistent Spacing Techniques</a:t>
+              <a:t>Box Shadow: Raised, Soft, and Inset</a:t>
             </a:r>
             <a:endParaRPr lang="en-US" sz="3400" dirty="0"/>
           </a:p>
@@ -7439,14 +7617,16 @@
         </p:nvSpPr>
         <p:spPr>
           <a:xfrm>
-            <a:off x="685800" y="2185416"/>
-            <a:ext cx="82296" cy="82296"/>
-          </a:xfrm>
-          <a:prstGeom prst="ellipse">
-            <a:avLst/>
+            <a:off x="640080" y="2377440"/>
+            <a:ext cx="5272888" cy="3520440"/>
+          </a:xfrm>
+          <a:prstGeom prst="roundRect">
+            <a:avLst>
+              <a:gd name="adj" fmla="val 2078"/>
+            </a:avLst>
           </a:prstGeom>
           <a:solidFill>
-            <a:srgbClr val="FF8A3D"/>
+            <a:srgbClr val="1E1E4C"/>
           </a:solidFill>
           <a:ln/>
         </p:spPr>
@@ -7459,34 +7639,235 @@
         </p:nvSpPr>
         <p:spPr>
           <a:xfrm>
-            <a:off x="960120" y="1892808"/>
-            <a:ext cx="10591495" cy="640080"/>
-          </a:xfrm>
-          <a:prstGeom prst="rect">
-            <a:avLst/>
-          </a:prstGeom>
-          <a:noFill/>
-          <a:ln/>
-        </p:spPr>
-        <p:txBody>
-          <a:bodyPr wrap="square" lIns="0" tIns="0" rIns="0" bIns="0" rtlCol="0" anchor="ctr"/>
+            <a:off x="960120" y="2606040"/>
+            <a:ext cx="4632808" cy="3063240"/>
+          </a:xfrm>
+          <a:prstGeom prst="rect">
+            <a:avLst/>
+          </a:prstGeom>
+          <a:noFill/>
+          <a:ln/>
+        </p:spPr>
+        <p:txBody>
+          <a:bodyPr wrap="square" lIns="0" tIns="0" rIns="0" bIns="0" rtlCol="0" anchor="t"/>
           <a:lstStyle/>
           <a:p>
             <a:pPr indent="0" marL="0">
-              <a:buNone/>
-            </a:pPr>
-            <a:r>
-              <a:rPr lang="en-US" sz="1500" dirty="0">
-                <a:solidFill>
-                  <a:srgbClr val="26262F"/>
-                </a:solidFill>
-                <a:latin typeface="Calibri" pitchFamily="34" charset="0"/>
-                <a:ea typeface="Calibri" pitchFamily="34" charset="-122"/>
-                <a:cs typeface="Calibri" pitchFamily="34" charset="-120"/>
-              </a:rPr>
-              <a:t>A spacing scale — pick a small set of values (4px, 8px, 16px, 24px) and only ever use those</a:t>
-            </a:r>
-            <a:endParaRPr lang="en-US" sz="1500" dirty="0"/>
+              <a:lnSpc>
+                <a:spcPct val="125000"/>
+              </a:lnSpc>
+              <a:buNone/>
+            </a:pPr>
+            <a:r>
+              <a:rPr lang="en-US" sz="1300" dirty="0">
+                <a:solidFill>
+                  <a:srgbClr val="C9D3F5"/>
+                </a:solidFill>
+                <a:latin typeface="Courier New" pitchFamily="34" charset="0"/>
+                <a:ea typeface="Courier New" pitchFamily="34" charset="-122"/>
+                <a:cs typeface="Courier New" pitchFamily="34" charset="-120"/>
+              </a:rPr>
+              <a:t>.raised {</a:t>
+            </a:r>
+            <a:endParaRPr lang="en-US" sz="1300" dirty="0"/>
+          </a:p>
+          <a:p>
+            <a:pPr indent="0" marL="0">
+              <a:lnSpc>
+                <a:spcPct val="125000"/>
+              </a:lnSpc>
+              <a:buNone/>
+            </a:pPr>
+            <a:r>
+              <a:rPr lang="en-US" sz="1300" dirty="0">
+                <a:solidFill>
+                  <a:srgbClr val="C9D3F5"/>
+                </a:solidFill>
+                <a:latin typeface="Courier New" pitchFamily="34" charset="0"/>
+                <a:ea typeface="Courier New" pitchFamily="34" charset="-122"/>
+                <a:cs typeface="Courier New" pitchFamily="34" charset="-120"/>
+              </a:rPr>
+              <a:t>  box-shadow: 0 4px 8px rgba(0,0,0,.2);</a:t>
+            </a:r>
+            <a:endParaRPr lang="en-US" sz="1300" dirty="0"/>
+          </a:p>
+          <a:p>
+            <a:pPr indent="0" marL="0">
+              <a:lnSpc>
+                <a:spcPct val="125000"/>
+              </a:lnSpc>
+              <a:buNone/>
+            </a:pPr>
+            <a:r>
+              <a:rPr lang="en-US" sz="1300" dirty="0">
+                <a:solidFill>
+                  <a:srgbClr val="C9D3F5"/>
+                </a:solidFill>
+                <a:latin typeface="Courier New" pitchFamily="34" charset="0"/>
+                <a:ea typeface="Courier New" pitchFamily="34" charset="-122"/>
+                <a:cs typeface="Courier New" pitchFamily="34" charset="-120"/>
+              </a:rPr>
+              <a:t>}</a:t>
+            </a:r>
+            <a:endParaRPr lang="en-US" sz="1300" dirty="0"/>
+          </a:p>
+          <a:p>
+            <a:pPr indent="0" marL="0">
+              <a:lnSpc>
+                <a:spcPct val="125000"/>
+              </a:lnSpc>
+              <a:buNone/>
+            </a:pPr>
+            <a:endParaRPr lang="en-US" sz="1300" dirty="0"/>
+          </a:p>
+          <a:p>
+            <a:pPr indent="0" marL="0">
+              <a:lnSpc>
+                <a:spcPct val="125000"/>
+              </a:lnSpc>
+              <a:buNone/>
+            </a:pPr>
+            <a:r>
+              <a:rPr lang="en-US" sz="1300" dirty="0">
+                <a:solidFill>
+                  <a:srgbClr val="C9D3F5"/>
+                </a:solidFill>
+                <a:latin typeface="Courier New" pitchFamily="34" charset="0"/>
+                <a:ea typeface="Courier New" pitchFamily="34" charset="-122"/>
+                <a:cs typeface="Courier New" pitchFamily="34" charset="-120"/>
+              </a:rPr>
+              <a:t>.soft {</a:t>
+            </a:r>
+            <a:endParaRPr lang="en-US" sz="1300" dirty="0"/>
+          </a:p>
+          <a:p>
+            <a:pPr indent="0" marL="0">
+              <a:lnSpc>
+                <a:spcPct val="125000"/>
+              </a:lnSpc>
+              <a:buNone/>
+            </a:pPr>
+            <a:r>
+              <a:rPr lang="en-US" sz="1300" dirty="0">
+                <a:solidFill>
+                  <a:srgbClr val="C9D3F5"/>
+                </a:solidFill>
+                <a:latin typeface="Courier New" pitchFamily="34" charset="0"/>
+                <a:ea typeface="Courier New" pitchFamily="34" charset="-122"/>
+                <a:cs typeface="Courier New" pitchFamily="34" charset="-120"/>
+              </a:rPr>
+              <a:t>  box-shadow: 0 8px 20px rgba(0,0,0,.15);</a:t>
+            </a:r>
+            <a:endParaRPr lang="en-US" sz="1300" dirty="0"/>
+          </a:p>
+          <a:p>
+            <a:pPr indent="0" marL="0">
+              <a:lnSpc>
+                <a:spcPct val="125000"/>
+              </a:lnSpc>
+              <a:buNone/>
+            </a:pPr>
+            <a:r>
+              <a:rPr lang="en-US" sz="1300" dirty="0">
+                <a:solidFill>
+                  <a:srgbClr val="C9D3F5"/>
+                </a:solidFill>
+                <a:latin typeface="Courier New" pitchFamily="34" charset="0"/>
+                <a:ea typeface="Courier New" pitchFamily="34" charset="-122"/>
+                <a:cs typeface="Courier New" pitchFamily="34" charset="-120"/>
+              </a:rPr>
+              <a:t>}</a:t>
+            </a:r>
+            <a:endParaRPr lang="en-US" sz="1300" dirty="0"/>
+          </a:p>
+          <a:p>
+            <a:pPr indent="0" marL="0">
+              <a:lnSpc>
+                <a:spcPct val="125000"/>
+              </a:lnSpc>
+              <a:buNone/>
+            </a:pPr>
+            <a:endParaRPr lang="en-US" sz="1300" dirty="0"/>
+          </a:p>
+          <a:p>
+            <a:pPr indent="0" marL="0">
+              <a:lnSpc>
+                <a:spcPct val="125000"/>
+              </a:lnSpc>
+              <a:buNone/>
+            </a:pPr>
+            <a:r>
+              <a:rPr lang="en-US" sz="1300" dirty="0">
+                <a:solidFill>
+                  <a:srgbClr val="C9D3F5"/>
+                </a:solidFill>
+                <a:latin typeface="Courier New" pitchFamily="34" charset="0"/>
+                <a:ea typeface="Courier New" pitchFamily="34" charset="-122"/>
+                <a:cs typeface="Courier New" pitchFamily="34" charset="-120"/>
+              </a:rPr>
+              <a:t>.pressed {</a:t>
+            </a:r>
+            <a:endParaRPr lang="en-US" sz="1300" dirty="0"/>
+          </a:p>
+          <a:p>
+            <a:pPr indent="0" marL="0">
+              <a:lnSpc>
+                <a:spcPct val="125000"/>
+              </a:lnSpc>
+              <a:buNone/>
+            </a:pPr>
+            <a:r>
+              <a:rPr lang="en-US" sz="1300" dirty="0">
+                <a:solidFill>
+                  <a:srgbClr val="C9D3F5"/>
+                </a:solidFill>
+                <a:latin typeface="Courier New" pitchFamily="34" charset="0"/>
+                <a:ea typeface="Courier New" pitchFamily="34" charset="-122"/>
+                <a:cs typeface="Courier New" pitchFamily="34" charset="-120"/>
+              </a:rPr>
+              <a:t>  box-shadow:</a:t>
+            </a:r>
+            <a:endParaRPr lang="en-US" sz="1300" dirty="0"/>
+          </a:p>
+          <a:p>
+            <a:pPr indent="0" marL="0">
+              <a:lnSpc>
+                <a:spcPct val="125000"/>
+              </a:lnSpc>
+              <a:buNone/>
+            </a:pPr>
+            <a:r>
+              <a:rPr lang="en-US" sz="1300" dirty="0">
+                <a:solidFill>
+                  <a:srgbClr val="C9D3F5"/>
+                </a:solidFill>
+                <a:latin typeface="Courier New" pitchFamily="34" charset="0"/>
+                <a:ea typeface="Courier New" pitchFamily="34" charset="-122"/>
+                <a:cs typeface="Courier New" pitchFamily="34" charset="-120"/>
+              </a:rPr>
+              <a:t>    inset 0 2px 4px rgba(0,0,0,.35);</a:t>
+            </a:r>
+            <a:endParaRPr lang="en-US" sz="1300" dirty="0"/>
+          </a:p>
+          <a:p>
+            <a:pPr indent="0" marL="0">
+              <a:lnSpc>
+                <a:spcPct val="125000"/>
+              </a:lnSpc>
+              <a:buNone/>
+            </a:pPr>
+            <a:r>
+              <a:rPr lang="en-US" sz="1300" dirty="0">
+                <a:solidFill>
+                  <a:srgbClr val="C9D3F5"/>
+                </a:solidFill>
+                <a:latin typeface="Courier New" pitchFamily="34" charset="0"/>
+                <a:ea typeface="Courier New" pitchFamily="34" charset="-122"/>
+                <a:cs typeface="Courier New" pitchFamily="34" charset="-120"/>
+              </a:rPr>
+              <a:t>}</a:t>
+            </a:r>
+            <a:endParaRPr lang="en-US" sz="1300" dirty="0"/>
           </a:p>
         </p:txBody>
       </p:sp>
@@ -7498,119 +7879,59 @@
         </p:nvSpPr>
         <p:spPr>
           <a:xfrm>
-            <a:off x="685800" y="3008376"/>
-            <a:ext cx="82296" cy="82296"/>
-          </a:xfrm>
-          <a:prstGeom prst="ellipse">
-            <a:avLst/>
+            <a:off x="6169000" y="1947672"/>
+            <a:ext cx="5492344" cy="4379976"/>
+          </a:xfrm>
+          <a:prstGeom prst="roundRect">
+            <a:avLst>
+              <a:gd name="adj" fmla="val 1253"/>
+            </a:avLst>
           </a:prstGeom>
           <a:solidFill>
-            <a:srgbClr val="FF8A3D"/>
+            <a:srgbClr val="FFFFFF"/>
           </a:solidFill>
-          <a:ln/>
-        </p:spPr>
-      </p:sp>
-      <p:sp>
-        <p:nvSpPr>
-          <p:cNvPr id="7" name="Text 5"/>
-          <p:cNvSpPr txBox="1"/>
-          <p:nvPr/>
-        </p:nvSpPr>
-        <p:spPr>
-          <a:xfrm>
-            <a:off x="960120" y="2715768"/>
-            <a:ext cx="10591495" cy="640080"/>
-          </a:xfrm>
-          <a:prstGeom prst="rect">
-            <a:avLst/>
-          </a:prstGeom>
-          <a:noFill/>
-          <a:ln/>
-        </p:spPr>
-        <p:txBody>
-          <a:bodyPr wrap="square" lIns="0" tIns="0" rIns="0" bIns="0" rtlCol="0" anchor="ctr"/>
-          <a:lstStyle/>
-          <a:p>
-            <a:pPr indent="0" marL="0">
-              <a:buNone/>
-            </a:pPr>
-            <a:r>
-              <a:rPr lang="en-US" sz="1500" dirty="0">
-                <a:solidFill>
-                  <a:srgbClr val="26262F"/>
-                </a:solidFill>
-                <a:latin typeface="Calibri" pitchFamily="34" charset="0"/>
-                <a:ea typeface="Calibri" pitchFamily="34" charset="-122"/>
-                <a:cs typeface="Calibri" pitchFamily="34" charset="-120"/>
-              </a:rPr>
-              <a:t>CSS custom properties — define --space-md: 16px once in :root, reuse everywhere with var(--space-md)</a:t>
-            </a:r>
-            <a:endParaRPr lang="en-US" sz="1500" dirty="0"/>
-          </a:p>
-        </p:txBody>
-      </p:sp>
-      <p:sp>
-        <p:nvSpPr>
-          <p:cNvPr id="8" name="Shape 6"/>
-          <p:cNvSpPr/>
-          <p:nvPr/>
-        </p:nvSpPr>
-        <p:spPr>
-          <a:xfrm>
-            <a:off x="685800" y="3831336"/>
-            <a:ext cx="82296" cy="82296"/>
-          </a:xfrm>
-          <a:prstGeom prst="ellipse">
-            <a:avLst/>
-          </a:prstGeom>
-          <a:solidFill>
-            <a:srgbClr val="FF8A3D"/>
-          </a:solidFill>
-          <a:ln/>
-        </p:spPr>
-      </p:sp>
-      <p:sp>
-        <p:nvSpPr>
-          <p:cNvPr id="9" name="Text 7"/>
-          <p:cNvSpPr txBox="1"/>
-          <p:nvPr/>
-        </p:nvSpPr>
-        <p:spPr>
-          <a:xfrm>
-            <a:off x="960120" y="3538728"/>
-            <a:ext cx="10591495" cy="640080"/>
-          </a:xfrm>
-          <a:prstGeom prst="rect">
-            <a:avLst/>
-          </a:prstGeom>
-          <a:noFill/>
-          <a:ln/>
-        </p:spPr>
-        <p:txBody>
-          <a:bodyPr wrap="square" lIns="0" tIns="0" rIns="0" bIns="0" rtlCol="0" anchor="ctr"/>
-          <a:lstStyle/>
-          <a:p>
-            <a:pPr indent="0" marL="0">
-              <a:buNone/>
-            </a:pPr>
-            <a:r>
-              <a:rPr lang="en-US" sz="1500" dirty="0">
-                <a:solidFill>
-                  <a:srgbClr val="26262F"/>
-                </a:solidFill>
-                <a:latin typeface="Calibri" pitchFamily="34" charset="0"/>
-                <a:ea typeface="Calibri" pitchFamily="34" charset="-122"/>
-                <a:cs typeface="Calibri" pitchFamily="34" charset="-120"/>
-              </a:rPr>
-              <a:t>Change the whole site's spacing rhythm by editing one value in :root</a:t>
-            </a:r>
-            <a:endParaRPr lang="en-US" sz="1500" dirty="0"/>
-          </a:p>
-        </p:txBody>
-      </p:sp>
-      <p:sp>
-        <p:nvSpPr>
-          <p:cNvPr id="10" name="Text 8"/>
+          <a:ln w="12700">
+            <a:solidFill>
+              <a:srgbClr val="E2E2EE"/>
+            </a:solidFill>
+            <a:prstDash val="solid"/>
+          </a:ln>
+          <a:effectLst>
+            <a:outerShdw sx="100000" sy="100000" kx="0" ky="0" algn="bl" rotWithShape="0" blurRad="101600" dist="38100" dir="5400000">
+              <a:srgbClr val="000000">
+                <a:alpha val="12000"/>
+              </a:srgbClr>
+            </a:outerShdw>
+          </a:effectLst>
+        </p:spPr>
+      </p:sp>
+      <p:pic>
+        <p:nvPicPr>
+          <p:cNvPr id="7" name="Image 0" descr="D:/GitHub/mern-web-book/docs/assets/img/lecture-06/shadow-basics-demo.png">    </p:cNvPr>
+          <p:cNvPicPr>
+            <a:picLocks noChangeAspect="1"/>
+          </p:cNvPicPr>
+          <p:nvPr/>
+        </p:nvPicPr>
+        <p:blipFill>
+          <a:blip r:embed="rId1"/>
+          <a:stretch>
+            <a:fillRect/>
+          </a:stretch>
+        </p:blipFill>
+        <p:spPr>
+          <a:xfrm>
+            <a:off x="6278728" y="2267210"/>
+            <a:ext cx="5272888" cy="3740900"/>
+          </a:xfrm>
+          <a:prstGeom prst="rect">
+            <a:avLst/>
+          </a:prstGeom>
+        </p:spPr>
+      </p:pic>
+      <p:sp>
+        <p:nvSpPr>
+          <p:cNvPr id="8" name="Text 5"/>
           <p:cNvSpPr txBox="1"/>
           <p:nvPr/>
         </p:nvSpPr>
@@ -7649,7 +7970,7 @@
       </p:sp>
       <p:sp>
         <p:nvSpPr>
-          <p:cNvPr id="11" name="Text 9"/>
+          <p:cNvPr id="9" name="Text 6"/>
           <p:cNvSpPr txBox="1"/>
           <p:nvPr/>
         </p:nvSpPr>
@@ -7697,6 +8018,850 @@
 <file path=ppt/slides/slide21.xml><?xml version="1.0" encoding="utf-8"?>
 <p:sld xmlns:a="http://schemas.openxmlformats.org/drawingml/2006/main" xmlns:r="http://schemas.openxmlformats.org/officeDocument/2006/relationships" xmlns:p="http://schemas.openxmlformats.org/presentationml/2006/main">
   <p:cSld name="Slide 21">
+    <p:bg>
+      <p:bgPr>
+        <a:solidFill>
+          <a:srgbClr val="FFFFFF"/>
+        </a:solidFill>
+      </p:bgPr>
+    </p:bg>
+    <p:spTree>
+      <p:nvGrpSpPr>
+        <p:cNvPr id="1" name=""/>
+        <p:cNvGrpSpPr/>
+        <p:nvPr/>
+      </p:nvGrpSpPr>
+      <p:grpSpPr>
+        <a:xfrm>
+          <a:off x="0" y="0"/>
+          <a:ext cx="0" cy="0"/>
+          <a:chOff x="0" y="0"/>
+          <a:chExt cx="0" cy="0"/>
+        </a:xfrm>
+      </p:grpSpPr>
+      <p:sp>
+        <p:nvSpPr>
+          <p:cNvPr id="2" name="Text 0"/>
+          <p:cNvSpPr txBox="1"/>
+          <p:nvPr/>
+        </p:nvSpPr>
+        <p:spPr>
+          <a:xfrm>
+            <a:off x="640080" y="457200"/>
+            <a:ext cx="10058400" cy="365760"/>
+          </a:xfrm>
+          <a:prstGeom prst="rect">
+            <a:avLst/>
+          </a:prstGeom>
+          <a:noFill/>
+          <a:ln/>
+        </p:spPr>
+        <p:txBody>
+          <a:bodyPr wrap="square" lIns="0" tIns="0" rIns="0" bIns="0" rtlCol="0" anchor="ctr"/>
+          <a:lstStyle/>
+          <a:p>
+            <a:pPr algn="l" indent="0" marL="0">
+              <a:buNone/>
+            </a:pPr>
+            <a:r>
+              <a:rPr lang="en-US" sz="1300" b="1" spc="300" kern="0" dirty="0">
+                <a:solidFill>
+                  <a:srgbClr val="FF8A3D"/>
+                </a:solidFill>
+                <a:latin typeface="Calibri" pitchFamily="34" charset="0"/>
+                <a:ea typeface="Calibri" pitchFamily="34" charset="-122"/>
+                <a:cs typeface="Calibri" pitchFamily="34" charset="-120"/>
+              </a:rPr>
+              <a:t>FINISHING TOUCHES</a:t>
+            </a:r>
+            <a:endParaRPr lang="en-US" sz="1300" dirty="0"/>
+          </a:p>
+        </p:txBody>
+      </p:sp>
+      <p:sp>
+        <p:nvSpPr>
+          <p:cNvPr id="3" name="Text 1"/>
+          <p:cNvSpPr txBox="1"/>
+          <p:nvPr/>
+        </p:nvSpPr>
+        <p:spPr>
+          <a:xfrm>
+            <a:off x="640080" y="841248"/>
+            <a:ext cx="10881360" cy="914400"/>
+          </a:xfrm>
+          <a:prstGeom prst="rect">
+            <a:avLst/>
+          </a:prstGeom>
+          <a:noFill/>
+          <a:ln/>
+        </p:spPr>
+        <p:txBody>
+          <a:bodyPr wrap="square" lIns="0" tIns="0" rIns="0" bIns="0" rtlCol="0" anchor="ctr"/>
+          <a:lstStyle/>
+          <a:p>
+            <a:pPr algn="l" indent="0" marL="0">
+              <a:buNone/>
+            </a:pPr>
+            <a:r>
+              <a:rPr lang="en-US" sz="3400" b="1" dirty="0">
+                <a:solidFill>
+                  <a:srgbClr val="2B2B7A"/>
+                </a:solidFill>
+                <a:latin typeface="Cambria" pitchFamily="34" charset="0"/>
+                <a:ea typeface="Cambria" pitchFamily="34" charset="-122"/>
+                <a:cs typeface="Cambria" pitchFamily="34" charset="-120"/>
+              </a:rPr>
+              <a:t>Layered Shadows and Text Shadow</a:t>
+            </a:r>
+            <a:endParaRPr lang="en-US" sz="3400" dirty="0"/>
+          </a:p>
+        </p:txBody>
+      </p:sp>
+      <p:sp>
+        <p:nvSpPr>
+          <p:cNvPr id="4" name="Shape 2"/>
+          <p:cNvSpPr/>
+          <p:nvPr/>
+        </p:nvSpPr>
+        <p:spPr>
+          <a:xfrm>
+            <a:off x="640080" y="2625090"/>
+            <a:ext cx="5272888" cy="3025140"/>
+          </a:xfrm>
+          <a:prstGeom prst="roundRect">
+            <a:avLst>
+              <a:gd name="adj" fmla="val 2418"/>
+            </a:avLst>
+          </a:prstGeom>
+          <a:solidFill>
+            <a:srgbClr val="1E1E4C"/>
+          </a:solidFill>
+          <a:ln/>
+        </p:spPr>
+      </p:sp>
+      <p:sp>
+        <p:nvSpPr>
+          <p:cNvPr id="5" name="Text 3"/>
+          <p:cNvSpPr txBox="1"/>
+          <p:nvPr/>
+        </p:nvSpPr>
+        <p:spPr>
+          <a:xfrm>
+            <a:off x="960120" y="2853690"/>
+            <a:ext cx="4632808" cy="2567940"/>
+          </a:xfrm>
+          <a:prstGeom prst="rect">
+            <a:avLst/>
+          </a:prstGeom>
+          <a:noFill/>
+          <a:ln/>
+        </p:spPr>
+        <p:txBody>
+          <a:bodyPr wrap="square" lIns="0" tIns="0" rIns="0" bIns="0" rtlCol="0" anchor="t"/>
+          <a:lstStyle/>
+          <a:p>
+            <a:pPr indent="0" marL="0">
+              <a:lnSpc>
+                <a:spcPct val="125000"/>
+              </a:lnSpc>
+              <a:buNone/>
+            </a:pPr>
+            <a:r>
+              <a:rPr lang="en-US" sz="1300" dirty="0">
+                <a:solidFill>
+                  <a:srgbClr val="C9D3F5"/>
+                </a:solidFill>
+                <a:latin typeface="Courier New" pitchFamily="34" charset="0"/>
+                <a:ea typeface="Courier New" pitchFamily="34" charset="-122"/>
+                <a:cs typeface="Courier New" pitchFamily="34" charset="-120"/>
+              </a:rPr>
+              <a:t>.card {</a:t>
+            </a:r>
+            <a:endParaRPr lang="en-US" sz="1300" dirty="0"/>
+          </a:p>
+          <a:p>
+            <a:pPr indent="0" marL="0">
+              <a:lnSpc>
+                <a:spcPct val="125000"/>
+              </a:lnSpc>
+              <a:buNone/>
+            </a:pPr>
+            <a:r>
+              <a:rPr lang="en-US" sz="1300" dirty="0">
+                <a:solidFill>
+                  <a:srgbClr val="C9D3F5"/>
+                </a:solidFill>
+                <a:latin typeface="Courier New" pitchFamily="34" charset="0"/>
+                <a:ea typeface="Courier New" pitchFamily="34" charset="-122"/>
+                <a:cs typeface="Courier New" pitchFamily="34" charset="-120"/>
+              </a:rPr>
+              <a:t>  box-shadow:</a:t>
+            </a:r>
+            <a:endParaRPr lang="en-US" sz="1300" dirty="0"/>
+          </a:p>
+          <a:p>
+            <a:pPr indent="0" marL="0">
+              <a:lnSpc>
+                <a:spcPct val="125000"/>
+              </a:lnSpc>
+              <a:buNone/>
+            </a:pPr>
+            <a:r>
+              <a:rPr lang="en-US" sz="1300" dirty="0">
+                <a:solidFill>
+                  <a:srgbClr val="C9D3F5"/>
+                </a:solidFill>
+                <a:latin typeface="Courier New" pitchFamily="34" charset="0"/>
+                <a:ea typeface="Courier New" pitchFamily="34" charset="-122"/>
+                <a:cs typeface="Courier New" pitchFamily="34" charset="-120"/>
+              </a:rPr>
+              <a:t>    0 1px 2px rgba(0,0,0,.08),</a:t>
+            </a:r>
+            <a:endParaRPr lang="en-US" sz="1300" dirty="0"/>
+          </a:p>
+          <a:p>
+            <a:pPr indent="0" marL="0">
+              <a:lnSpc>
+                <a:spcPct val="125000"/>
+              </a:lnSpc>
+              <a:buNone/>
+            </a:pPr>
+            <a:r>
+              <a:rPr lang="en-US" sz="1300" dirty="0">
+                <a:solidFill>
+                  <a:srgbClr val="C9D3F5"/>
+                </a:solidFill>
+                <a:latin typeface="Courier New" pitchFamily="34" charset="0"/>
+                <a:ea typeface="Courier New" pitchFamily="34" charset="-122"/>
+                <a:cs typeface="Courier New" pitchFamily="34" charset="-120"/>
+              </a:rPr>
+              <a:t>    0 4px 8px rgba(0,0,0,.08),</a:t>
+            </a:r>
+            <a:endParaRPr lang="en-US" sz="1300" dirty="0"/>
+          </a:p>
+          <a:p>
+            <a:pPr indent="0" marL="0">
+              <a:lnSpc>
+                <a:spcPct val="125000"/>
+              </a:lnSpc>
+              <a:buNone/>
+            </a:pPr>
+            <a:r>
+              <a:rPr lang="en-US" sz="1300" dirty="0">
+                <a:solidFill>
+                  <a:srgbClr val="C9D3F5"/>
+                </a:solidFill>
+                <a:latin typeface="Courier New" pitchFamily="34" charset="0"/>
+                <a:ea typeface="Courier New" pitchFamily="34" charset="-122"/>
+                <a:cs typeface="Courier New" pitchFamily="34" charset="-120"/>
+              </a:rPr>
+              <a:t>    0 12px 24px rgba(0,0,0,.08);</a:t>
+            </a:r>
+            <a:endParaRPr lang="en-US" sz="1300" dirty="0"/>
+          </a:p>
+          <a:p>
+            <a:pPr indent="0" marL="0">
+              <a:lnSpc>
+                <a:spcPct val="125000"/>
+              </a:lnSpc>
+              <a:buNone/>
+            </a:pPr>
+            <a:r>
+              <a:rPr lang="en-US" sz="1300" dirty="0">
+                <a:solidFill>
+                  <a:srgbClr val="C9D3F5"/>
+                </a:solidFill>
+                <a:latin typeface="Courier New" pitchFamily="34" charset="0"/>
+                <a:ea typeface="Courier New" pitchFamily="34" charset="-122"/>
+                <a:cs typeface="Courier New" pitchFamily="34" charset="-120"/>
+              </a:rPr>
+              <a:t>}</a:t>
+            </a:r>
+            <a:endParaRPr lang="en-US" sz="1300" dirty="0"/>
+          </a:p>
+          <a:p>
+            <a:pPr indent="0" marL="0">
+              <a:lnSpc>
+                <a:spcPct val="125000"/>
+              </a:lnSpc>
+              <a:buNone/>
+            </a:pPr>
+            <a:endParaRPr lang="en-US" sz="1300" dirty="0"/>
+          </a:p>
+          <a:p>
+            <a:pPr indent="0" marL="0">
+              <a:lnSpc>
+                <a:spcPct val="125000"/>
+              </a:lnSpc>
+              <a:buNone/>
+            </a:pPr>
+            <a:r>
+              <a:rPr lang="en-US" sz="1300" dirty="0">
+                <a:solidFill>
+                  <a:srgbClr val="C9D3F5"/>
+                </a:solidFill>
+                <a:latin typeface="Courier New" pitchFamily="34" charset="0"/>
+                <a:ea typeface="Courier New" pitchFamily="34" charset="-122"/>
+                <a:cs typeface="Courier New" pitchFamily="34" charset="-120"/>
+              </a:rPr>
+              <a:t>h1 {</a:t>
+            </a:r>
+            <a:endParaRPr lang="en-US" sz="1300" dirty="0"/>
+          </a:p>
+          <a:p>
+            <a:pPr indent="0" marL="0">
+              <a:lnSpc>
+                <a:spcPct val="125000"/>
+              </a:lnSpc>
+              <a:buNone/>
+            </a:pPr>
+            <a:r>
+              <a:rPr lang="en-US" sz="1300" dirty="0">
+                <a:solidFill>
+                  <a:srgbClr val="C9D3F5"/>
+                </a:solidFill>
+                <a:latin typeface="Courier New" pitchFamily="34" charset="0"/>
+                <a:ea typeface="Courier New" pitchFamily="34" charset="-122"/>
+                <a:cs typeface="Courier New" pitchFamily="34" charset="-120"/>
+              </a:rPr>
+              <a:t>  text-shadow: 2px 2px 4px rgba(0,0,0,.3);</a:t>
+            </a:r>
+            <a:endParaRPr lang="en-US" sz="1300" dirty="0"/>
+          </a:p>
+          <a:p>
+            <a:pPr indent="0" marL="0">
+              <a:lnSpc>
+                <a:spcPct val="125000"/>
+              </a:lnSpc>
+              <a:buNone/>
+            </a:pPr>
+            <a:r>
+              <a:rPr lang="en-US" sz="1300" dirty="0">
+                <a:solidFill>
+                  <a:srgbClr val="C9D3F5"/>
+                </a:solidFill>
+                <a:latin typeface="Courier New" pitchFamily="34" charset="0"/>
+                <a:ea typeface="Courier New" pitchFamily="34" charset="-122"/>
+                <a:cs typeface="Courier New" pitchFamily="34" charset="-120"/>
+              </a:rPr>
+              <a:t>}</a:t>
+            </a:r>
+            <a:endParaRPr lang="en-US" sz="1300" dirty="0"/>
+          </a:p>
+        </p:txBody>
+      </p:sp>
+      <p:sp>
+        <p:nvSpPr>
+          <p:cNvPr id="6" name="Shape 4"/>
+          <p:cNvSpPr/>
+          <p:nvPr/>
+        </p:nvSpPr>
+        <p:spPr>
+          <a:xfrm>
+            <a:off x="6169000" y="1947672"/>
+            <a:ext cx="5492344" cy="4379976"/>
+          </a:xfrm>
+          <a:prstGeom prst="roundRect">
+            <a:avLst>
+              <a:gd name="adj" fmla="val 1253"/>
+            </a:avLst>
+          </a:prstGeom>
+          <a:solidFill>
+            <a:srgbClr val="FFFFFF"/>
+          </a:solidFill>
+          <a:ln w="12700">
+            <a:solidFill>
+              <a:srgbClr val="E2E2EE"/>
+            </a:solidFill>
+            <a:prstDash val="solid"/>
+          </a:ln>
+          <a:effectLst>
+            <a:outerShdw sx="100000" sy="100000" kx="0" ky="0" algn="bl" rotWithShape="0" blurRad="101600" dist="38100" dir="5400000">
+              <a:srgbClr val="000000">
+                <a:alpha val="12000"/>
+              </a:srgbClr>
+            </a:outerShdw>
+          </a:effectLst>
+        </p:spPr>
+      </p:sp>
+      <p:pic>
+        <p:nvPicPr>
+          <p:cNvPr id="7" name="Image 0" descr="D:/GitHub/mern-web-book/docs/assets/img/lecture-06/shadow-layered-demo.png">    </p:cNvPr>
+          <p:cNvPicPr>
+            <a:picLocks noChangeAspect="1"/>
+          </p:cNvPicPr>
+          <p:nvPr/>
+        </p:nvPicPr>
+        <p:blipFill>
+          <a:blip r:embed="rId1"/>
+          <a:stretch>
+            <a:fillRect/>
+          </a:stretch>
+        </p:blipFill>
+        <p:spPr>
+          <a:xfrm>
+            <a:off x="6278728" y="2267210"/>
+            <a:ext cx="5272888" cy="3740900"/>
+          </a:xfrm>
+          <a:prstGeom prst="rect">
+            <a:avLst/>
+          </a:prstGeom>
+        </p:spPr>
+      </p:pic>
+      <p:sp>
+        <p:nvSpPr>
+          <p:cNvPr id="8" name="Text 5"/>
+          <p:cNvSpPr txBox="1"/>
+          <p:nvPr/>
+        </p:nvSpPr>
+        <p:spPr>
+          <a:xfrm>
+            <a:off x="640080" y="6446520"/>
+            <a:ext cx="8686800" cy="292608"/>
+          </a:xfrm>
+          <a:prstGeom prst="rect">
+            <a:avLst/>
+          </a:prstGeom>
+          <a:noFill/>
+          <a:ln/>
+        </p:spPr>
+        <p:txBody>
+          <a:bodyPr wrap="square" lIns="0" tIns="0" rIns="0" bIns="0" rtlCol="0" anchor="ctr"/>
+          <a:lstStyle/>
+          <a:p>
+            <a:pPr algn="l" indent="0" marL="0">
+              <a:buNone/>
+            </a:pPr>
+            <a:r>
+              <a:rPr lang="en-US" sz="900" dirty="0">
+                <a:solidFill>
+                  <a:srgbClr val="5D5D72"/>
+                </a:solidFill>
+                <a:latin typeface="Calibri" pitchFamily="34" charset="0"/>
+                <a:ea typeface="Calibri" pitchFamily="34" charset="-122"/>
+                <a:cs typeface="Calibri" pitchFamily="34" charset="-120"/>
+              </a:rPr>
+              <a:t>Usman Akram  •  COMSATS University Islamabad</a:t>
+            </a:r>
+            <a:endParaRPr lang="en-US" sz="900" dirty="0"/>
+          </a:p>
+        </p:txBody>
+      </p:sp>
+      <p:sp>
+        <p:nvSpPr>
+          <p:cNvPr id="9" name="Text 6"/>
+          <p:cNvSpPr txBox="1"/>
+          <p:nvPr/>
+        </p:nvSpPr>
+        <p:spPr>
+          <a:xfrm>
+            <a:off x="11155680" y="6446520"/>
+            <a:ext cx="457200" cy="292608"/>
+          </a:xfrm>
+          <a:prstGeom prst="rect">
+            <a:avLst/>
+          </a:prstGeom>
+          <a:noFill/>
+          <a:ln/>
+        </p:spPr>
+        <p:txBody>
+          <a:bodyPr wrap="square" lIns="0" tIns="0" rIns="0" bIns="0" rtlCol="0" anchor="ctr"/>
+          <a:lstStyle/>
+          <a:p>
+            <a:pPr algn="r" indent="0" marL="0">
+              <a:buNone/>
+            </a:pPr>
+            <a:r>
+              <a:rPr lang="en-US" sz="900" dirty="0">
+                <a:solidFill>
+                  <a:srgbClr val="5D5D72"/>
+                </a:solidFill>
+                <a:latin typeface="Calibri" pitchFamily="34" charset="0"/>
+                <a:ea typeface="Calibri" pitchFamily="34" charset="-122"/>
+                <a:cs typeface="Calibri" pitchFamily="34" charset="-120"/>
+              </a:rPr>
+              <a:t>21</a:t>
+            </a:r>
+            <a:endParaRPr lang="en-US" sz="900" dirty="0"/>
+          </a:p>
+        </p:txBody>
+      </p:sp>
+    </p:spTree>
+  </p:cSld>
+  <p:clrMapOvr>
+    <a:masterClrMapping/>
+  </p:clrMapOvr>
+</p:sld>
+</file>
+
+<file path=ppt/slides/slide22.xml><?xml version="1.0" encoding="utf-8"?>
+<p:sld xmlns:a="http://schemas.openxmlformats.org/drawingml/2006/main" xmlns:r="http://schemas.openxmlformats.org/officeDocument/2006/relationships" xmlns:p="http://schemas.openxmlformats.org/presentationml/2006/main">
+  <p:cSld name="Slide 22">
+    <p:bg>
+      <p:bgPr>
+        <a:solidFill>
+          <a:srgbClr val="FFFFFF"/>
+        </a:solidFill>
+      </p:bgPr>
+    </p:bg>
+    <p:spTree>
+      <p:nvGrpSpPr>
+        <p:cNvPr id="1" name=""/>
+        <p:cNvGrpSpPr/>
+        <p:nvPr/>
+      </p:nvGrpSpPr>
+      <p:grpSpPr>
+        <a:xfrm>
+          <a:off x="0" y="0"/>
+          <a:ext cx="0" cy="0"/>
+          <a:chOff x="0" y="0"/>
+          <a:chExt cx="0" cy="0"/>
+        </a:xfrm>
+      </p:grpSpPr>
+      <p:sp>
+        <p:nvSpPr>
+          <p:cNvPr id="2" name="Text 0"/>
+          <p:cNvSpPr txBox="1"/>
+          <p:nvPr/>
+        </p:nvSpPr>
+        <p:spPr>
+          <a:xfrm>
+            <a:off x="640080" y="457200"/>
+            <a:ext cx="10058400" cy="365760"/>
+          </a:xfrm>
+          <a:prstGeom prst="rect">
+            <a:avLst/>
+          </a:prstGeom>
+          <a:noFill/>
+          <a:ln/>
+        </p:spPr>
+        <p:txBody>
+          <a:bodyPr wrap="square" lIns="0" tIns="0" rIns="0" bIns="0" rtlCol="0" anchor="ctr"/>
+          <a:lstStyle/>
+          <a:p>
+            <a:pPr algn="l" indent="0" marL="0">
+              <a:buNone/>
+            </a:pPr>
+            <a:r>
+              <a:rPr lang="en-US" sz="1300" b="1" spc="300" kern="0" dirty="0">
+                <a:solidFill>
+                  <a:srgbClr val="FF8A3D"/>
+                </a:solidFill>
+                <a:latin typeface="Calibri" pitchFamily="34" charset="0"/>
+                <a:ea typeface="Calibri" pitchFamily="34" charset="-122"/>
+                <a:cs typeface="Calibri" pitchFamily="34" charset="-120"/>
+              </a:rPr>
+              <a:t>FINISHING TOUCHES</a:t>
+            </a:r>
+            <a:endParaRPr lang="en-US" sz="1300" dirty="0"/>
+          </a:p>
+        </p:txBody>
+      </p:sp>
+      <p:sp>
+        <p:nvSpPr>
+          <p:cNvPr id="3" name="Text 1"/>
+          <p:cNvSpPr txBox="1"/>
+          <p:nvPr/>
+        </p:nvSpPr>
+        <p:spPr>
+          <a:xfrm>
+            <a:off x="640080" y="841248"/>
+            <a:ext cx="10881360" cy="914400"/>
+          </a:xfrm>
+          <a:prstGeom prst="rect">
+            <a:avLst/>
+          </a:prstGeom>
+          <a:noFill/>
+          <a:ln/>
+        </p:spPr>
+        <p:txBody>
+          <a:bodyPr wrap="square" lIns="0" tIns="0" rIns="0" bIns="0" rtlCol="0" anchor="ctr"/>
+          <a:lstStyle/>
+          <a:p>
+            <a:pPr algn="l" indent="0" marL="0">
+              <a:buNone/>
+            </a:pPr>
+            <a:r>
+              <a:rPr lang="en-US" sz="3400" b="1" dirty="0">
+                <a:solidFill>
+                  <a:srgbClr val="2B2B7A"/>
+                </a:solidFill>
+                <a:latin typeface="Cambria" pitchFamily="34" charset="0"/>
+                <a:ea typeface="Cambria" pitchFamily="34" charset="-122"/>
+                <a:cs typeface="Cambria" pitchFamily="34" charset="-120"/>
+              </a:rPr>
+              <a:t>Consistent Spacing Techniques</a:t>
+            </a:r>
+            <a:endParaRPr lang="en-US" sz="3400" dirty="0"/>
+          </a:p>
+        </p:txBody>
+      </p:sp>
+      <p:sp>
+        <p:nvSpPr>
+          <p:cNvPr id="4" name="Shape 2"/>
+          <p:cNvSpPr/>
+          <p:nvPr/>
+        </p:nvSpPr>
+        <p:spPr>
+          <a:xfrm>
+            <a:off x="685800" y="2185416"/>
+            <a:ext cx="82296" cy="82296"/>
+          </a:xfrm>
+          <a:prstGeom prst="ellipse">
+            <a:avLst/>
+          </a:prstGeom>
+          <a:solidFill>
+            <a:srgbClr val="FF8A3D"/>
+          </a:solidFill>
+          <a:ln/>
+        </p:spPr>
+      </p:sp>
+      <p:sp>
+        <p:nvSpPr>
+          <p:cNvPr id="5" name="Text 3"/>
+          <p:cNvSpPr txBox="1"/>
+          <p:nvPr/>
+        </p:nvSpPr>
+        <p:spPr>
+          <a:xfrm>
+            <a:off x="960120" y="1892808"/>
+            <a:ext cx="10591495" cy="640080"/>
+          </a:xfrm>
+          <a:prstGeom prst="rect">
+            <a:avLst/>
+          </a:prstGeom>
+          <a:noFill/>
+          <a:ln/>
+        </p:spPr>
+        <p:txBody>
+          <a:bodyPr wrap="square" lIns="0" tIns="0" rIns="0" bIns="0" rtlCol="0" anchor="ctr"/>
+          <a:lstStyle/>
+          <a:p>
+            <a:pPr indent="0" marL="0">
+              <a:buNone/>
+            </a:pPr>
+            <a:r>
+              <a:rPr lang="en-US" sz="1500" dirty="0">
+                <a:solidFill>
+                  <a:srgbClr val="26262F"/>
+                </a:solidFill>
+                <a:latin typeface="Calibri" pitchFamily="34" charset="0"/>
+                <a:ea typeface="Calibri" pitchFamily="34" charset="-122"/>
+                <a:cs typeface="Calibri" pitchFamily="34" charset="-120"/>
+              </a:rPr>
+              <a:t>A spacing scale — pick a small set of values (4px, 8px, 16px, 24px) and only ever use those</a:t>
+            </a:r>
+            <a:endParaRPr lang="en-US" sz="1500" dirty="0"/>
+          </a:p>
+        </p:txBody>
+      </p:sp>
+      <p:sp>
+        <p:nvSpPr>
+          <p:cNvPr id="6" name="Shape 4"/>
+          <p:cNvSpPr/>
+          <p:nvPr/>
+        </p:nvSpPr>
+        <p:spPr>
+          <a:xfrm>
+            <a:off x="685800" y="3008376"/>
+            <a:ext cx="82296" cy="82296"/>
+          </a:xfrm>
+          <a:prstGeom prst="ellipse">
+            <a:avLst/>
+          </a:prstGeom>
+          <a:solidFill>
+            <a:srgbClr val="FF8A3D"/>
+          </a:solidFill>
+          <a:ln/>
+        </p:spPr>
+      </p:sp>
+      <p:sp>
+        <p:nvSpPr>
+          <p:cNvPr id="7" name="Text 5"/>
+          <p:cNvSpPr txBox="1"/>
+          <p:nvPr/>
+        </p:nvSpPr>
+        <p:spPr>
+          <a:xfrm>
+            <a:off x="960120" y="2715768"/>
+            <a:ext cx="10591495" cy="640080"/>
+          </a:xfrm>
+          <a:prstGeom prst="rect">
+            <a:avLst/>
+          </a:prstGeom>
+          <a:noFill/>
+          <a:ln/>
+        </p:spPr>
+        <p:txBody>
+          <a:bodyPr wrap="square" lIns="0" tIns="0" rIns="0" bIns="0" rtlCol="0" anchor="ctr"/>
+          <a:lstStyle/>
+          <a:p>
+            <a:pPr indent="0" marL="0">
+              <a:buNone/>
+            </a:pPr>
+            <a:r>
+              <a:rPr lang="en-US" sz="1500" dirty="0">
+                <a:solidFill>
+                  <a:srgbClr val="26262F"/>
+                </a:solidFill>
+                <a:latin typeface="Calibri" pitchFamily="34" charset="0"/>
+                <a:ea typeface="Calibri" pitchFamily="34" charset="-122"/>
+                <a:cs typeface="Calibri" pitchFamily="34" charset="-120"/>
+              </a:rPr>
+              <a:t>CSS custom properties — define --space-md: 16px once in :root, reuse everywhere with var(--space-md)</a:t>
+            </a:r>
+            <a:endParaRPr lang="en-US" sz="1500" dirty="0"/>
+          </a:p>
+        </p:txBody>
+      </p:sp>
+      <p:sp>
+        <p:nvSpPr>
+          <p:cNvPr id="8" name="Shape 6"/>
+          <p:cNvSpPr/>
+          <p:nvPr/>
+        </p:nvSpPr>
+        <p:spPr>
+          <a:xfrm>
+            <a:off x="685800" y="3831336"/>
+            <a:ext cx="82296" cy="82296"/>
+          </a:xfrm>
+          <a:prstGeom prst="ellipse">
+            <a:avLst/>
+          </a:prstGeom>
+          <a:solidFill>
+            <a:srgbClr val="FF8A3D"/>
+          </a:solidFill>
+          <a:ln/>
+        </p:spPr>
+      </p:sp>
+      <p:sp>
+        <p:nvSpPr>
+          <p:cNvPr id="9" name="Text 7"/>
+          <p:cNvSpPr txBox="1"/>
+          <p:nvPr/>
+        </p:nvSpPr>
+        <p:spPr>
+          <a:xfrm>
+            <a:off x="960120" y="3538728"/>
+            <a:ext cx="10591495" cy="640080"/>
+          </a:xfrm>
+          <a:prstGeom prst="rect">
+            <a:avLst/>
+          </a:prstGeom>
+          <a:noFill/>
+          <a:ln/>
+        </p:spPr>
+        <p:txBody>
+          <a:bodyPr wrap="square" lIns="0" tIns="0" rIns="0" bIns="0" rtlCol="0" anchor="ctr"/>
+          <a:lstStyle/>
+          <a:p>
+            <a:pPr indent="0" marL="0">
+              <a:buNone/>
+            </a:pPr>
+            <a:r>
+              <a:rPr lang="en-US" sz="1500" dirty="0">
+                <a:solidFill>
+                  <a:srgbClr val="26262F"/>
+                </a:solidFill>
+                <a:latin typeface="Calibri" pitchFamily="34" charset="0"/>
+                <a:ea typeface="Calibri" pitchFamily="34" charset="-122"/>
+                <a:cs typeface="Calibri" pitchFamily="34" charset="-120"/>
+              </a:rPr>
+              <a:t>Change the whole site's spacing rhythm by editing one value in :root</a:t>
+            </a:r>
+            <a:endParaRPr lang="en-US" sz="1500" dirty="0"/>
+          </a:p>
+        </p:txBody>
+      </p:sp>
+      <p:sp>
+        <p:nvSpPr>
+          <p:cNvPr id="10" name="Text 8"/>
+          <p:cNvSpPr txBox="1"/>
+          <p:nvPr/>
+        </p:nvSpPr>
+        <p:spPr>
+          <a:xfrm>
+            <a:off x="640080" y="6446520"/>
+            <a:ext cx="8686800" cy="292608"/>
+          </a:xfrm>
+          <a:prstGeom prst="rect">
+            <a:avLst/>
+          </a:prstGeom>
+          <a:noFill/>
+          <a:ln/>
+        </p:spPr>
+        <p:txBody>
+          <a:bodyPr wrap="square" lIns="0" tIns="0" rIns="0" bIns="0" rtlCol="0" anchor="ctr"/>
+          <a:lstStyle/>
+          <a:p>
+            <a:pPr algn="l" indent="0" marL="0">
+              <a:buNone/>
+            </a:pPr>
+            <a:r>
+              <a:rPr lang="en-US" sz="900" dirty="0">
+                <a:solidFill>
+                  <a:srgbClr val="5D5D72"/>
+                </a:solidFill>
+                <a:latin typeface="Calibri" pitchFamily="34" charset="0"/>
+                <a:ea typeface="Calibri" pitchFamily="34" charset="-122"/>
+                <a:cs typeface="Calibri" pitchFamily="34" charset="-120"/>
+              </a:rPr>
+              <a:t>Usman Akram  •  COMSATS University Islamabad</a:t>
+            </a:r>
+            <a:endParaRPr lang="en-US" sz="900" dirty="0"/>
+          </a:p>
+        </p:txBody>
+      </p:sp>
+      <p:sp>
+        <p:nvSpPr>
+          <p:cNvPr id="11" name="Text 9"/>
+          <p:cNvSpPr txBox="1"/>
+          <p:nvPr/>
+        </p:nvSpPr>
+        <p:spPr>
+          <a:xfrm>
+            <a:off x="11155680" y="6446520"/>
+            <a:ext cx="457200" cy="292608"/>
+          </a:xfrm>
+          <a:prstGeom prst="rect">
+            <a:avLst/>
+          </a:prstGeom>
+          <a:noFill/>
+          <a:ln/>
+        </p:spPr>
+        <p:txBody>
+          <a:bodyPr wrap="square" lIns="0" tIns="0" rIns="0" bIns="0" rtlCol="0" anchor="ctr"/>
+          <a:lstStyle/>
+          <a:p>
+            <a:pPr algn="r" indent="0" marL="0">
+              <a:buNone/>
+            </a:pPr>
+            <a:r>
+              <a:rPr lang="en-US" sz="900" dirty="0">
+                <a:solidFill>
+                  <a:srgbClr val="5D5D72"/>
+                </a:solidFill>
+                <a:latin typeface="Calibri" pitchFamily="34" charset="0"/>
+                <a:ea typeface="Calibri" pitchFamily="34" charset="-122"/>
+                <a:cs typeface="Calibri" pitchFamily="34" charset="-120"/>
+              </a:rPr>
+              <a:t>22</a:t>
+            </a:r>
+            <a:endParaRPr lang="en-US" sz="900" dirty="0"/>
+          </a:p>
+        </p:txBody>
+      </p:sp>
+    </p:spTree>
+  </p:cSld>
+  <p:clrMapOvr>
+    <a:masterClrMapping/>
+  </p:clrMapOvr>
+</p:sld>
+</file>
+
+<file path=ppt/slides/slide23.xml><?xml version="1.0" encoding="utf-8"?>
+<p:sld xmlns:a="http://schemas.openxmlformats.org/drawingml/2006/main" xmlns:r="http://schemas.openxmlformats.org/officeDocument/2006/relationships" xmlns:p="http://schemas.openxmlformats.org/presentationml/2006/main">
+  <p:cSld name="Slide 23">
     <p:bg>
       <p:bgPr>
         <a:solidFill>
@@ -7864,7 +9029,7 @@
         <p:spPr>
           <a:xfrm>
             <a:off x="1463040" y="2194560"/>
-            <a:ext cx="10058400" cy="640080"/>
+            <a:ext cx="10058400" cy="624840"/>
           </a:xfrm>
           <a:prstGeom prst="rect">
             <a:avLst/>
@@ -7902,7 +9067,7 @@
         </p:nvSpPr>
         <p:spPr>
           <a:xfrm>
-            <a:off x="822960" y="2971800"/>
+            <a:off x="822960" y="2956560"/>
             <a:ext cx="438912" cy="438912"/>
           </a:xfrm>
           <a:prstGeom prst="ellipse">
@@ -7922,7 +9087,7 @@
         </p:nvSpPr>
         <p:spPr>
           <a:xfrm>
-            <a:off x="822960" y="2971800"/>
+            <a:off x="822960" y="2956560"/>
             <a:ext cx="438912" cy="438912"/>
           </a:xfrm>
           <a:prstGeom prst="rect">
@@ -7961,8 +9126,8 @@
         </p:nvSpPr>
         <p:spPr>
           <a:xfrm>
-            <a:off x="1463040" y="2880360"/>
-            <a:ext cx="10058400" cy="640080"/>
+            <a:off x="1463040" y="2865120"/>
+            <a:ext cx="10058400" cy="624840"/>
           </a:xfrm>
           <a:prstGeom prst="rect">
             <a:avLst/>
@@ -8000,7 +9165,7 @@
         </p:nvSpPr>
         <p:spPr>
           <a:xfrm>
-            <a:off x="822960" y="3657600"/>
+            <a:off x="822960" y="3627120"/>
             <a:ext cx="438912" cy="438912"/>
           </a:xfrm>
           <a:prstGeom prst="ellipse">
@@ -8020,7 +9185,7 @@
         </p:nvSpPr>
         <p:spPr>
           <a:xfrm>
-            <a:off x="822960" y="3657600"/>
+            <a:off x="822960" y="3627120"/>
             <a:ext cx="438912" cy="438912"/>
           </a:xfrm>
           <a:prstGeom prst="rect">
@@ -8059,8 +9224,8 @@
         </p:nvSpPr>
         <p:spPr>
           <a:xfrm>
-            <a:off x="1463040" y="3566160"/>
-            <a:ext cx="10058400" cy="640080"/>
+            <a:off x="1463040" y="3535680"/>
+            <a:ext cx="10058400" cy="624840"/>
           </a:xfrm>
           <a:prstGeom prst="rect">
             <a:avLst/>
@@ -8098,7 +9263,7 @@
         </p:nvSpPr>
         <p:spPr>
           <a:xfrm>
-            <a:off x="822960" y="4343400"/>
+            <a:off x="822960" y="4297680"/>
             <a:ext cx="438912" cy="438912"/>
           </a:xfrm>
           <a:prstGeom prst="ellipse">
@@ -8118,7 +9283,7 @@
         </p:nvSpPr>
         <p:spPr>
           <a:xfrm>
-            <a:off x="822960" y="4343400"/>
+            <a:off x="822960" y="4297680"/>
             <a:ext cx="438912" cy="438912"/>
           </a:xfrm>
           <a:prstGeom prst="rect">
@@ -8157,8 +9322,8 @@
         </p:nvSpPr>
         <p:spPr>
           <a:xfrm>
-            <a:off x="1463040" y="4251960"/>
-            <a:ext cx="10058400" cy="640080"/>
+            <a:off x="1463040" y="4206240"/>
+            <a:ext cx="10058400" cy="624840"/>
           </a:xfrm>
           <a:prstGeom prst="rect">
             <a:avLst/>
@@ -8196,7 +9361,7 @@
         </p:nvSpPr>
         <p:spPr>
           <a:xfrm>
-            <a:off x="822960" y="5029200"/>
+            <a:off x="822960" y="4968240"/>
             <a:ext cx="438912" cy="438912"/>
           </a:xfrm>
           <a:prstGeom prst="ellipse">
@@ -8216,7 +9381,7 @@
         </p:nvSpPr>
         <p:spPr>
           <a:xfrm>
-            <a:off x="822960" y="5029200"/>
+            <a:off x="822960" y="4968240"/>
             <a:ext cx="438912" cy="438912"/>
           </a:xfrm>
           <a:prstGeom prst="rect">
@@ -8255,8 +9420,8 @@
         </p:nvSpPr>
         <p:spPr>
           <a:xfrm>
-            <a:off x="1463040" y="4937760"/>
-            <a:ext cx="10058400" cy="640080"/>
+            <a:off x="1463040" y="4876800"/>
+            <a:ext cx="10058400" cy="624840"/>
           </a:xfrm>
           <a:prstGeom prst="rect">
             <a:avLst/>
@@ -8294,7 +9459,7 @@
         </p:nvSpPr>
         <p:spPr>
           <a:xfrm>
-            <a:off x="822960" y="5715000"/>
+            <a:off x="822960" y="5638800"/>
             <a:ext cx="438912" cy="438912"/>
           </a:xfrm>
           <a:prstGeom prst="ellipse">
@@ -8314,7 +9479,7 @@
         </p:nvSpPr>
         <p:spPr>
           <a:xfrm>
-            <a:off x="822960" y="5715000"/>
+            <a:off x="822960" y="5638800"/>
             <a:ext cx="438912" cy="438912"/>
           </a:xfrm>
           <a:prstGeom prst="rect">
@@ -8353,8 +9518,8 @@
         </p:nvSpPr>
         <p:spPr>
           <a:xfrm>
-            <a:off x="1463040" y="5623560"/>
-            <a:ext cx="10058400" cy="640080"/>
+            <a:off x="1463040" y="5547360"/>
+            <a:ext cx="10058400" cy="624840"/>
           </a:xfrm>
           <a:prstGeom prst="rect">
             <a:avLst/>
@@ -8456,7 +9621,7 @@
                 <a:ea typeface="Calibri" pitchFamily="34" charset="-122"/>
                 <a:cs typeface="Calibri" pitchFamily="34" charset="-120"/>
               </a:rPr>
-              <a:t>21</a:t>
+              <a:t>23</a:t>
             </a:r>
             <a:endParaRPr lang="en-US" sz="900" dirty="0"/>
           </a:p>

--- a/slides/CSC336-Lecture-06-CSS-Box-Model-and-Display.pptx
+++ b/slides/CSC336-Lecture-06-CSS-Box-Model-and-Display.pptx
@@ -3014,79 +3014,44 @@
       </p:sp>
       <p:sp>
         <p:nvSpPr>
-          <p:cNvPr id="6" name="Text 4"/>
-          <p:cNvSpPr txBox="1"/>
-          <p:nvPr/>
-        </p:nvSpPr>
-        <p:spPr>
-          <a:xfrm>
-            <a:off x="640080" y="6446520"/>
-            <a:ext cx="8686800" cy="292608"/>
-          </a:xfrm>
-          <a:prstGeom prst="rect">
-            <a:avLst/>
-          </a:prstGeom>
-          <a:noFill/>
-          <a:ln/>
-        </p:spPr>
-        <p:txBody>
-          <a:bodyPr wrap="square" lIns="0" tIns="0" rIns="0" bIns="0" rtlCol="0" anchor="ctr"/>
-          <a:lstStyle/>
-          <a:p>
-            <a:pPr algn="l" indent="0" marL="0">
-              <a:buNone/>
-            </a:pPr>
-            <a:r>
-              <a:rPr lang="en-US" sz="900" dirty="0">
-                <a:solidFill>
-                  <a:srgbClr val="9AA3D8"/>
-                </a:solidFill>
-                <a:latin typeface="Calibri" pitchFamily="34" charset="0"/>
-                <a:ea typeface="Calibri" pitchFamily="34" charset="-122"/>
-                <a:cs typeface="Calibri" pitchFamily="34" charset="-120"/>
-              </a:rPr>
-              <a:t>Usman Akram  •  COMSATS University Islamabad</a:t>
-            </a:r>
-            <a:endParaRPr lang="en-US" sz="900" dirty="0"/>
-          </a:p>
-        </p:txBody>
-      </p:sp>
-      <p:sp>
-        <p:nvSpPr>
-          <p:cNvPr id="7" name="Text 5"/>
-          <p:cNvSpPr txBox="1"/>
-          <p:nvPr/>
-        </p:nvSpPr>
-        <p:spPr>
-          <a:xfrm>
-            <a:off x="11155680" y="6446520"/>
-            <a:ext cx="457200" cy="292608"/>
-          </a:xfrm>
-          <a:prstGeom prst="rect">
-            <a:avLst/>
-          </a:prstGeom>
-          <a:noFill/>
-          <a:ln/>
-        </p:spPr>
-        <p:txBody>
-          <a:bodyPr wrap="square" lIns="0" tIns="0" rIns="0" bIns="0" rtlCol="0" anchor="ctr"/>
-          <a:lstStyle/>
-          <a:p>
-            <a:pPr algn="r" indent="0" marL="0">
-              <a:buNone/>
-            </a:pPr>
-            <a:r>
-              <a:rPr lang="en-US" sz="900" dirty="0">
-                <a:solidFill>
-                  <a:srgbClr val="9AA3D8"/>
-                </a:solidFill>
-                <a:latin typeface="Calibri" pitchFamily="34" charset="0"/>
-                <a:ea typeface="Calibri" pitchFamily="34" charset="-122"/>
-                <a:cs typeface="Calibri" pitchFamily="34" charset="-120"/>
-              </a:rPr>
-              <a:t>1</a:t>
-            </a:r>
-            <a:endParaRPr lang="en-US" sz="900" dirty="0"/>
+          <p:cNvPr id="8" name="cuinotes-footer-mark"/>
+          <p:cNvSpPr txBox="1"/>
+          <p:nvPr/>
+        </p:nvSpPr>
+        <p:spPr>
+          <a:xfrm>
+            <a:off x="9951720" y="6455664"/>
+            <a:ext cx="2011680" cy="292608"/>
+          </a:xfrm>
+          <a:prstGeom prst="rect">
+            <a:avLst/>
+          </a:prstGeom>
+          <a:noFill/>
+        </p:spPr>
+        <p:txBody>
+          <a:bodyPr wrap="none" lIns="0" rIns="0" tIns="0" bIns="0">
+            <a:spAutoFit/>
+          </a:bodyPr>
+          <a:lstStyle/>
+          <a:p>
+            <a:pPr algn="r"/>
+            <a:r>
+              <a:rPr sz="1000">
+                <a:solidFill>
+                  <a:srgbClr val="8A939B"/>
+                </a:solidFill>
+                <a:hlinkClick r:id="rId3"/>
+              </a:rPr>
+              <a:t>cuinotes.com</a:t>
+            </a:r>
+            <a:r>
+              <a:rPr sz="1000">
+                <a:solidFill>
+                  <a:srgbClr val="8A939B"/>
+                </a:solidFill>
+              </a:rPr>
+              <a:t>  ·  1</a:t>
+            </a:r>
           </a:p>
         </p:txBody>
       </p:sp>
@@ -3226,6 +3191,10 @@
             <a:prstDash val="solid"/>
           </a:ln>
         </p:spPr>
+        <p:txBody>
+          <a:bodyPr/>
+          <a:p/>
+        </p:txBody>
       </p:sp>
       <p:sp>
         <p:nvSpPr>
@@ -3307,79 +3276,44 @@
       </p:sp>
       <p:sp>
         <p:nvSpPr>
-          <p:cNvPr id="7" name="Text 5"/>
-          <p:cNvSpPr txBox="1"/>
-          <p:nvPr/>
-        </p:nvSpPr>
-        <p:spPr>
-          <a:xfrm>
-            <a:off x="640080" y="6446520"/>
-            <a:ext cx="8686800" cy="292608"/>
-          </a:xfrm>
-          <a:prstGeom prst="rect">
-            <a:avLst/>
-          </a:prstGeom>
-          <a:noFill/>
-          <a:ln/>
-        </p:spPr>
-        <p:txBody>
-          <a:bodyPr wrap="square" lIns="0" tIns="0" rIns="0" bIns="0" rtlCol="0" anchor="ctr"/>
-          <a:lstStyle/>
-          <a:p>
-            <a:pPr algn="l" indent="0" marL="0">
-              <a:buNone/>
-            </a:pPr>
-            <a:r>
-              <a:rPr lang="en-US" sz="900" dirty="0">
-                <a:solidFill>
-                  <a:srgbClr val="5D5D72"/>
-                </a:solidFill>
-                <a:latin typeface="Calibri" pitchFamily="34" charset="0"/>
-                <a:ea typeface="Calibri" pitchFamily="34" charset="-122"/>
-                <a:cs typeface="Calibri" pitchFamily="34" charset="-120"/>
-              </a:rPr>
-              <a:t>Usman Akram  •  COMSATS University Islamabad</a:t>
-            </a:r>
-            <a:endParaRPr lang="en-US" sz="900" dirty="0"/>
-          </a:p>
-        </p:txBody>
-      </p:sp>
-      <p:sp>
-        <p:nvSpPr>
-          <p:cNvPr id="8" name="Text 6"/>
-          <p:cNvSpPr txBox="1"/>
-          <p:nvPr/>
-        </p:nvSpPr>
-        <p:spPr>
-          <a:xfrm>
-            <a:off x="11155680" y="6446520"/>
-            <a:ext cx="457200" cy="292608"/>
-          </a:xfrm>
-          <a:prstGeom prst="rect">
-            <a:avLst/>
-          </a:prstGeom>
-          <a:noFill/>
-          <a:ln/>
-        </p:spPr>
-        <p:txBody>
-          <a:bodyPr wrap="square" lIns="0" tIns="0" rIns="0" bIns="0" rtlCol="0" anchor="ctr"/>
-          <a:lstStyle/>
-          <a:p>
-            <a:pPr algn="r" indent="0" marL="0">
-              <a:buNone/>
-            </a:pPr>
-            <a:r>
-              <a:rPr lang="en-US" sz="900" dirty="0">
-                <a:solidFill>
-                  <a:srgbClr val="5D5D72"/>
-                </a:solidFill>
-                <a:latin typeface="Calibri" pitchFamily="34" charset="0"/>
-                <a:ea typeface="Calibri" pitchFamily="34" charset="-122"/>
-                <a:cs typeface="Calibri" pitchFamily="34" charset="-120"/>
-              </a:rPr>
-              <a:t>10</a:t>
-            </a:r>
-            <a:endParaRPr lang="en-US" sz="900" dirty="0"/>
+          <p:cNvPr id="9" name="cuinotes-footer-mark"/>
+          <p:cNvSpPr txBox="1"/>
+          <p:nvPr/>
+        </p:nvSpPr>
+        <p:spPr>
+          <a:xfrm>
+            <a:off x="9951720" y="6455664"/>
+            <a:ext cx="2011680" cy="292608"/>
+          </a:xfrm>
+          <a:prstGeom prst="rect">
+            <a:avLst/>
+          </a:prstGeom>
+          <a:noFill/>
+        </p:spPr>
+        <p:txBody>
+          <a:bodyPr wrap="none" lIns="0" rIns="0" tIns="0" bIns="0">
+            <a:spAutoFit/>
+          </a:bodyPr>
+          <a:lstStyle/>
+          <a:p>
+            <a:pPr algn="r"/>
+            <a:r>
+              <a:rPr sz="1000">
+                <a:solidFill>
+                  <a:srgbClr val="8A939B"/>
+                </a:solidFill>
+                <a:hlinkClick r:id="rId3"/>
+              </a:rPr>
+              <a:t>cuinotes.com</a:t>
+            </a:r>
+            <a:r>
+              <a:rPr sz="1000">
+                <a:solidFill>
+                  <a:srgbClr val="8A939B"/>
+                </a:solidFill>
+              </a:rPr>
+              <a:t>  ·  10</a:t>
+            </a:r>
           </a:p>
         </p:txBody>
       </p:sp>
@@ -3512,6 +3446,10 @@
           </a:solidFill>
           <a:ln/>
         </p:spPr>
+        <p:txBody>
+          <a:bodyPr/>
+          <a:p/>
+        </p:txBody>
       </p:sp>
       <p:sp>
         <p:nvSpPr>
@@ -3571,6 +3509,10 @@
           </a:solidFill>
           <a:ln/>
         </p:spPr>
+        <p:txBody>
+          <a:bodyPr/>
+          <a:p/>
+        </p:txBody>
       </p:sp>
       <p:sp>
         <p:nvSpPr>
@@ -3630,6 +3572,10 @@
           </a:solidFill>
           <a:ln/>
         </p:spPr>
+        <p:txBody>
+          <a:bodyPr/>
+          <a:p/>
+        </p:txBody>
       </p:sp>
       <p:sp>
         <p:nvSpPr>
@@ -3672,79 +3618,44 @@
       </p:sp>
       <p:sp>
         <p:nvSpPr>
-          <p:cNvPr id="10" name="Text 8"/>
-          <p:cNvSpPr txBox="1"/>
-          <p:nvPr/>
-        </p:nvSpPr>
-        <p:spPr>
-          <a:xfrm>
-            <a:off x="640080" y="6446520"/>
-            <a:ext cx="8686800" cy="292608"/>
-          </a:xfrm>
-          <a:prstGeom prst="rect">
-            <a:avLst/>
-          </a:prstGeom>
-          <a:noFill/>
-          <a:ln/>
-        </p:spPr>
-        <p:txBody>
-          <a:bodyPr wrap="square" lIns="0" tIns="0" rIns="0" bIns="0" rtlCol="0" anchor="ctr"/>
-          <a:lstStyle/>
-          <a:p>
-            <a:pPr algn="l" indent="0" marL="0">
-              <a:buNone/>
-            </a:pPr>
-            <a:r>
-              <a:rPr lang="en-US" sz="900" dirty="0">
-                <a:solidFill>
-                  <a:srgbClr val="5D5D72"/>
-                </a:solidFill>
-                <a:latin typeface="Calibri" pitchFamily="34" charset="0"/>
-                <a:ea typeface="Calibri" pitchFamily="34" charset="-122"/>
-                <a:cs typeface="Calibri" pitchFamily="34" charset="-120"/>
-              </a:rPr>
-              <a:t>Usman Akram  •  COMSATS University Islamabad</a:t>
-            </a:r>
-            <a:endParaRPr lang="en-US" sz="900" dirty="0"/>
-          </a:p>
-        </p:txBody>
-      </p:sp>
-      <p:sp>
-        <p:nvSpPr>
-          <p:cNvPr id="11" name="Text 9"/>
-          <p:cNvSpPr txBox="1"/>
-          <p:nvPr/>
-        </p:nvSpPr>
-        <p:spPr>
-          <a:xfrm>
-            <a:off x="11155680" y="6446520"/>
-            <a:ext cx="457200" cy="292608"/>
-          </a:xfrm>
-          <a:prstGeom prst="rect">
-            <a:avLst/>
-          </a:prstGeom>
-          <a:noFill/>
-          <a:ln/>
-        </p:spPr>
-        <p:txBody>
-          <a:bodyPr wrap="square" lIns="0" tIns="0" rIns="0" bIns="0" rtlCol="0" anchor="ctr"/>
-          <a:lstStyle/>
-          <a:p>
-            <a:pPr algn="r" indent="0" marL="0">
-              <a:buNone/>
-            </a:pPr>
-            <a:r>
-              <a:rPr lang="en-US" sz="900" dirty="0">
-                <a:solidFill>
-                  <a:srgbClr val="5D5D72"/>
-                </a:solidFill>
-                <a:latin typeface="Calibri" pitchFamily="34" charset="0"/>
-                <a:ea typeface="Calibri" pitchFamily="34" charset="-122"/>
-                <a:cs typeface="Calibri" pitchFamily="34" charset="-120"/>
-              </a:rPr>
-              <a:t>11</a:t>
-            </a:r>
-            <a:endParaRPr lang="en-US" sz="900" dirty="0"/>
+          <p:cNvPr id="12" name="cuinotes-footer-mark"/>
+          <p:cNvSpPr txBox="1"/>
+          <p:nvPr/>
+        </p:nvSpPr>
+        <p:spPr>
+          <a:xfrm>
+            <a:off x="9951720" y="6455664"/>
+            <a:ext cx="2011680" cy="292608"/>
+          </a:xfrm>
+          <a:prstGeom prst="rect">
+            <a:avLst/>
+          </a:prstGeom>
+          <a:noFill/>
+        </p:spPr>
+        <p:txBody>
+          <a:bodyPr wrap="none" lIns="0" rIns="0" tIns="0" bIns="0">
+            <a:spAutoFit/>
+          </a:bodyPr>
+          <a:lstStyle/>
+          <a:p>
+            <a:pPr algn="r"/>
+            <a:r>
+              <a:rPr sz="1000">
+                <a:solidFill>
+                  <a:srgbClr val="8A939B"/>
+                </a:solidFill>
+                <a:hlinkClick r:id="rId3"/>
+              </a:rPr>
+              <a:t>cuinotes.com</a:t>
+            </a:r>
+            <a:r>
+              <a:rPr sz="1000">
+                <a:solidFill>
+                  <a:srgbClr val="8A939B"/>
+                </a:solidFill>
+              </a:rPr>
+              <a:t>  ·  11</a:t>
+            </a:r>
           </a:p>
         </p:txBody>
       </p:sp>
@@ -3877,6 +3788,10 @@
           </a:solidFill>
           <a:ln/>
         </p:spPr>
+        <p:txBody>
+          <a:bodyPr/>
+          <a:p/>
+        </p:txBody>
       </p:sp>
       <p:sp>
         <p:nvSpPr>
@@ -3975,6 +3890,10 @@
           </a:solidFill>
           <a:ln/>
         </p:spPr>
+        <p:txBody>
+          <a:bodyPr/>
+          <a:p/>
+        </p:txBody>
       </p:sp>
       <p:sp>
         <p:nvSpPr>
@@ -4073,6 +3992,10 @@
           </a:solidFill>
           <a:ln/>
         </p:spPr>
+        <p:txBody>
+          <a:bodyPr/>
+          <a:p/>
+        </p:txBody>
       </p:sp>
       <p:sp>
         <p:nvSpPr>
@@ -4171,6 +4094,10 @@
           </a:solidFill>
           <a:ln/>
         </p:spPr>
+        <p:txBody>
+          <a:bodyPr/>
+          <a:p/>
+        </p:txBody>
       </p:sp>
       <p:sp>
         <p:nvSpPr>
@@ -4252,79 +4179,44 @@
       </p:sp>
       <p:sp>
         <p:nvSpPr>
-          <p:cNvPr id="16" name="Text 14"/>
-          <p:cNvSpPr txBox="1"/>
-          <p:nvPr/>
-        </p:nvSpPr>
-        <p:spPr>
-          <a:xfrm>
-            <a:off x="640080" y="6446520"/>
-            <a:ext cx="8686800" cy="292608"/>
-          </a:xfrm>
-          <a:prstGeom prst="rect">
-            <a:avLst/>
-          </a:prstGeom>
-          <a:noFill/>
-          <a:ln/>
-        </p:spPr>
-        <p:txBody>
-          <a:bodyPr wrap="square" lIns="0" tIns="0" rIns="0" bIns="0" rtlCol="0" anchor="ctr"/>
-          <a:lstStyle/>
-          <a:p>
-            <a:pPr algn="l" indent="0" marL="0">
-              <a:buNone/>
-            </a:pPr>
-            <a:r>
-              <a:rPr lang="en-US" sz="900" dirty="0">
-                <a:solidFill>
-                  <a:srgbClr val="5D5D72"/>
-                </a:solidFill>
-                <a:latin typeface="Calibri" pitchFamily="34" charset="0"/>
-                <a:ea typeface="Calibri" pitchFamily="34" charset="-122"/>
-                <a:cs typeface="Calibri" pitchFamily="34" charset="-120"/>
-              </a:rPr>
-              <a:t>Usman Akram  •  COMSATS University Islamabad</a:t>
-            </a:r>
-            <a:endParaRPr lang="en-US" sz="900" dirty="0"/>
-          </a:p>
-        </p:txBody>
-      </p:sp>
-      <p:sp>
-        <p:nvSpPr>
-          <p:cNvPr id="17" name="Text 15"/>
-          <p:cNvSpPr txBox="1"/>
-          <p:nvPr/>
-        </p:nvSpPr>
-        <p:spPr>
-          <a:xfrm>
-            <a:off x="11155680" y="6446520"/>
-            <a:ext cx="457200" cy="292608"/>
-          </a:xfrm>
-          <a:prstGeom prst="rect">
-            <a:avLst/>
-          </a:prstGeom>
-          <a:noFill/>
-          <a:ln/>
-        </p:spPr>
-        <p:txBody>
-          <a:bodyPr wrap="square" lIns="0" tIns="0" rIns="0" bIns="0" rtlCol="0" anchor="ctr"/>
-          <a:lstStyle/>
-          <a:p>
-            <a:pPr algn="r" indent="0" marL="0">
-              <a:buNone/>
-            </a:pPr>
-            <a:r>
-              <a:rPr lang="en-US" sz="900" dirty="0">
-                <a:solidFill>
-                  <a:srgbClr val="5D5D72"/>
-                </a:solidFill>
-                <a:latin typeface="Calibri" pitchFamily="34" charset="0"/>
-                <a:ea typeface="Calibri" pitchFamily="34" charset="-122"/>
-                <a:cs typeface="Calibri" pitchFamily="34" charset="-120"/>
-              </a:rPr>
-              <a:t>12</a:t>
-            </a:r>
-            <a:endParaRPr lang="en-US" sz="900" dirty="0"/>
+          <p:cNvPr id="18" name="cuinotes-footer-mark"/>
+          <p:cNvSpPr txBox="1"/>
+          <p:nvPr/>
+        </p:nvSpPr>
+        <p:spPr>
+          <a:xfrm>
+            <a:off x="9951720" y="6455664"/>
+            <a:ext cx="2011680" cy="292608"/>
+          </a:xfrm>
+          <a:prstGeom prst="rect">
+            <a:avLst/>
+          </a:prstGeom>
+          <a:noFill/>
+        </p:spPr>
+        <p:txBody>
+          <a:bodyPr wrap="none" lIns="0" rIns="0" tIns="0" bIns="0">
+            <a:spAutoFit/>
+          </a:bodyPr>
+          <a:lstStyle/>
+          <a:p>
+            <a:pPr algn="r"/>
+            <a:r>
+              <a:rPr sz="1000">
+                <a:solidFill>
+                  <a:srgbClr val="8A939B"/>
+                </a:solidFill>
+                <a:hlinkClick r:id="rId3"/>
+              </a:rPr>
+              <a:t>cuinotes.com</a:t>
+            </a:r>
+            <a:r>
+              <a:rPr sz="1000">
+                <a:solidFill>
+                  <a:srgbClr val="8A939B"/>
+                </a:solidFill>
+              </a:rPr>
+              <a:t>  ·  12</a:t>
+            </a:r>
           </a:p>
         </p:txBody>
       </p:sp>
@@ -4459,6 +4351,10 @@
           </a:solidFill>
           <a:ln/>
         </p:spPr>
+        <p:txBody>
+          <a:bodyPr/>
+          <a:p/>
+        </p:txBody>
       </p:sp>
       <p:sp>
         <p:nvSpPr>
@@ -4615,6 +4511,10 @@
             </a:outerShdw>
           </a:effectLst>
         </p:spPr>
+        <p:txBody>
+          <a:bodyPr/>
+          <a:p/>
+        </p:txBody>
       </p:sp>
       <p:pic>
         <p:nvPicPr>
@@ -4642,79 +4542,44 @@
       </p:pic>
       <p:sp>
         <p:nvSpPr>
-          <p:cNvPr id="8" name="Text 5"/>
-          <p:cNvSpPr txBox="1"/>
-          <p:nvPr/>
-        </p:nvSpPr>
-        <p:spPr>
-          <a:xfrm>
-            <a:off x="640080" y="6446520"/>
-            <a:ext cx="8686800" cy="292608"/>
-          </a:xfrm>
-          <a:prstGeom prst="rect">
-            <a:avLst/>
-          </a:prstGeom>
-          <a:noFill/>
-          <a:ln/>
-        </p:spPr>
-        <p:txBody>
-          <a:bodyPr wrap="square" lIns="0" tIns="0" rIns="0" bIns="0" rtlCol="0" anchor="ctr"/>
-          <a:lstStyle/>
-          <a:p>
-            <a:pPr algn="l" indent="0" marL="0">
-              <a:buNone/>
-            </a:pPr>
-            <a:r>
-              <a:rPr lang="en-US" sz="900" dirty="0">
-                <a:solidFill>
-                  <a:srgbClr val="5D5D72"/>
-                </a:solidFill>
-                <a:latin typeface="Calibri" pitchFamily="34" charset="0"/>
-                <a:ea typeface="Calibri" pitchFamily="34" charset="-122"/>
-                <a:cs typeface="Calibri" pitchFamily="34" charset="-120"/>
-              </a:rPr>
-              <a:t>Usman Akram  •  COMSATS University Islamabad</a:t>
-            </a:r>
-            <a:endParaRPr lang="en-US" sz="900" dirty="0"/>
-          </a:p>
-        </p:txBody>
-      </p:sp>
-      <p:sp>
-        <p:nvSpPr>
-          <p:cNvPr id="9" name="Text 6"/>
-          <p:cNvSpPr txBox="1"/>
-          <p:nvPr/>
-        </p:nvSpPr>
-        <p:spPr>
-          <a:xfrm>
-            <a:off x="11155680" y="6446520"/>
-            <a:ext cx="457200" cy="292608"/>
-          </a:xfrm>
-          <a:prstGeom prst="rect">
-            <a:avLst/>
-          </a:prstGeom>
-          <a:noFill/>
-          <a:ln/>
-        </p:spPr>
-        <p:txBody>
-          <a:bodyPr wrap="square" lIns="0" tIns="0" rIns="0" bIns="0" rtlCol="0" anchor="ctr"/>
-          <a:lstStyle/>
-          <a:p>
-            <a:pPr algn="r" indent="0" marL="0">
-              <a:buNone/>
-            </a:pPr>
-            <a:r>
-              <a:rPr lang="en-US" sz="900" dirty="0">
-                <a:solidFill>
-                  <a:srgbClr val="5D5D72"/>
-                </a:solidFill>
-                <a:latin typeface="Calibri" pitchFamily="34" charset="0"/>
-                <a:ea typeface="Calibri" pitchFamily="34" charset="-122"/>
-                <a:cs typeface="Calibri" pitchFamily="34" charset="-120"/>
-              </a:rPr>
-              <a:t>13</a:t>
-            </a:r>
-            <a:endParaRPr lang="en-US" sz="900" dirty="0"/>
+          <p:cNvPr id="10" name="cuinotes-footer-mark"/>
+          <p:cNvSpPr txBox="1"/>
+          <p:nvPr/>
+        </p:nvSpPr>
+        <p:spPr>
+          <a:xfrm>
+            <a:off x="9951720" y="6455664"/>
+            <a:ext cx="2011680" cy="292608"/>
+          </a:xfrm>
+          <a:prstGeom prst="rect">
+            <a:avLst/>
+          </a:prstGeom>
+          <a:noFill/>
+        </p:spPr>
+        <p:txBody>
+          <a:bodyPr wrap="none" lIns="0" rIns="0" tIns="0" bIns="0">
+            <a:spAutoFit/>
+          </a:bodyPr>
+          <a:lstStyle/>
+          <a:p>
+            <a:pPr algn="r"/>
+            <a:r>
+              <a:rPr sz="1000">
+                <a:solidFill>
+                  <a:srgbClr val="8A939B"/>
+                </a:solidFill>
+                <a:hlinkClick r:id="rId4"/>
+              </a:rPr>
+              <a:t>cuinotes.com</a:t>
+            </a:r>
+            <a:r>
+              <a:rPr sz="1000">
+                <a:solidFill>
+                  <a:srgbClr val="8A939B"/>
+                </a:solidFill>
+              </a:rPr>
+              <a:t>  ·  13</a:t>
+            </a:r>
           </a:p>
         </p:txBody>
       </p:sp>
@@ -4849,6 +4714,10 @@
           </a:solidFill>
           <a:ln/>
         </p:spPr>
+        <p:txBody>
+          <a:bodyPr/>
+          <a:p/>
+        </p:txBody>
       </p:sp>
       <p:sp>
         <p:nvSpPr>
@@ -4953,79 +4822,44 @@
       </p:sp>
       <p:sp>
         <p:nvSpPr>
-          <p:cNvPr id="7" name="Text 5"/>
-          <p:cNvSpPr txBox="1"/>
-          <p:nvPr/>
-        </p:nvSpPr>
-        <p:spPr>
-          <a:xfrm>
-            <a:off x="640080" y="6446520"/>
-            <a:ext cx="8686800" cy="292608"/>
-          </a:xfrm>
-          <a:prstGeom prst="rect">
-            <a:avLst/>
-          </a:prstGeom>
-          <a:noFill/>
-          <a:ln/>
-        </p:spPr>
-        <p:txBody>
-          <a:bodyPr wrap="square" lIns="0" tIns="0" rIns="0" bIns="0" rtlCol="0" anchor="ctr"/>
-          <a:lstStyle/>
-          <a:p>
-            <a:pPr algn="l" indent="0" marL="0">
-              <a:buNone/>
-            </a:pPr>
-            <a:r>
-              <a:rPr lang="en-US" sz="900" dirty="0">
-                <a:solidFill>
-                  <a:srgbClr val="5D5D72"/>
-                </a:solidFill>
-                <a:latin typeface="Calibri" pitchFamily="34" charset="0"/>
-                <a:ea typeface="Calibri" pitchFamily="34" charset="-122"/>
-                <a:cs typeface="Calibri" pitchFamily="34" charset="-120"/>
-              </a:rPr>
-              <a:t>Usman Akram  •  COMSATS University Islamabad</a:t>
-            </a:r>
-            <a:endParaRPr lang="en-US" sz="900" dirty="0"/>
-          </a:p>
-        </p:txBody>
-      </p:sp>
-      <p:sp>
-        <p:nvSpPr>
-          <p:cNvPr id="8" name="Text 6"/>
-          <p:cNvSpPr txBox="1"/>
-          <p:nvPr/>
-        </p:nvSpPr>
-        <p:spPr>
-          <a:xfrm>
-            <a:off x="11155680" y="6446520"/>
-            <a:ext cx="457200" cy="292608"/>
-          </a:xfrm>
-          <a:prstGeom prst="rect">
-            <a:avLst/>
-          </a:prstGeom>
-          <a:noFill/>
-          <a:ln/>
-        </p:spPr>
-        <p:txBody>
-          <a:bodyPr wrap="square" lIns="0" tIns="0" rIns="0" bIns="0" rtlCol="0" anchor="ctr"/>
-          <a:lstStyle/>
-          <a:p>
-            <a:pPr algn="r" indent="0" marL="0">
-              <a:buNone/>
-            </a:pPr>
-            <a:r>
-              <a:rPr lang="en-US" sz="900" dirty="0">
-                <a:solidFill>
-                  <a:srgbClr val="5D5D72"/>
-                </a:solidFill>
-                <a:latin typeface="Calibri" pitchFamily="34" charset="0"/>
-                <a:ea typeface="Calibri" pitchFamily="34" charset="-122"/>
-                <a:cs typeface="Calibri" pitchFamily="34" charset="-120"/>
-              </a:rPr>
-              <a:t>14</a:t>
-            </a:r>
-            <a:endParaRPr lang="en-US" sz="900" dirty="0"/>
+          <p:cNvPr id="9" name="cuinotes-footer-mark"/>
+          <p:cNvSpPr txBox="1"/>
+          <p:nvPr/>
+        </p:nvSpPr>
+        <p:spPr>
+          <a:xfrm>
+            <a:off x="9951720" y="6455664"/>
+            <a:ext cx="2011680" cy="292608"/>
+          </a:xfrm>
+          <a:prstGeom prst="rect">
+            <a:avLst/>
+          </a:prstGeom>
+          <a:noFill/>
+        </p:spPr>
+        <p:txBody>
+          <a:bodyPr wrap="none" lIns="0" rIns="0" tIns="0" bIns="0">
+            <a:spAutoFit/>
+          </a:bodyPr>
+          <a:lstStyle/>
+          <a:p>
+            <a:pPr algn="r"/>
+            <a:r>
+              <a:rPr sz="1000">
+                <a:solidFill>
+                  <a:srgbClr val="8A939B"/>
+                </a:solidFill>
+                <a:hlinkClick r:id="rId3"/>
+              </a:rPr>
+              <a:t>cuinotes.com</a:t>
+            </a:r>
+            <a:r>
+              <a:rPr sz="1000">
+                <a:solidFill>
+                  <a:srgbClr val="8A939B"/>
+                </a:solidFill>
+              </a:rPr>
+              <a:t>  ·  14</a:t>
+            </a:r>
           </a:p>
         </p:txBody>
       </p:sp>
@@ -5160,6 +4994,10 @@
           </a:solidFill>
           <a:ln/>
         </p:spPr>
+        <p:txBody>
+          <a:bodyPr/>
+          <a:p/>
+        </p:txBody>
       </p:sp>
       <p:sp>
         <p:nvSpPr>
@@ -5364,79 +5202,44 @@
       </p:sp>
       <p:sp>
         <p:nvSpPr>
-          <p:cNvPr id="7" name="Text 5"/>
-          <p:cNvSpPr txBox="1"/>
-          <p:nvPr/>
-        </p:nvSpPr>
-        <p:spPr>
-          <a:xfrm>
-            <a:off x="640080" y="6446520"/>
-            <a:ext cx="8686800" cy="292608"/>
-          </a:xfrm>
-          <a:prstGeom prst="rect">
-            <a:avLst/>
-          </a:prstGeom>
-          <a:noFill/>
-          <a:ln/>
-        </p:spPr>
-        <p:txBody>
-          <a:bodyPr wrap="square" lIns="0" tIns="0" rIns="0" bIns="0" rtlCol="0" anchor="ctr"/>
-          <a:lstStyle/>
-          <a:p>
-            <a:pPr algn="l" indent="0" marL="0">
-              <a:buNone/>
-            </a:pPr>
-            <a:r>
-              <a:rPr lang="en-US" sz="900" dirty="0">
-                <a:solidFill>
-                  <a:srgbClr val="5D5D72"/>
-                </a:solidFill>
-                <a:latin typeface="Calibri" pitchFamily="34" charset="0"/>
-                <a:ea typeface="Calibri" pitchFamily="34" charset="-122"/>
-                <a:cs typeface="Calibri" pitchFamily="34" charset="-120"/>
-              </a:rPr>
-              <a:t>Usman Akram  •  COMSATS University Islamabad</a:t>
-            </a:r>
-            <a:endParaRPr lang="en-US" sz="900" dirty="0"/>
-          </a:p>
-        </p:txBody>
-      </p:sp>
-      <p:sp>
-        <p:nvSpPr>
-          <p:cNvPr id="8" name="Text 6"/>
-          <p:cNvSpPr txBox="1"/>
-          <p:nvPr/>
-        </p:nvSpPr>
-        <p:spPr>
-          <a:xfrm>
-            <a:off x="11155680" y="6446520"/>
-            <a:ext cx="457200" cy="292608"/>
-          </a:xfrm>
-          <a:prstGeom prst="rect">
-            <a:avLst/>
-          </a:prstGeom>
-          <a:noFill/>
-          <a:ln/>
-        </p:spPr>
-        <p:txBody>
-          <a:bodyPr wrap="square" lIns="0" tIns="0" rIns="0" bIns="0" rtlCol="0" anchor="ctr"/>
-          <a:lstStyle/>
-          <a:p>
-            <a:pPr algn="r" indent="0" marL="0">
-              <a:buNone/>
-            </a:pPr>
-            <a:r>
-              <a:rPr lang="en-US" sz="900" dirty="0">
-                <a:solidFill>
-                  <a:srgbClr val="5D5D72"/>
-                </a:solidFill>
-                <a:latin typeface="Calibri" pitchFamily="34" charset="0"/>
-                <a:ea typeface="Calibri" pitchFamily="34" charset="-122"/>
-                <a:cs typeface="Calibri" pitchFamily="34" charset="-120"/>
-              </a:rPr>
-              <a:t>15</a:t>
-            </a:r>
-            <a:endParaRPr lang="en-US" sz="900" dirty="0"/>
+          <p:cNvPr id="9" name="cuinotes-footer-mark"/>
+          <p:cNvSpPr txBox="1"/>
+          <p:nvPr/>
+        </p:nvSpPr>
+        <p:spPr>
+          <a:xfrm>
+            <a:off x="9951720" y="6455664"/>
+            <a:ext cx="2011680" cy="292608"/>
+          </a:xfrm>
+          <a:prstGeom prst="rect">
+            <a:avLst/>
+          </a:prstGeom>
+          <a:noFill/>
+        </p:spPr>
+        <p:txBody>
+          <a:bodyPr wrap="none" lIns="0" rIns="0" tIns="0" bIns="0">
+            <a:spAutoFit/>
+          </a:bodyPr>
+          <a:lstStyle/>
+          <a:p>
+            <a:pPr algn="r"/>
+            <a:r>
+              <a:rPr sz="1000">
+                <a:solidFill>
+                  <a:srgbClr val="8A939B"/>
+                </a:solidFill>
+                <a:hlinkClick r:id="rId3"/>
+              </a:rPr>
+              <a:t>cuinotes.com</a:t>
+            </a:r>
+            <a:r>
+              <a:rPr sz="1000">
+                <a:solidFill>
+                  <a:srgbClr val="8A939B"/>
+                </a:solidFill>
+              </a:rPr>
+              <a:t>  ·  15</a:t>
+            </a:r>
           </a:p>
         </p:txBody>
       </p:sp>
@@ -5571,6 +5374,10 @@
           </a:solidFill>
           <a:ln/>
         </p:spPr>
+        <p:txBody>
+          <a:bodyPr/>
+          <a:p/>
+        </p:txBody>
       </p:sp>
       <p:sp>
         <p:nvSpPr>
@@ -5675,79 +5482,44 @@
       </p:sp>
       <p:sp>
         <p:nvSpPr>
-          <p:cNvPr id="7" name="Text 5"/>
-          <p:cNvSpPr txBox="1"/>
-          <p:nvPr/>
-        </p:nvSpPr>
-        <p:spPr>
-          <a:xfrm>
-            <a:off x="640080" y="6446520"/>
-            <a:ext cx="8686800" cy="292608"/>
-          </a:xfrm>
-          <a:prstGeom prst="rect">
-            <a:avLst/>
-          </a:prstGeom>
-          <a:noFill/>
-          <a:ln/>
-        </p:spPr>
-        <p:txBody>
-          <a:bodyPr wrap="square" lIns="0" tIns="0" rIns="0" bIns="0" rtlCol="0" anchor="ctr"/>
-          <a:lstStyle/>
-          <a:p>
-            <a:pPr algn="l" indent="0" marL="0">
-              <a:buNone/>
-            </a:pPr>
-            <a:r>
-              <a:rPr lang="en-US" sz="900" dirty="0">
-                <a:solidFill>
-                  <a:srgbClr val="5D5D72"/>
-                </a:solidFill>
-                <a:latin typeface="Calibri" pitchFamily="34" charset="0"/>
-                <a:ea typeface="Calibri" pitchFamily="34" charset="-122"/>
-                <a:cs typeface="Calibri" pitchFamily="34" charset="-120"/>
-              </a:rPr>
-              <a:t>Usman Akram  •  COMSATS University Islamabad</a:t>
-            </a:r>
-            <a:endParaRPr lang="en-US" sz="900" dirty="0"/>
-          </a:p>
-        </p:txBody>
-      </p:sp>
-      <p:sp>
-        <p:nvSpPr>
-          <p:cNvPr id="8" name="Text 6"/>
-          <p:cNvSpPr txBox="1"/>
-          <p:nvPr/>
-        </p:nvSpPr>
-        <p:spPr>
-          <a:xfrm>
-            <a:off x="11155680" y="6446520"/>
-            <a:ext cx="457200" cy="292608"/>
-          </a:xfrm>
-          <a:prstGeom prst="rect">
-            <a:avLst/>
-          </a:prstGeom>
-          <a:noFill/>
-          <a:ln/>
-        </p:spPr>
-        <p:txBody>
-          <a:bodyPr wrap="square" lIns="0" tIns="0" rIns="0" bIns="0" rtlCol="0" anchor="ctr"/>
-          <a:lstStyle/>
-          <a:p>
-            <a:pPr algn="r" indent="0" marL="0">
-              <a:buNone/>
-            </a:pPr>
-            <a:r>
-              <a:rPr lang="en-US" sz="900" dirty="0">
-                <a:solidFill>
-                  <a:srgbClr val="5D5D72"/>
-                </a:solidFill>
-                <a:latin typeface="Calibri" pitchFamily="34" charset="0"/>
-                <a:ea typeface="Calibri" pitchFamily="34" charset="-122"/>
-                <a:cs typeface="Calibri" pitchFamily="34" charset="-120"/>
-              </a:rPr>
-              <a:t>16</a:t>
-            </a:r>
-            <a:endParaRPr lang="en-US" sz="900" dirty="0"/>
+          <p:cNvPr id="9" name="cuinotes-footer-mark"/>
+          <p:cNvSpPr txBox="1"/>
+          <p:nvPr/>
+        </p:nvSpPr>
+        <p:spPr>
+          <a:xfrm>
+            <a:off x="9951720" y="6455664"/>
+            <a:ext cx="2011680" cy="292608"/>
+          </a:xfrm>
+          <a:prstGeom prst="rect">
+            <a:avLst/>
+          </a:prstGeom>
+          <a:noFill/>
+        </p:spPr>
+        <p:txBody>
+          <a:bodyPr wrap="none" lIns="0" rIns="0" tIns="0" bIns="0">
+            <a:spAutoFit/>
+          </a:bodyPr>
+          <a:lstStyle/>
+          <a:p>
+            <a:pPr algn="r"/>
+            <a:r>
+              <a:rPr sz="1000">
+                <a:solidFill>
+                  <a:srgbClr val="8A939B"/>
+                </a:solidFill>
+                <a:hlinkClick r:id="rId3"/>
+              </a:rPr>
+              <a:t>cuinotes.com</a:t>
+            </a:r>
+            <a:r>
+              <a:rPr sz="1000">
+                <a:solidFill>
+                  <a:srgbClr val="8A939B"/>
+                </a:solidFill>
+              </a:rPr>
+              <a:t>  ·  16</a:t>
+            </a:r>
           </a:p>
         </p:txBody>
       </p:sp>
@@ -5894,6 +5666,10 @@
             </a:outerShdw>
           </a:effectLst>
         </p:spPr>
+        <p:txBody>
+          <a:bodyPr/>
+          <a:p/>
+        </p:txBody>
       </p:sp>
       <p:pic>
         <p:nvPicPr>
@@ -5921,79 +5697,44 @@
       </p:pic>
       <p:sp>
         <p:nvSpPr>
-          <p:cNvPr id="6" name="Text 3"/>
-          <p:cNvSpPr txBox="1"/>
-          <p:nvPr/>
-        </p:nvSpPr>
-        <p:spPr>
-          <a:xfrm>
-            <a:off x="640080" y="6446520"/>
-            <a:ext cx="8686800" cy="292608"/>
-          </a:xfrm>
-          <a:prstGeom prst="rect">
-            <a:avLst/>
-          </a:prstGeom>
-          <a:noFill/>
-          <a:ln/>
-        </p:spPr>
-        <p:txBody>
-          <a:bodyPr wrap="square" lIns="0" tIns="0" rIns="0" bIns="0" rtlCol="0" anchor="ctr"/>
-          <a:lstStyle/>
-          <a:p>
-            <a:pPr algn="l" indent="0" marL="0">
-              <a:buNone/>
-            </a:pPr>
-            <a:r>
-              <a:rPr lang="en-US" sz="900" dirty="0">
-                <a:solidFill>
-                  <a:srgbClr val="5D5D72"/>
-                </a:solidFill>
-                <a:latin typeface="Calibri" pitchFamily="34" charset="0"/>
-                <a:ea typeface="Calibri" pitchFamily="34" charset="-122"/>
-                <a:cs typeface="Calibri" pitchFamily="34" charset="-120"/>
-              </a:rPr>
-              <a:t>Usman Akram  •  COMSATS University Islamabad</a:t>
-            </a:r>
-            <a:endParaRPr lang="en-US" sz="900" dirty="0"/>
-          </a:p>
-        </p:txBody>
-      </p:sp>
-      <p:sp>
-        <p:nvSpPr>
-          <p:cNvPr id="7" name="Text 4"/>
-          <p:cNvSpPr txBox="1"/>
-          <p:nvPr/>
-        </p:nvSpPr>
-        <p:spPr>
-          <a:xfrm>
-            <a:off x="11155680" y="6446520"/>
-            <a:ext cx="457200" cy="292608"/>
-          </a:xfrm>
-          <a:prstGeom prst="rect">
-            <a:avLst/>
-          </a:prstGeom>
-          <a:noFill/>
-          <a:ln/>
-        </p:spPr>
-        <p:txBody>
-          <a:bodyPr wrap="square" lIns="0" tIns="0" rIns="0" bIns="0" rtlCol="0" anchor="ctr"/>
-          <a:lstStyle/>
-          <a:p>
-            <a:pPr algn="r" indent="0" marL="0">
-              <a:buNone/>
-            </a:pPr>
-            <a:r>
-              <a:rPr lang="en-US" sz="900" dirty="0">
-                <a:solidFill>
-                  <a:srgbClr val="5D5D72"/>
-                </a:solidFill>
-                <a:latin typeface="Calibri" pitchFamily="34" charset="0"/>
-                <a:ea typeface="Calibri" pitchFamily="34" charset="-122"/>
-                <a:cs typeface="Calibri" pitchFamily="34" charset="-120"/>
-              </a:rPr>
-              <a:t>17</a:t>
-            </a:r>
-            <a:endParaRPr lang="en-US" sz="900" dirty="0"/>
+          <p:cNvPr id="8" name="cuinotes-footer-mark"/>
+          <p:cNvSpPr txBox="1"/>
+          <p:nvPr/>
+        </p:nvSpPr>
+        <p:spPr>
+          <a:xfrm>
+            <a:off x="9951720" y="6455664"/>
+            <a:ext cx="2011680" cy="292608"/>
+          </a:xfrm>
+          <a:prstGeom prst="rect">
+            <a:avLst/>
+          </a:prstGeom>
+          <a:noFill/>
+        </p:spPr>
+        <p:txBody>
+          <a:bodyPr wrap="none" lIns="0" rIns="0" tIns="0" bIns="0">
+            <a:spAutoFit/>
+          </a:bodyPr>
+          <a:lstStyle/>
+          <a:p>
+            <a:pPr algn="r"/>
+            <a:r>
+              <a:rPr sz="1000">
+                <a:solidFill>
+                  <a:srgbClr val="8A939B"/>
+                </a:solidFill>
+                <a:hlinkClick r:id="rId4"/>
+              </a:rPr>
+              <a:t>cuinotes.com</a:t>
+            </a:r>
+            <a:r>
+              <a:rPr sz="1000">
+                <a:solidFill>
+                  <a:srgbClr val="8A939B"/>
+                </a:solidFill>
+              </a:rPr>
+              <a:t>  ·  17</a:t>
+            </a:r>
           </a:p>
         </p:txBody>
       </p:sp>
@@ -6126,6 +5867,10 @@
           </a:solidFill>
           <a:ln/>
         </p:spPr>
+        <p:txBody>
+          <a:bodyPr/>
+          <a:p/>
+        </p:txBody>
       </p:sp>
       <p:sp>
         <p:nvSpPr>
@@ -6185,6 +5930,10 @@
           </a:solidFill>
           <a:ln/>
         </p:spPr>
+        <p:txBody>
+          <a:bodyPr/>
+          <a:p/>
+        </p:txBody>
       </p:sp>
       <p:sp>
         <p:nvSpPr>
@@ -6244,6 +5993,10 @@
           </a:solidFill>
           <a:ln/>
         </p:spPr>
+        <p:txBody>
+          <a:bodyPr/>
+          <a:p/>
+        </p:txBody>
       </p:sp>
       <p:sp>
         <p:nvSpPr>
@@ -6286,79 +6039,44 @@
       </p:sp>
       <p:sp>
         <p:nvSpPr>
-          <p:cNvPr id="10" name="Text 8"/>
-          <p:cNvSpPr txBox="1"/>
-          <p:nvPr/>
-        </p:nvSpPr>
-        <p:spPr>
-          <a:xfrm>
-            <a:off x="640080" y="6446520"/>
-            <a:ext cx="8686800" cy="292608"/>
-          </a:xfrm>
-          <a:prstGeom prst="rect">
-            <a:avLst/>
-          </a:prstGeom>
-          <a:noFill/>
-          <a:ln/>
-        </p:spPr>
-        <p:txBody>
-          <a:bodyPr wrap="square" lIns="0" tIns="0" rIns="0" bIns="0" rtlCol="0" anchor="ctr"/>
-          <a:lstStyle/>
-          <a:p>
-            <a:pPr algn="l" indent="0" marL="0">
-              <a:buNone/>
-            </a:pPr>
-            <a:r>
-              <a:rPr lang="en-US" sz="900" dirty="0">
-                <a:solidFill>
-                  <a:srgbClr val="5D5D72"/>
-                </a:solidFill>
-                <a:latin typeface="Calibri" pitchFamily="34" charset="0"/>
-                <a:ea typeface="Calibri" pitchFamily="34" charset="-122"/>
-                <a:cs typeface="Calibri" pitchFamily="34" charset="-120"/>
-              </a:rPr>
-              <a:t>Usman Akram  •  COMSATS University Islamabad</a:t>
-            </a:r>
-            <a:endParaRPr lang="en-US" sz="900" dirty="0"/>
-          </a:p>
-        </p:txBody>
-      </p:sp>
-      <p:sp>
-        <p:nvSpPr>
-          <p:cNvPr id="11" name="Text 9"/>
-          <p:cNvSpPr txBox="1"/>
-          <p:nvPr/>
-        </p:nvSpPr>
-        <p:spPr>
-          <a:xfrm>
-            <a:off x="11155680" y="6446520"/>
-            <a:ext cx="457200" cy="292608"/>
-          </a:xfrm>
-          <a:prstGeom prst="rect">
-            <a:avLst/>
-          </a:prstGeom>
-          <a:noFill/>
-          <a:ln/>
-        </p:spPr>
-        <p:txBody>
-          <a:bodyPr wrap="square" lIns="0" tIns="0" rIns="0" bIns="0" rtlCol="0" anchor="ctr"/>
-          <a:lstStyle/>
-          <a:p>
-            <a:pPr algn="r" indent="0" marL="0">
-              <a:buNone/>
-            </a:pPr>
-            <a:r>
-              <a:rPr lang="en-US" sz="900" dirty="0">
-                <a:solidFill>
-                  <a:srgbClr val="5D5D72"/>
-                </a:solidFill>
-                <a:latin typeface="Calibri" pitchFamily="34" charset="0"/>
-                <a:ea typeface="Calibri" pitchFamily="34" charset="-122"/>
-                <a:cs typeface="Calibri" pitchFamily="34" charset="-120"/>
-              </a:rPr>
-              <a:t>18</a:t>
-            </a:r>
-            <a:endParaRPr lang="en-US" sz="900" dirty="0"/>
+          <p:cNvPr id="12" name="cuinotes-footer-mark"/>
+          <p:cNvSpPr txBox="1"/>
+          <p:nvPr/>
+        </p:nvSpPr>
+        <p:spPr>
+          <a:xfrm>
+            <a:off x="9951720" y="6455664"/>
+            <a:ext cx="2011680" cy="292608"/>
+          </a:xfrm>
+          <a:prstGeom prst="rect">
+            <a:avLst/>
+          </a:prstGeom>
+          <a:noFill/>
+        </p:spPr>
+        <p:txBody>
+          <a:bodyPr wrap="none" lIns="0" rIns="0" tIns="0" bIns="0">
+            <a:spAutoFit/>
+          </a:bodyPr>
+          <a:lstStyle/>
+          <a:p>
+            <a:pPr algn="r"/>
+            <a:r>
+              <a:rPr sz="1000">
+                <a:solidFill>
+                  <a:srgbClr val="8A939B"/>
+                </a:solidFill>
+                <a:hlinkClick r:id="rId3"/>
+              </a:rPr>
+              <a:t>cuinotes.com</a:t>
+            </a:r>
+            <a:r>
+              <a:rPr sz="1000">
+                <a:solidFill>
+                  <a:srgbClr val="8A939B"/>
+                </a:solidFill>
+              </a:rPr>
+              <a:t>  ·  18</a:t>
+            </a:r>
           </a:p>
         </p:txBody>
       </p:sp>
@@ -6493,6 +6211,10 @@
           </a:solidFill>
           <a:ln/>
         </p:spPr>
+        <p:txBody>
+          <a:bodyPr/>
+          <a:p/>
+        </p:txBody>
       </p:sp>
       <p:sp>
         <p:nvSpPr>
@@ -6647,79 +6369,44 @@
       </p:sp>
       <p:sp>
         <p:nvSpPr>
-          <p:cNvPr id="6" name="Text 4"/>
-          <p:cNvSpPr txBox="1"/>
-          <p:nvPr/>
-        </p:nvSpPr>
-        <p:spPr>
-          <a:xfrm>
-            <a:off x="640080" y="6446520"/>
-            <a:ext cx="8686800" cy="292608"/>
-          </a:xfrm>
-          <a:prstGeom prst="rect">
-            <a:avLst/>
-          </a:prstGeom>
-          <a:noFill/>
-          <a:ln/>
-        </p:spPr>
-        <p:txBody>
-          <a:bodyPr wrap="square" lIns="0" tIns="0" rIns="0" bIns="0" rtlCol="0" anchor="ctr"/>
-          <a:lstStyle/>
-          <a:p>
-            <a:pPr algn="l" indent="0" marL="0">
-              <a:buNone/>
-            </a:pPr>
-            <a:r>
-              <a:rPr lang="en-US" sz="900" dirty="0">
-                <a:solidFill>
-                  <a:srgbClr val="5D5D72"/>
-                </a:solidFill>
-                <a:latin typeface="Calibri" pitchFamily="34" charset="0"/>
-                <a:ea typeface="Calibri" pitchFamily="34" charset="-122"/>
-                <a:cs typeface="Calibri" pitchFamily="34" charset="-120"/>
-              </a:rPr>
-              <a:t>Usman Akram  •  COMSATS University Islamabad</a:t>
-            </a:r>
-            <a:endParaRPr lang="en-US" sz="900" dirty="0"/>
-          </a:p>
-        </p:txBody>
-      </p:sp>
-      <p:sp>
-        <p:nvSpPr>
-          <p:cNvPr id="7" name="Text 5"/>
-          <p:cNvSpPr txBox="1"/>
-          <p:nvPr/>
-        </p:nvSpPr>
-        <p:spPr>
-          <a:xfrm>
-            <a:off x="11155680" y="6446520"/>
-            <a:ext cx="457200" cy="292608"/>
-          </a:xfrm>
-          <a:prstGeom prst="rect">
-            <a:avLst/>
-          </a:prstGeom>
-          <a:noFill/>
-          <a:ln/>
-        </p:spPr>
-        <p:txBody>
-          <a:bodyPr wrap="square" lIns="0" tIns="0" rIns="0" bIns="0" rtlCol="0" anchor="ctr"/>
-          <a:lstStyle/>
-          <a:p>
-            <a:pPr algn="r" indent="0" marL="0">
-              <a:buNone/>
-            </a:pPr>
-            <a:r>
-              <a:rPr lang="en-US" sz="900" dirty="0">
-                <a:solidFill>
-                  <a:srgbClr val="5D5D72"/>
-                </a:solidFill>
-                <a:latin typeface="Calibri" pitchFamily="34" charset="0"/>
-                <a:ea typeface="Calibri" pitchFamily="34" charset="-122"/>
-                <a:cs typeface="Calibri" pitchFamily="34" charset="-120"/>
-              </a:rPr>
-              <a:t>19</a:t>
-            </a:r>
-            <a:endParaRPr lang="en-US" sz="900" dirty="0"/>
+          <p:cNvPr id="8" name="cuinotes-footer-mark"/>
+          <p:cNvSpPr txBox="1"/>
+          <p:nvPr/>
+        </p:nvSpPr>
+        <p:spPr>
+          <a:xfrm>
+            <a:off x="9951720" y="6455664"/>
+            <a:ext cx="2011680" cy="292608"/>
+          </a:xfrm>
+          <a:prstGeom prst="rect">
+            <a:avLst/>
+          </a:prstGeom>
+          <a:noFill/>
+        </p:spPr>
+        <p:txBody>
+          <a:bodyPr wrap="none" lIns="0" rIns="0" tIns="0" bIns="0">
+            <a:spAutoFit/>
+          </a:bodyPr>
+          <a:lstStyle/>
+          <a:p>
+            <a:pPr algn="r"/>
+            <a:r>
+              <a:rPr sz="1000">
+                <a:solidFill>
+                  <a:srgbClr val="8A939B"/>
+                </a:solidFill>
+                <a:hlinkClick r:id="rId3"/>
+              </a:rPr>
+              <a:t>cuinotes.com</a:t>
+            </a:r>
+            <a:r>
+              <a:rPr sz="1000">
+                <a:solidFill>
+                  <a:srgbClr val="8A939B"/>
+                </a:solidFill>
+              </a:rPr>
+              <a:t>  ·  19</a:t>
+            </a:r>
           </a:p>
         </p:txBody>
       </p:sp>
@@ -6852,6 +6539,10 @@
           </a:solidFill>
           <a:ln/>
         </p:spPr>
+        <p:txBody>
+          <a:bodyPr/>
+          <a:p/>
+        </p:txBody>
       </p:sp>
       <p:sp>
         <p:nvSpPr>
@@ -6950,6 +6641,10 @@
           </a:solidFill>
           <a:ln/>
         </p:spPr>
+        <p:txBody>
+          <a:bodyPr/>
+          <a:p/>
+        </p:txBody>
       </p:sp>
       <p:sp>
         <p:nvSpPr>
@@ -7048,6 +6743,10 @@
           </a:solidFill>
           <a:ln/>
         </p:spPr>
+        <p:txBody>
+          <a:bodyPr/>
+          <a:p/>
+        </p:txBody>
       </p:sp>
       <p:sp>
         <p:nvSpPr>
@@ -7146,6 +6845,10 @@
           </a:solidFill>
           <a:ln/>
         </p:spPr>
+        <p:txBody>
+          <a:bodyPr/>
+          <a:p/>
+        </p:txBody>
       </p:sp>
       <p:sp>
         <p:nvSpPr>
@@ -7244,6 +6947,10 @@
           </a:solidFill>
           <a:ln/>
         </p:spPr>
+        <p:txBody>
+          <a:bodyPr/>
+          <a:p/>
+        </p:txBody>
       </p:sp>
       <p:sp>
         <p:nvSpPr>
@@ -7342,6 +7049,10 @@
           </a:solidFill>
           <a:ln/>
         </p:spPr>
+        <p:txBody>
+          <a:bodyPr/>
+          <a:p/>
+        </p:txBody>
       </p:sp>
       <p:sp>
         <p:nvSpPr>
@@ -7423,79 +7134,44 @@
       </p:sp>
       <p:sp>
         <p:nvSpPr>
-          <p:cNvPr id="22" name="Text 20"/>
-          <p:cNvSpPr txBox="1"/>
-          <p:nvPr/>
-        </p:nvSpPr>
-        <p:spPr>
-          <a:xfrm>
-            <a:off x="640080" y="6446520"/>
-            <a:ext cx="8686800" cy="292608"/>
-          </a:xfrm>
-          <a:prstGeom prst="rect">
-            <a:avLst/>
-          </a:prstGeom>
-          <a:noFill/>
-          <a:ln/>
-        </p:spPr>
-        <p:txBody>
-          <a:bodyPr wrap="square" lIns="0" tIns="0" rIns="0" bIns="0" rtlCol="0" anchor="ctr"/>
-          <a:lstStyle/>
-          <a:p>
-            <a:pPr algn="l" indent="0" marL="0">
-              <a:buNone/>
-            </a:pPr>
-            <a:r>
-              <a:rPr lang="en-US" sz="900" dirty="0">
-                <a:solidFill>
-                  <a:srgbClr val="5D5D72"/>
-                </a:solidFill>
-                <a:latin typeface="Calibri" pitchFamily="34" charset="0"/>
-                <a:ea typeface="Calibri" pitchFamily="34" charset="-122"/>
-                <a:cs typeface="Calibri" pitchFamily="34" charset="-120"/>
-              </a:rPr>
-              <a:t>Usman Akram  •  COMSATS University Islamabad</a:t>
-            </a:r>
-            <a:endParaRPr lang="en-US" sz="900" dirty="0"/>
-          </a:p>
-        </p:txBody>
-      </p:sp>
-      <p:sp>
-        <p:nvSpPr>
-          <p:cNvPr id="23" name="Text 21"/>
-          <p:cNvSpPr txBox="1"/>
-          <p:nvPr/>
-        </p:nvSpPr>
-        <p:spPr>
-          <a:xfrm>
-            <a:off x="11155680" y="6446520"/>
-            <a:ext cx="457200" cy="292608"/>
-          </a:xfrm>
-          <a:prstGeom prst="rect">
-            <a:avLst/>
-          </a:prstGeom>
-          <a:noFill/>
-          <a:ln/>
-        </p:spPr>
-        <p:txBody>
-          <a:bodyPr wrap="square" lIns="0" tIns="0" rIns="0" bIns="0" rtlCol="0" anchor="ctr"/>
-          <a:lstStyle/>
-          <a:p>
-            <a:pPr algn="r" indent="0" marL="0">
-              <a:buNone/>
-            </a:pPr>
-            <a:r>
-              <a:rPr lang="en-US" sz="900" dirty="0">
-                <a:solidFill>
-                  <a:srgbClr val="5D5D72"/>
-                </a:solidFill>
-                <a:latin typeface="Calibri" pitchFamily="34" charset="0"/>
-                <a:ea typeface="Calibri" pitchFamily="34" charset="-122"/>
-                <a:cs typeface="Calibri" pitchFamily="34" charset="-120"/>
-              </a:rPr>
-              <a:t>2</a:t>
-            </a:r>
-            <a:endParaRPr lang="en-US" sz="900" dirty="0"/>
+          <p:cNvPr id="24" name="cuinotes-footer-mark"/>
+          <p:cNvSpPr txBox="1"/>
+          <p:nvPr/>
+        </p:nvSpPr>
+        <p:spPr>
+          <a:xfrm>
+            <a:off x="9951720" y="6455664"/>
+            <a:ext cx="2011680" cy="292608"/>
+          </a:xfrm>
+          <a:prstGeom prst="rect">
+            <a:avLst/>
+          </a:prstGeom>
+          <a:noFill/>
+        </p:spPr>
+        <p:txBody>
+          <a:bodyPr wrap="none" lIns="0" rIns="0" tIns="0" bIns="0">
+            <a:spAutoFit/>
+          </a:bodyPr>
+          <a:lstStyle/>
+          <a:p>
+            <a:pPr algn="r"/>
+            <a:r>
+              <a:rPr sz="1000">
+                <a:solidFill>
+                  <a:srgbClr val="8A939B"/>
+                </a:solidFill>
+                <a:hlinkClick r:id="rId3"/>
+              </a:rPr>
+              <a:t>cuinotes.com</a:t>
+            </a:r>
+            <a:r>
+              <a:rPr sz="1000">
+                <a:solidFill>
+                  <a:srgbClr val="8A939B"/>
+                </a:solidFill>
+              </a:rPr>
+              <a:t>  ·  2</a:t>
+            </a:r>
           </a:p>
         </p:txBody>
       </p:sp>
@@ -7630,6 +7306,10 @@
           </a:solidFill>
           <a:ln/>
         </p:spPr>
+        <p:txBody>
+          <a:bodyPr/>
+          <a:p/>
+        </p:txBody>
       </p:sp>
       <p:sp>
         <p:nvSpPr>
@@ -7904,6 +7584,10 @@
             </a:outerShdw>
           </a:effectLst>
         </p:spPr>
+        <p:txBody>
+          <a:bodyPr/>
+          <a:p/>
+        </p:txBody>
       </p:sp>
       <p:pic>
         <p:nvPicPr>
@@ -7931,79 +7615,44 @@
       </p:pic>
       <p:sp>
         <p:nvSpPr>
-          <p:cNvPr id="8" name="Text 5"/>
-          <p:cNvSpPr txBox="1"/>
-          <p:nvPr/>
-        </p:nvSpPr>
-        <p:spPr>
-          <a:xfrm>
-            <a:off x="640080" y="6446520"/>
-            <a:ext cx="8686800" cy="292608"/>
-          </a:xfrm>
-          <a:prstGeom prst="rect">
-            <a:avLst/>
-          </a:prstGeom>
-          <a:noFill/>
-          <a:ln/>
-        </p:spPr>
-        <p:txBody>
-          <a:bodyPr wrap="square" lIns="0" tIns="0" rIns="0" bIns="0" rtlCol="0" anchor="ctr"/>
-          <a:lstStyle/>
-          <a:p>
-            <a:pPr algn="l" indent="0" marL="0">
-              <a:buNone/>
-            </a:pPr>
-            <a:r>
-              <a:rPr lang="en-US" sz="900" dirty="0">
-                <a:solidFill>
-                  <a:srgbClr val="5D5D72"/>
-                </a:solidFill>
-                <a:latin typeface="Calibri" pitchFamily="34" charset="0"/>
-                <a:ea typeface="Calibri" pitchFamily="34" charset="-122"/>
-                <a:cs typeface="Calibri" pitchFamily="34" charset="-120"/>
-              </a:rPr>
-              <a:t>Usman Akram  •  COMSATS University Islamabad</a:t>
-            </a:r>
-            <a:endParaRPr lang="en-US" sz="900" dirty="0"/>
-          </a:p>
-        </p:txBody>
-      </p:sp>
-      <p:sp>
-        <p:nvSpPr>
-          <p:cNvPr id="9" name="Text 6"/>
-          <p:cNvSpPr txBox="1"/>
-          <p:nvPr/>
-        </p:nvSpPr>
-        <p:spPr>
-          <a:xfrm>
-            <a:off x="11155680" y="6446520"/>
-            <a:ext cx="457200" cy="292608"/>
-          </a:xfrm>
-          <a:prstGeom prst="rect">
-            <a:avLst/>
-          </a:prstGeom>
-          <a:noFill/>
-          <a:ln/>
-        </p:spPr>
-        <p:txBody>
-          <a:bodyPr wrap="square" lIns="0" tIns="0" rIns="0" bIns="0" rtlCol="0" anchor="ctr"/>
-          <a:lstStyle/>
-          <a:p>
-            <a:pPr algn="r" indent="0" marL="0">
-              <a:buNone/>
-            </a:pPr>
-            <a:r>
-              <a:rPr lang="en-US" sz="900" dirty="0">
-                <a:solidFill>
-                  <a:srgbClr val="5D5D72"/>
-                </a:solidFill>
-                <a:latin typeface="Calibri" pitchFamily="34" charset="0"/>
-                <a:ea typeface="Calibri" pitchFamily="34" charset="-122"/>
-                <a:cs typeface="Calibri" pitchFamily="34" charset="-120"/>
-              </a:rPr>
-              <a:t>20</a:t>
-            </a:r>
-            <a:endParaRPr lang="en-US" sz="900" dirty="0"/>
+          <p:cNvPr id="10" name="cuinotes-footer-mark"/>
+          <p:cNvSpPr txBox="1"/>
+          <p:nvPr/>
+        </p:nvSpPr>
+        <p:spPr>
+          <a:xfrm>
+            <a:off x="9951720" y="6455664"/>
+            <a:ext cx="2011680" cy="292608"/>
+          </a:xfrm>
+          <a:prstGeom prst="rect">
+            <a:avLst/>
+          </a:prstGeom>
+          <a:noFill/>
+        </p:spPr>
+        <p:txBody>
+          <a:bodyPr wrap="none" lIns="0" rIns="0" tIns="0" bIns="0">
+            <a:spAutoFit/>
+          </a:bodyPr>
+          <a:lstStyle/>
+          <a:p>
+            <a:pPr algn="r"/>
+            <a:r>
+              <a:rPr sz="1000">
+                <a:solidFill>
+                  <a:srgbClr val="8A939B"/>
+                </a:solidFill>
+                <a:hlinkClick r:id="rId4"/>
+              </a:rPr>
+              <a:t>cuinotes.com</a:t>
+            </a:r>
+            <a:r>
+              <a:rPr sz="1000">
+                <a:solidFill>
+                  <a:srgbClr val="8A939B"/>
+                </a:solidFill>
+              </a:rPr>
+              <a:t>  ·  20</a:t>
+            </a:r>
           </a:p>
         </p:txBody>
       </p:sp>
@@ -8138,6 +7787,10 @@
           </a:solidFill>
           <a:ln/>
         </p:spPr>
+        <p:txBody>
+          <a:bodyPr/>
+          <a:p/>
+        </p:txBody>
       </p:sp>
       <p:sp>
         <p:nvSpPr>
@@ -8383,6 +8036,10 @@
             </a:outerShdw>
           </a:effectLst>
         </p:spPr>
+        <p:txBody>
+          <a:bodyPr/>
+          <a:p/>
+        </p:txBody>
       </p:sp>
       <p:pic>
         <p:nvPicPr>
@@ -8410,79 +8067,44 @@
       </p:pic>
       <p:sp>
         <p:nvSpPr>
-          <p:cNvPr id="8" name="Text 5"/>
-          <p:cNvSpPr txBox="1"/>
-          <p:nvPr/>
-        </p:nvSpPr>
-        <p:spPr>
-          <a:xfrm>
-            <a:off x="640080" y="6446520"/>
-            <a:ext cx="8686800" cy="292608"/>
-          </a:xfrm>
-          <a:prstGeom prst="rect">
-            <a:avLst/>
-          </a:prstGeom>
-          <a:noFill/>
-          <a:ln/>
-        </p:spPr>
-        <p:txBody>
-          <a:bodyPr wrap="square" lIns="0" tIns="0" rIns="0" bIns="0" rtlCol="0" anchor="ctr"/>
-          <a:lstStyle/>
-          <a:p>
-            <a:pPr algn="l" indent="0" marL="0">
-              <a:buNone/>
-            </a:pPr>
-            <a:r>
-              <a:rPr lang="en-US" sz="900" dirty="0">
-                <a:solidFill>
-                  <a:srgbClr val="5D5D72"/>
-                </a:solidFill>
-                <a:latin typeface="Calibri" pitchFamily="34" charset="0"/>
-                <a:ea typeface="Calibri" pitchFamily="34" charset="-122"/>
-                <a:cs typeface="Calibri" pitchFamily="34" charset="-120"/>
-              </a:rPr>
-              <a:t>Usman Akram  •  COMSATS University Islamabad</a:t>
-            </a:r>
-            <a:endParaRPr lang="en-US" sz="900" dirty="0"/>
-          </a:p>
-        </p:txBody>
-      </p:sp>
-      <p:sp>
-        <p:nvSpPr>
-          <p:cNvPr id="9" name="Text 6"/>
-          <p:cNvSpPr txBox="1"/>
-          <p:nvPr/>
-        </p:nvSpPr>
-        <p:spPr>
-          <a:xfrm>
-            <a:off x="11155680" y="6446520"/>
-            <a:ext cx="457200" cy="292608"/>
-          </a:xfrm>
-          <a:prstGeom prst="rect">
-            <a:avLst/>
-          </a:prstGeom>
-          <a:noFill/>
-          <a:ln/>
-        </p:spPr>
-        <p:txBody>
-          <a:bodyPr wrap="square" lIns="0" tIns="0" rIns="0" bIns="0" rtlCol="0" anchor="ctr"/>
-          <a:lstStyle/>
-          <a:p>
-            <a:pPr algn="r" indent="0" marL="0">
-              <a:buNone/>
-            </a:pPr>
-            <a:r>
-              <a:rPr lang="en-US" sz="900" dirty="0">
-                <a:solidFill>
-                  <a:srgbClr val="5D5D72"/>
-                </a:solidFill>
-                <a:latin typeface="Calibri" pitchFamily="34" charset="0"/>
-                <a:ea typeface="Calibri" pitchFamily="34" charset="-122"/>
-                <a:cs typeface="Calibri" pitchFamily="34" charset="-120"/>
-              </a:rPr>
-              <a:t>21</a:t>
-            </a:r>
-            <a:endParaRPr lang="en-US" sz="900" dirty="0"/>
+          <p:cNvPr id="10" name="cuinotes-footer-mark"/>
+          <p:cNvSpPr txBox="1"/>
+          <p:nvPr/>
+        </p:nvSpPr>
+        <p:spPr>
+          <a:xfrm>
+            <a:off x="9951720" y="6455664"/>
+            <a:ext cx="2011680" cy="292608"/>
+          </a:xfrm>
+          <a:prstGeom prst="rect">
+            <a:avLst/>
+          </a:prstGeom>
+          <a:noFill/>
+        </p:spPr>
+        <p:txBody>
+          <a:bodyPr wrap="none" lIns="0" rIns="0" tIns="0" bIns="0">
+            <a:spAutoFit/>
+          </a:bodyPr>
+          <a:lstStyle/>
+          <a:p>
+            <a:pPr algn="r"/>
+            <a:r>
+              <a:rPr sz="1000">
+                <a:solidFill>
+                  <a:srgbClr val="8A939B"/>
+                </a:solidFill>
+                <a:hlinkClick r:id="rId4"/>
+              </a:rPr>
+              <a:t>cuinotes.com</a:t>
+            </a:r>
+            <a:r>
+              <a:rPr sz="1000">
+                <a:solidFill>
+                  <a:srgbClr val="8A939B"/>
+                </a:solidFill>
+              </a:rPr>
+              <a:t>  ·  21</a:t>
+            </a:r>
           </a:p>
         </p:txBody>
       </p:sp>
@@ -8615,6 +8237,10 @@
           </a:solidFill>
           <a:ln/>
         </p:spPr>
+        <p:txBody>
+          <a:bodyPr/>
+          <a:p/>
+        </p:txBody>
       </p:sp>
       <p:sp>
         <p:nvSpPr>
@@ -8674,6 +8300,10 @@
           </a:solidFill>
           <a:ln/>
         </p:spPr>
+        <p:txBody>
+          <a:bodyPr/>
+          <a:p/>
+        </p:txBody>
       </p:sp>
       <p:sp>
         <p:nvSpPr>
@@ -8733,6 +8363,10 @@
           </a:solidFill>
           <a:ln/>
         </p:spPr>
+        <p:txBody>
+          <a:bodyPr/>
+          <a:p/>
+        </p:txBody>
       </p:sp>
       <p:sp>
         <p:nvSpPr>
@@ -8775,79 +8409,44 @@
       </p:sp>
       <p:sp>
         <p:nvSpPr>
-          <p:cNvPr id="10" name="Text 8"/>
-          <p:cNvSpPr txBox="1"/>
-          <p:nvPr/>
-        </p:nvSpPr>
-        <p:spPr>
-          <a:xfrm>
-            <a:off x="640080" y="6446520"/>
-            <a:ext cx="8686800" cy="292608"/>
-          </a:xfrm>
-          <a:prstGeom prst="rect">
-            <a:avLst/>
-          </a:prstGeom>
-          <a:noFill/>
-          <a:ln/>
-        </p:spPr>
-        <p:txBody>
-          <a:bodyPr wrap="square" lIns="0" tIns="0" rIns="0" bIns="0" rtlCol="0" anchor="ctr"/>
-          <a:lstStyle/>
-          <a:p>
-            <a:pPr algn="l" indent="0" marL="0">
-              <a:buNone/>
-            </a:pPr>
-            <a:r>
-              <a:rPr lang="en-US" sz="900" dirty="0">
-                <a:solidFill>
-                  <a:srgbClr val="5D5D72"/>
-                </a:solidFill>
-                <a:latin typeface="Calibri" pitchFamily="34" charset="0"/>
-                <a:ea typeface="Calibri" pitchFamily="34" charset="-122"/>
-                <a:cs typeface="Calibri" pitchFamily="34" charset="-120"/>
-              </a:rPr>
-              <a:t>Usman Akram  •  COMSATS University Islamabad</a:t>
-            </a:r>
-            <a:endParaRPr lang="en-US" sz="900" dirty="0"/>
-          </a:p>
-        </p:txBody>
-      </p:sp>
-      <p:sp>
-        <p:nvSpPr>
-          <p:cNvPr id="11" name="Text 9"/>
-          <p:cNvSpPr txBox="1"/>
-          <p:nvPr/>
-        </p:nvSpPr>
-        <p:spPr>
-          <a:xfrm>
-            <a:off x="11155680" y="6446520"/>
-            <a:ext cx="457200" cy="292608"/>
-          </a:xfrm>
-          <a:prstGeom prst="rect">
-            <a:avLst/>
-          </a:prstGeom>
-          <a:noFill/>
-          <a:ln/>
-        </p:spPr>
-        <p:txBody>
-          <a:bodyPr wrap="square" lIns="0" tIns="0" rIns="0" bIns="0" rtlCol="0" anchor="ctr"/>
-          <a:lstStyle/>
-          <a:p>
-            <a:pPr algn="r" indent="0" marL="0">
-              <a:buNone/>
-            </a:pPr>
-            <a:r>
-              <a:rPr lang="en-US" sz="900" dirty="0">
-                <a:solidFill>
-                  <a:srgbClr val="5D5D72"/>
-                </a:solidFill>
-                <a:latin typeface="Calibri" pitchFamily="34" charset="0"/>
-                <a:ea typeface="Calibri" pitchFamily="34" charset="-122"/>
-                <a:cs typeface="Calibri" pitchFamily="34" charset="-120"/>
-              </a:rPr>
-              <a:t>22</a:t>
-            </a:r>
-            <a:endParaRPr lang="en-US" sz="900" dirty="0"/>
+          <p:cNvPr id="12" name="cuinotes-footer-mark"/>
+          <p:cNvSpPr txBox="1"/>
+          <p:nvPr/>
+        </p:nvSpPr>
+        <p:spPr>
+          <a:xfrm>
+            <a:off x="9951720" y="6455664"/>
+            <a:ext cx="2011680" cy="292608"/>
+          </a:xfrm>
+          <a:prstGeom prst="rect">
+            <a:avLst/>
+          </a:prstGeom>
+          <a:noFill/>
+        </p:spPr>
+        <p:txBody>
+          <a:bodyPr wrap="none" lIns="0" rIns="0" tIns="0" bIns="0">
+            <a:spAutoFit/>
+          </a:bodyPr>
+          <a:lstStyle/>
+          <a:p>
+            <a:pPr algn="r"/>
+            <a:r>
+              <a:rPr sz="1000">
+                <a:solidFill>
+                  <a:srgbClr val="8A939B"/>
+                </a:solidFill>
+                <a:hlinkClick r:id="rId3"/>
+              </a:rPr>
+              <a:t>cuinotes.com</a:t>
+            </a:r>
+            <a:r>
+              <a:rPr sz="1000">
+                <a:solidFill>
+                  <a:srgbClr val="8A939B"/>
+                </a:solidFill>
+              </a:rPr>
+              <a:t>  ·  22</a:t>
+            </a:r>
           </a:p>
         </p:txBody>
       </p:sp>
@@ -8980,6 +8579,10 @@
           </a:solidFill>
           <a:ln/>
         </p:spPr>
+        <p:txBody>
+          <a:bodyPr/>
+          <a:p/>
+        </p:txBody>
       </p:sp>
       <p:sp>
         <p:nvSpPr>
@@ -9078,6 +8681,10 @@
           </a:solidFill>
           <a:ln/>
         </p:spPr>
+        <p:txBody>
+          <a:bodyPr/>
+          <a:p/>
+        </p:txBody>
       </p:sp>
       <p:sp>
         <p:nvSpPr>
@@ -9176,6 +8783,10 @@
           </a:solidFill>
           <a:ln/>
         </p:spPr>
+        <p:txBody>
+          <a:bodyPr/>
+          <a:p/>
+        </p:txBody>
       </p:sp>
       <p:sp>
         <p:nvSpPr>
@@ -9274,6 +8885,10 @@
           </a:solidFill>
           <a:ln/>
         </p:spPr>
+        <p:txBody>
+          <a:bodyPr/>
+          <a:p/>
+        </p:txBody>
       </p:sp>
       <p:sp>
         <p:nvSpPr>
@@ -9372,6 +8987,10 @@
           </a:solidFill>
           <a:ln/>
         </p:spPr>
+        <p:txBody>
+          <a:bodyPr/>
+          <a:p/>
+        </p:txBody>
       </p:sp>
       <p:sp>
         <p:nvSpPr>
@@ -9470,6 +9089,10 @@
           </a:solidFill>
           <a:ln/>
         </p:spPr>
+        <p:txBody>
+          <a:bodyPr/>
+          <a:p/>
+        </p:txBody>
       </p:sp>
       <p:sp>
         <p:nvSpPr>
@@ -9551,79 +9174,44 @@
       </p:sp>
       <p:sp>
         <p:nvSpPr>
-          <p:cNvPr id="22" name="Text 20"/>
-          <p:cNvSpPr txBox="1"/>
-          <p:nvPr/>
-        </p:nvSpPr>
-        <p:spPr>
-          <a:xfrm>
-            <a:off x="640080" y="6446520"/>
-            <a:ext cx="8686800" cy="292608"/>
-          </a:xfrm>
-          <a:prstGeom prst="rect">
-            <a:avLst/>
-          </a:prstGeom>
-          <a:noFill/>
-          <a:ln/>
-        </p:spPr>
-        <p:txBody>
-          <a:bodyPr wrap="square" lIns="0" tIns="0" rIns="0" bIns="0" rtlCol="0" anchor="ctr"/>
-          <a:lstStyle/>
-          <a:p>
-            <a:pPr algn="l" indent="0" marL="0">
-              <a:buNone/>
-            </a:pPr>
-            <a:r>
-              <a:rPr lang="en-US" sz="900" dirty="0">
-                <a:solidFill>
-                  <a:srgbClr val="9AA3D8"/>
-                </a:solidFill>
-                <a:latin typeface="Calibri" pitchFamily="34" charset="0"/>
-                <a:ea typeface="Calibri" pitchFamily="34" charset="-122"/>
-                <a:cs typeface="Calibri" pitchFamily="34" charset="-120"/>
-              </a:rPr>
-              <a:t>Usman Akram  •  COMSATS University Islamabad</a:t>
-            </a:r>
-            <a:endParaRPr lang="en-US" sz="900" dirty="0"/>
-          </a:p>
-        </p:txBody>
-      </p:sp>
-      <p:sp>
-        <p:nvSpPr>
-          <p:cNvPr id="23" name="Text 21"/>
-          <p:cNvSpPr txBox="1"/>
-          <p:nvPr/>
-        </p:nvSpPr>
-        <p:spPr>
-          <a:xfrm>
-            <a:off x="11155680" y="6446520"/>
-            <a:ext cx="457200" cy="292608"/>
-          </a:xfrm>
-          <a:prstGeom prst="rect">
-            <a:avLst/>
-          </a:prstGeom>
-          <a:noFill/>
-          <a:ln/>
-        </p:spPr>
-        <p:txBody>
-          <a:bodyPr wrap="square" lIns="0" tIns="0" rIns="0" bIns="0" rtlCol="0" anchor="ctr"/>
-          <a:lstStyle/>
-          <a:p>
-            <a:pPr algn="r" indent="0" marL="0">
-              <a:buNone/>
-            </a:pPr>
-            <a:r>
-              <a:rPr lang="en-US" sz="900" dirty="0">
-                <a:solidFill>
-                  <a:srgbClr val="9AA3D8"/>
-                </a:solidFill>
-                <a:latin typeface="Calibri" pitchFamily="34" charset="0"/>
-                <a:ea typeface="Calibri" pitchFamily="34" charset="-122"/>
-                <a:cs typeface="Calibri" pitchFamily="34" charset="-120"/>
-              </a:rPr>
-              <a:t>23</a:t>
-            </a:r>
-            <a:endParaRPr lang="en-US" sz="900" dirty="0"/>
+          <p:cNvPr id="24" name="cuinotes-footer-mark"/>
+          <p:cNvSpPr txBox="1"/>
+          <p:nvPr/>
+        </p:nvSpPr>
+        <p:spPr>
+          <a:xfrm>
+            <a:off x="9951720" y="6455664"/>
+            <a:ext cx="2011680" cy="292608"/>
+          </a:xfrm>
+          <a:prstGeom prst="rect">
+            <a:avLst/>
+          </a:prstGeom>
+          <a:noFill/>
+        </p:spPr>
+        <p:txBody>
+          <a:bodyPr wrap="none" lIns="0" rIns="0" tIns="0" bIns="0">
+            <a:spAutoFit/>
+          </a:bodyPr>
+          <a:lstStyle/>
+          <a:p>
+            <a:pPr algn="r"/>
+            <a:r>
+              <a:rPr sz="1000">
+                <a:solidFill>
+                  <a:srgbClr val="8A939B"/>
+                </a:solidFill>
+                <a:hlinkClick r:id="rId3"/>
+              </a:rPr>
+              <a:t>cuinotes.com</a:t>
+            </a:r>
+            <a:r>
+              <a:rPr sz="1000">
+                <a:solidFill>
+                  <a:srgbClr val="8A939B"/>
+                </a:solidFill>
+              </a:rPr>
+              <a:t>  ·  23</a:t>
+            </a:r>
           </a:p>
         </p:txBody>
       </p:sp>
@@ -9756,6 +9344,10 @@
           </a:solidFill>
           <a:ln/>
         </p:spPr>
+        <p:txBody>
+          <a:bodyPr/>
+          <a:p/>
+        </p:txBody>
       </p:sp>
       <p:sp>
         <p:nvSpPr>
@@ -9854,6 +9446,10 @@
           </a:solidFill>
           <a:ln/>
         </p:spPr>
+        <p:txBody>
+          <a:bodyPr/>
+          <a:p/>
+        </p:txBody>
       </p:sp>
       <p:sp>
         <p:nvSpPr>
@@ -9952,6 +9548,10 @@
           </a:solidFill>
           <a:ln/>
         </p:spPr>
+        <p:txBody>
+          <a:bodyPr/>
+          <a:p/>
+        </p:txBody>
       </p:sp>
       <p:sp>
         <p:nvSpPr>
@@ -10050,6 +9650,10 @@
           </a:solidFill>
           <a:ln/>
         </p:spPr>
+        <p:txBody>
+          <a:bodyPr/>
+          <a:p/>
+        </p:txBody>
       </p:sp>
       <p:sp>
         <p:nvSpPr>
@@ -10131,79 +9735,44 @@
       </p:sp>
       <p:sp>
         <p:nvSpPr>
-          <p:cNvPr id="16" name="Text 14"/>
-          <p:cNvSpPr txBox="1"/>
-          <p:nvPr/>
-        </p:nvSpPr>
-        <p:spPr>
-          <a:xfrm>
-            <a:off x="640080" y="6446520"/>
-            <a:ext cx="8686800" cy="292608"/>
-          </a:xfrm>
-          <a:prstGeom prst="rect">
-            <a:avLst/>
-          </a:prstGeom>
-          <a:noFill/>
-          <a:ln/>
-        </p:spPr>
-        <p:txBody>
-          <a:bodyPr wrap="square" lIns="0" tIns="0" rIns="0" bIns="0" rtlCol="0" anchor="ctr"/>
-          <a:lstStyle/>
-          <a:p>
-            <a:pPr algn="l" indent="0" marL="0">
-              <a:buNone/>
-            </a:pPr>
-            <a:r>
-              <a:rPr lang="en-US" sz="900" dirty="0">
-                <a:solidFill>
-                  <a:srgbClr val="5D5D72"/>
-                </a:solidFill>
-                <a:latin typeface="Calibri" pitchFamily="34" charset="0"/>
-                <a:ea typeface="Calibri" pitchFamily="34" charset="-122"/>
-                <a:cs typeface="Calibri" pitchFamily="34" charset="-120"/>
-              </a:rPr>
-              <a:t>Usman Akram  •  COMSATS University Islamabad</a:t>
-            </a:r>
-            <a:endParaRPr lang="en-US" sz="900" dirty="0"/>
-          </a:p>
-        </p:txBody>
-      </p:sp>
-      <p:sp>
-        <p:nvSpPr>
-          <p:cNvPr id="17" name="Text 15"/>
-          <p:cNvSpPr txBox="1"/>
-          <p:nvPr/>
-        </p:nvSpPr>
-        <p:spPr>
-          <a:xfrm>
-            <a:off x="11155680" y="6446520"/>
-            <a:ext cx="457200" cy="292608"/>
-          </a:xfrm>
-          <a:prstGeom prst="rect">
-            <a:avLst/>
-          </a:prstGeom>
-          <a:noFill/>
-          <a:ln/>
-        </p:spPr>
-        <p:txBody>
-          <a:bodyPr wrap="square" lIns="0" tIns="0" rIns="0" bIns="0" rtlCol="0" anchor="ctr"/>
-          <a:lstStyle/>
-          <a:p>
-            <a:pPr algn="r" indent="0" marL="0">
-              <a:buNone/>
-            </a:pPr>
-            <a:r>
-              <a:rPr lang="en-US" sz="900" dirty="0">
-                <a:solidFill>
-                  <a:srgbClr val="5D5D72"/>
-                </a:solidFill>
-                <a:latin typeface="Calibri" pitchFamily="34" charset="0"/>
-                <a:ea typeface="Calibri" pitchFamily="34" charset="-122"/>
-                <a:cs typeface="Calibri" pitchFamily="34" charset="-120"/>
-              </a:rPr>
-              <a:t>3</a:t>
-            </a:r>
-            <a:endParaRPr lang="en-US" sz="900" dirty="0"/>
+          <p:cNvPr id="18" name="cuinotes-footer-mark"/>
+          <p:cNvSpPr txBox="1"/>
+          <p:nvPr/>
+        </p:nvSpPr>
+        <p:spPr>
+          <a:xfrm>
+            <a:off x="9951720" y="6455664"/>
+            <a:ext cx="2011680" cy="292608"/>
+          </a:xfrm>
+          <a:prstGeom prst="rect">
+            <a:avLst/>
+          </a:prstGeom>
+          <a:noFill/>
+        </p:spPr>
+        <p:txBody>
+          <a:bodyPr wrap="none" lIns="0" rIns="0" tIns="0" bIns="0">
+            <a:spAutoFit/>
+          </a:bodyPr>
+          <a:lstStyle/>
+          <a:p>
+            <a:pPr algn="r"/>
+            <a:r>
+              <a:rPr sz="1000">
+                <a:solidFill>
+                  <a:srgbClr val="8A939B"/>
+                </a:solidFill>
+                <a:hlinkClick r:id="rId3"/>
+              </a:rPr>
+              <a:t>cuinotes.com</a:t>
+            </a:r>
+            <a:r>
+              <a:rPr sz="1000">
+                <a:solidFill>
+                  <a:srgbClr val="8A939B"/>
+                </a:solidFill>
+              </a:rPr>
+              <a:t>  ·  3</a:t>
+            </a:r>
           </a:p>
         </p:txBody>
       </p:sp>
@@ -10338,6 +9907,10 @@
           </a:solidFill>
           <a:ln/>
         </p:spPr>
+        <p:txBody>
+          <a:bodyPr/>
+          <a:p/>
+        </p:txBody>
       </p:sp>
       <p:sp>
         <p:nvSpPr>
@@ -10474,6 +10047,10 @@
             </a:outerShdw>
           </a:effectLst>
         </p:spPr>
+        <p:txBody>
+          <a:bodyPr/>
+          <a:p/>
+        </p:txBody>
       </p:sp>
       <p:pic>
         <p:nvPicPr>
@@ -10501,79 +10078,44 @@
       </p:pic>
       <p:sp>
         <p:nvSpPr>
-          <p:cNvPr id="8" name="Text 5"/>
-          <p:cNvSpPr txBox="1"/>
-          <p:nvPr/>
-        </p:nvSpPr>
-        <p:spPr>
-          <a:xfrm>
-            <a:off x="640080" y="6446520"/>
-            <a:ext cx="8686800" cy="292608"/>
-          </a:xfrm>
-          <a:prstGeom prst="rect">
-            <a:avLst/>
-          </a:prstGeom>
-          <a:noFill/>
-          <a:ln/>
-        </p:spPr>
-        <p:txBody>
-          <a:bodyPr wrap="square" lIns="0" tIns="0" rIns="0" bIns="0" rtlCol="0" anchor="ctr"/>
-          <a:lstStyle/>
-          <a:p>
-            <a:pPr algn="l" indent="0" marL="0">
-              <a:buNone/>
-            </a:pPr>
-            <a:r>
-              <a:rPr lang="en-US" sz="900" dirty="0">
-                <a:solidFill>
-                  <a:srgbClr val="5D5D72"/>
-                </a:solidFill>
-                <a:latin typeface="Calibri" pitchFamily="34" charset="0"/>
-                <a:ea typeface="Calibri" pitchFamily="34" charset="-122"/>
-                <a:cs typeface="Calibri" pitchFamily="34" charset="-120"/>
-              </a:rPr>
-              <a:t>Usman Akram  •  COMSATS University Islamabad</a:t>
-            </a:r>
-            <a:endParaRPr lang="en-US" sz="900" dirty="0"/>
-          </a:p>
-        </p:txBody>
-      </p:sp>
-      <p:sp>
-        <p:nvSpPr>
-          <p:cNvPr id="9" name="Text 6"/>
-          <p:cNvSpPr txBox="1"/>
-          <p:nvPr/>
-        </p:nvSpPr>
-        <p:spPr>
-          <a:xfrm>
-            <a:off x="11155680" y="6446520"/>
-            <a:ext cx="457200" cy="292608"/>
-          </a:xfrm>
-          <a:prstGeom prst="rect">
-            <a:avLst/>
-          </a:prstGeom>
-          <a:noFill/>
-          <a:ln/>
-        </p:spPr>
-        <p:txBody>
-          <a:bodyPr wrap="square" lIns="0" tIns="0" rIns="0" bIns="0" rtlCol="0" anchor="ctr"/>
-          <a:lstStyle/>
-          <a:p>
-            <a:pPr algn="r" indent="0" marL="0">
-              <a:buNone/>
-            </a:pPr>
-            <a:r>
-              <a:rPr lang="en-US" sz="900" dirty="0">
-                <a:solidFill>
-                  <a:srgbClr val="5D5D72"/>
-                </a:solidFill>
-                <a:latin typeface="Calibri" pitchFamily="34" charset="0"/>
-                <a:ea typeface="Calibri" pitchFamily="34" charset="-122"/>
-                <a:cs typeface="Calibri" pitchFamily="34" charset="-120"/>
-              </a:rPr>
-              <a:t>4</a:t>
-            </a:r>
-            <a:endParaRPr lang="en-US" sz="900" dirty="0"/>
+          <p:cNvPr id="10" name="cuinotes-footer-mark"/>
+          <p:cNvSpPr txBox="1"/>
+          <p:nvPr/>
+        </p:nvSpPr>
+        <p:spPr>
+          <a:xfrm>
+            <a:off x="9951720" y="6455664"/>
+            <a:ext cx="2011680" cy="292608"/>
+          </a:xfrm>
+          <a:prstGeom prst="rect">
+            <a:avLst/>
+          </a:prstGeom>
+          <a:noFill/>
+        </p:spPr>
+        <p:txBody>
+          <a:bodyPr wrap="none" lIns="0" rIns="0" tIns="0" bIns="0">
+            <a:spAutoFit/>
+          </a:bodyPr>
+          <a:lstStyle/>
+          <a:p>
+            <a:pPr algn="r"/>
+            <a:r>
+              <a:rPr sz="1000">
+                <a:solidFill>
+                  <a:srgbClr val="8A939B"/>
+                </a:solidFill>
+                <a:hlinkClick r:id="rId4"/>
+              </a:rPr>
+              <a:t>cuinotes.com</a:t>
+            </a:r>
+            <a:r>
+              <a:rPr sz="1000">
+                <a:solidFill>
+                  <a:srgbClr val="8A939B"/>
+                </a:solidFill>
+              </a:rPr>
+              <a:t>  ·  4</a:t>
+            </a:r>
           </a:p>
         </p:txBody>
       </p:sp>
@@ -10708,6 +10250,10 @@
           </a:solidFill>
           <a:ln/>
         </p:spPr>
+        <p:txBody>
+          <a:bodyPr/>
+          <a:p/>
+        </p:txBody>
       </p:sp>
       <p:sp>
         <p:nvSpPr>
@@ -10812,79 +10358,44 @@
       </p:sp>
       <p:sp>
         <p:nvSpPr>
-          <p:cNvPr id="7" name="Text 5"/>
-          <p:cNvSpPr txBox="1"/>
-          <p:nvPr/>
-        </p:nvSpPr>
-        <p:spPr>
-          <a:xfrm>
-            <a:off x="640080" y="6446520"/>
-            <a:ext cx="8686800" cy="292608"/>
-          </a:xfrm>
-          <a:prstGeom prst="rect">
-            <a:avLst/>
-          </a:prstGeom>
-          <a:noFill/>
-          <a:ln/>
-        </p:spPr>
-        <p:txBody>
-          <a:bodyPr wrap="square" lIns="0" tIns="0" rIns="0" bIns="0" rtlCol="0" anchor="ctr"/>
-          <a:lstStyle/>
-          <a:p>
-            <a:pPr algn="l" indent="0" marL="0">
-              <a:buNone/>
-            </a:pPr>
-            <a:r>
-              <a:rPr lang="en-US" sz="900" dirty="0">
-                <a:solidFill>
-                  <a:srgbClr val="5D5D72"/>
-                </a:solidFill>
-                <a:latin typeface="Calibri" pitchFamily="34" charset="0"/>
-                <a:ea typeface="Calibri" pitchFamily="34" charset="-122"/>
-                <a:cs typeface="Calibri" pitchFamily="34" charset="-120"/>
-              </a:rPr>
-              <a:t>Usman Akram  •  COMSATS University Islamabad</a:t>
-            </a:r>
-            <a:endParaRPr lang="en-US" sz="900" dirty="0"/>
-          </a:p>
-        </p:txBody>
-      </p:sp>
-      <p:sp>
-        <p:nvSpPr>
-          <p:cNvPr id="8" name="Text 6"/>
-          <p:cNvSpPr txBox="1"/>
-          <p:nvPr/>
-        </p:nvSpPr>
-        <p:spPr>
-          <a:xfrm>
-            <a:off x="11155680" y="6446520"/>
-            <a:ext cx="457200" cy="292608"/>
-          </a:xfrm>
-          <a:prstGeom prst="rect">
-            <a:avLst/>
-          </a:prstGeom>
-          <a:noFill/>
-          <a:ln/>
-        </p:spPr>
-        <p:txBody>
-          <a:bodyPr wrap="square" lIns="0" tIns="0" rIns="0" bIns="0" rtlCol="0" anchor="ctr"/>
-          <a:lstStyle/>
-          <a:p>
-            <a:pPr algn="r" indent="0" marL="0">
-              <a:buNone/>
-            </a:pPr>
-            <a:r>
-              <a:rPr lang="en-US" sz="900" dirty="0">
-                <a:solidFill>
-                  <a:srgbClr val="5D5D72"/>
-                </a:solidFill>
-                <a:latin typeface="Calibri" pitchFamily="34" charset="0"/>
-                <a:ea typeface="Calibri" pitchFamily="34" charset="-122"/>
-                <a:cs typeface="Calibri" pitchFamily="34" charset="-120"/>
-              </a:rPr>
-              <a:t>5</a:t>
-            </a:r>
-            <a:endParaRPr lang="en-US" sz="900" dirty="0"/>
+          <p:cNvPr id="9" name="cuinotes-footer-mark"/>
+          <p:cNvSpPr txBox="1"/>
+          <p:nvPr/>
+        </p:nvSpPr>
+        <p:spPr>
+          <a:xfrm>
+            <a:off x="9951720" y="6455664"/>
+            <a:ext cx="2011680" cy="292608"/>
+          </a:xfrm>
+          <a:prstGeom prst="rect">
+            <a:avLst/>
+          </a:prstGeom>
+          <a:noFill/>
+        </p:spPr>
+        <p:txBody>
+          <a:bodyPr wrap="none" lIns="0" rIns="0" tIns="0" bIns="0">
+            <a:spAutoFit/>
+          </a:bodyPr>
+          <a:lstStyle/>
+          <a:p>
+            <a:pPr algn="r"/>
+            <a:r>
+              <a:rPr sz="1000">
+                <a:solidFill>
+                  <a:srgbClr val="8A939B"/>
+                </a:solidFill>
+                <a:hlinkClick r:id="rId3"/>
+              </a:rPr>
+              <a:t>cuinotes.com</a:t>
+            </a:r>
+            <a:r>
+              <a:rPr sz="1000">
+                <a:solidFill>
+                  <a:srgbClr val="8A939B"/>
+                </a:solidFill>
+              </a:rPr>
+              <a:t>  ·  5</a:t>
+            </a:r>
           </a:p>
         </p:txBody>
       </p:sp>
@@ -11031,6 +10542,10 @@
             </a:outerShdw>
           </a:effectLst>
         </p:spPr>
+        <p:txBody>
+          <a:bodyPr/>
+          <a:p/>
+        </p:txBody>
       </p:sp>
       <p:pic>
         <p:nvPicPr>
@@ -11058,79 +10573,44 @@
       </p:pic>
       <p:sp>
         <p:nvSpPr>
-          <p:cNvPr id="6" name="Text 3"/>
-          <p:cNvSpPr txBox="1"/>
-          <p:nvPr/>
-        </p:nvSpPr>
-        <p:spPr>
-          <a:xfrm>
-            <a:off x="640080" y="6446520"/>
-            <a:ext cx="8686800" cy="292608"/>
-          </a:xfrm>
-          <a:prstGeom prst="rect">
-            <a:avLst/>
-          </a:prstGeom>
-          <a:noFill/>
-          <a:ln/>
-        </p:spPr>
-        <p:txBody>
-          <a:bodyPr wrap="square" lIns="0" tIns="0" rIns="0" bIns="0" rtlCol="0" anchor="ctr"/>
-          <a:lstStyle/>
-          <a:p>
-            <a:pPr algn="l" indent="0" marL="0">
-              <a:buNone/>
-            </a:pPr>
-            <a:r>
-              <a:rPr lang="en-US" sz="900" dirty="0">
-                <a:solidFill>
-                  <a:srgbClr val="5D5D72"/>
-                </a:solidFill>
-                <a:latin typeface="Calibri" pitchFamily="34" charset="0"/>
-                <a:ea typeface="Calibri" pitchFamily="34" charset="-122"/>
-                <a:cs typeface="Calibri" pitchFamily="34" charset="-120"/>
-              </a:rPr>
-              <a:t>Usman Akram  •  COMSATS University Islamabad</a:t>
-            </a:r>
-            <a:endParaRPr lang="en-US" sz="900" dirty="0"/>
-          </a:p>
-        </p:txBody>
-      </p:sp>
-      <p:sp>
-        <p:nvSpPr>
-          <p:cNvPr id="7" name="Text 4"/>
-          <p:cNvSpPr txBox="1"/>
-          <p:nvPr/>
-        </p:nvSpPr>
-        <p:spPr>
-          <a:xfrm>
-            <a:off x="11155680" y="6446520"/>
-            <a:ext cx="457200" cy="292608"/>
-          </a:xfrm>
-          <a:prstGeom prst="rect">
-            <a:avLst/>
-          </a:prstGeom>
-          <a:noFill/>
-          <a:ln/>
-        </p:spPr>
-        <p:txBody>
-          <a:bodyPr wrap="square" lIns="0" tIns="0" rIns="0" bIns="0" rtlCol="0" anchor="ctr"/>
-          <a:lstStyle/>
-          <a:p>
-            <a:pPr algn="r" indent="0" marL="0">
-              <a:buNone/>
-            </a:pPr>
-            <a:r>
-              <a:rPr lang="en-US" sz="900" dirty="0">
-                <a:solidFill>
-                  <a:srgbClr val="5D5D72"/>
-                </a:solidFill>
-                <a:latin typeface="Calibri" pitchFamily="34" charset="0"/>
-                <a:ea typeface="Calibri" pitchFamily="34" charset="-122"/>
-                <a:cs typeface="Calibri" pitchFamily="34" charset="-120"/>
-              </a:rPr>
-              <a:t>6</a:t>
-            </a:r>
-            <a:endParaRPr lang="en-US" sz="900" dirty="0"/>
+          <p:cNvPr id="8" name="cuinotes-footer-mark"/>
+          <p:cNvSpPr txBox="1"/>
+          <p:nvPr/>
+        </p:nvSpPr>
+        <p:spPr>
+          <a:xfrm>
+            <a:off x="9951720" y="6455664"/>
+            <a:ext cx="2011680" cy="292608"/>
+          </a:xfrm>
+          <a:prstGeom prst="rect">
+            <a:avLst/>
+          </a:prstGeom>
+          <a:noFill/>
+        </p:spPr>
+        <p:txBody>
+          <a:bodyPr wrap="none" lIns="0" rIns="0" tIns="0" bIns="0">
+            <a:spAutoFit/>
+          </a:bodyPr>
+          <a:lstStyle/>
+          <a:p>
+            <a:pPr algn="r"/>
+            <a:r>
+              <a:rPr sz="1000">
+                <a:solidFill>
+                  <a:srgbClr val="8A939B"/>
+                </a:solidFill>
+                <a:hlinkClick r:id="rId4"/>
+              </a:rPr>
+              <a:t>cuinotes.com</a:t>
+            </a:r>
+            <a:r>
+              <a:rPr sz="1000">
+                <a:solidFill>
+                  <a:srgbClr val="8A939B"/>
+                </a:solidFill>
+              </a:rPr>
+              <a:t>  ·  6</a:t>
+            </a:r>
           </a:p>
         </p:txBody>
       </p:sp>
@@ -11270,6 +10750,10 @@
             <a:prstDash val="solid"/>
           </a:ln>
         </p:spPr>
+        <p:txBody>
+          <a:bodyPr/>
+          <a:p/>
+        </p:txBody>
       </p:sp>
       <p:sp>
         <p:nvSpPr>
@@ -11351,79 +10835,44 @@
       </p:sp>
       <p:sp>
         <p:nvSpPr>
-          <p:cNvPr id="7" name="Text 5"/>
-          <p:cNvSpPr txBox="1"/>
-          <p:nvPr/>
-        </p:nvSpPr>
-        <p:spPr>
-          <a:xfrm>
-            <a:off x="640080" y="6446520"/>
-            <a:ext cx="8686800" cy="292608"/>
-          </a:xfrm>
-          <a:prstGeom prst="rect">
-            <a:avLst/>
-          </a:prstGeom>
-          <a:noFill/>
-          <a:ln/>
-        </p:spPr>
-        <p:txBody>
-          <a:bodyPr wrap="square" lIns="0" tIns="0" rIns="0" bIns="0" rtlCol="0" anchor="ctr"/>
-          <a:lstStyle/>
-          <a:p>
-            <a:pPr algn="l" indent="0" marL="0">
-              <a:buNone/>
-            </a:pPr>
-            <a:r>
-              <a:rPr lang="en-US" sz="900" dirty="0">
-                <a:solidFill>
-                  <a:srgbClr val="5D5D72"/>
-                </a:solidFill>
-                <a:latin typeface="Calibri" pitchFamily="34" charset="0"/>
-                <a:ea typeface="Calibri" pitchFamily="34" charset="-122"/>
-                <a:cs typeface="Calibri" pitchFamily="34" charset="-120"/>
-              </a:rPr>
-              <a:t>Usman Akram  •  COMSATS University Islamabad</a:t>
-            </a:r>
-            <a:endParaRPr lang="en-US" sz="900" dirty="0"/>
-          </a:p>
-        </p:txBody>
-      </p:sp>
-      <p:sp>
-        <p:nvSpPr>
-          <p:cNvPr id="8" name="Text 6"/>
-          <p:cNvSpPr txBox="1"/>
-          <p:nvPr/>
-        </p:nvSpPr>
-        <p:spPr>
-          <a:xfrm>
-            <a:off x="11155680" y="6446520"/>
-            <a:ext cx="457200" cy="292608"/>
-          </a:xfrm>
-          <a:prstGeom prst="rect">
-            <a:avLst/>
-          </a:prstGeom>
-          <a:noFill/>
-          <a:ln/>
-        </p:spPr>
-        <p:txBody>
-          <a:bodyPr wrap="square" lIns="0" tIns="0" rIns="0" bIns="0" rtlCol="0" anchor="ctr"/>
-          <a:lstStyle/>
-          <a:p>
-            <a:pPr algn="r" indent="0" marL="0">
-              <a:buNone/>
-            </a:pPr>
-            <a:r>
-              <a:rPr lang="en-US" sz="900" dirty="0">
-                <a:solidFill>
-                  <a:srgbClr val="5D5D72"/>
-                </a:solidFill>
-                <a:latin typeface="Calibri" pitchFamily="34" charset="0"/>
-                <a:ea typeface="Calibri" pitchFamily="34" charset="-122"/>
-                <a:cs typeface="Calibri" pitchFamily="34" charset="-120"/>
-              </a:rPr>
-              <a:t>7</a:t>
-            </a:r>
-            <a:endParaRPr lang="en-US" sz="900" dirty="0"/>
+          <p:cNvPr id="9" name="cuinotes-footer-mark"/>
+          <p:cNvSpPr txBox="1"/>
+          <p:nvPr/>
+        </p:nvSpPr>
+        <p:spPr>
+          <a:xfrm>
+            <a:off x="9951720" y="6455664"/>
+            <a:ext cx="2011680" cy="292608"/>
+          </a:xfrm>
+          <a:prstGeom prst="rect">
+            <a:avLst/>
+          </a:prstGeom>
+          <a:noFill/>
+        </p:spPr>
+        <p:txBody>
+          <a:bodyPr wrap="none" lIns="0" rIns="0" tIns="0" bIns="0">
+            <a:spAutoFit/>
+          </a:bodyPr>
+          <a:lstStyle/>
+          <a:p>
+            <a:pPr algn="r"/>
+            <a:r>
+              <a:rPr sz="1000">
+                <a:solidFill>
+                  <a:srgbClr val="8A939B"/>
+                </a:solidFill>
+                <a:hlinkClick r:id="rId3"/>
+              </a:rPr>
+              <a:t>cuinotes.com</a:t>
+            </a:r>
+            <a:r>
+              <a:rPr sz="1000">
+                <a:solidFill>
+                  <a:srgbClr val="8A939B"/>
+                </a:solidFill>
+              </a:rPr>
+              <a:t>  ·  7</a:t>
+            </a:r>
           </a:p>
         </p:txBody>
       </p:sp>
@@ -11558,6 +11007,10 @@
           </a:solidFill>
           <a:ln/>
         </p:spPr>
+        <p:txBody>
+          <a:bodyPr/>
+          <a:p/>
+        </p:txBody>
       </p:sp>
       <p:sp>
         <p:nvSpPr>
@@ -11712,79 +11165,44 @@
       </p:sp>
       <p:sp>
         <p:nvSpPr>
-          <p:cNvPr id="6" name="Text 4"/>
-          <p:cNvSpPr txBox="1"/>
-          <p:nvPr/>
-        </p:nvSpPr>
-        <p:spPr>
-          <a:xfrm>
-            <a:off x="640080" y="6446520"/>
-            <a:ext cx="8686800" cy="292608"/>
-          </a:xfrm>
-          <a:prstGeom prst="rect">
-            <a:avLst/>
-          </a:prstGeom>
-          <a:noFill/>
-          <a:ln/>
-        </p:spPr>
-        <p:txBody>
-          <a:bodyPr wrap="square" lIns="0" tIns="0" rIns="0" bIns="0" rtlCol="0" anchor="ctr"/>
-          <a:lstStyle/>
-          <a:p>
-            <a:pPr algn="l" indent="0" marL="0">
-              <a:buNone/>
-            </a:pPr>
-            <a:r>
-              <a:rPr lang="en-US" sz="900" dirty="0">
-                <a:solidFill>
-                  <a:srgbClr val="5D5D72"/>
-                </a:solidFill>
-                <a:latin typeface="Calibri" pitchFamily="34" charset="0"/>
-                <a:ea typeface="Calibri" pitchFamily="34" charset="-122"/>
-                <a:cs typeface="Calibri" pitchFamily="34" charset="-120"/>
-              </a:rPr>
-              <a:t>Usman Akram  •  COMSATS University Islamabad</a:t>
-            </a:r>
-            <a:endParaRPr lang="en-US" sz="900" dirty="0"/>
-          </a:p>
-        </p:txBody>
-      </p:sp>
-      <p:sp>
-        <p:nvSpPr>
-          <p:cNvPr id="7" name="Text 5"/>
-          <p:cNvSpPr txBox="1"/>
-          <p:nvPr/>
-        </p:nvSpPr>
-        <p:spPr>
-          <a:xfrm>
-            <a:off x="11155680" y="6446520"/>
-            <a:ext cx="457200" cy="292608"/>
-          </a:xfrm>
-          <a:prstGeom prst="rect">
-            <a:avLst/>
-          </a:prstGeom>
-          <a:noFill/>
-          <a:ln/>
-        </p:spPr>
-        <p:txBody>
-          <a:bodyPr wrap="square" lIns="0" tIns="0" rIns="0" bIns="0" rtlCol="0" anchor="ctr"/>
-          <a:lstStyle/>
-          <a:p>
-            <a:pPr algn="r" indent="0" marL="0">
-              <a:buNone/>
-            </a:pPr>
-            <a:r>
-              <a:rPr lang="en-US" sz="900" dirty="0">
-                <a:solidFill>
-                  <a:srgbClr val="5D5D72"/>
-                </a:solidFill>
-                <a:latin typeface="Calibri" pitchFamily="34" charset="0"/>
-                <a:ea typeface="Calibri" pitchFamily="34" charset="-122"/>
-                <a:cs typeface="Calibri" pitchFamily="34" charset="-120"/>
-              </a:rPr>
-              <a:t>8</a:t>
-            </a:r>
-            <a:endParaRPr lang="en-US" sz="900" dirty="0"/>
+          <p:cNvPr id="8" name="cuinotes-footer-mark"/>
+          <p:cNvSpPr txBox="1"/>
+          <p:nvPr/>
+        </p:nvSpPr>
+        <p:spPr>
+          <a:xfrm>
+            <a:off x="9951720" y="6455664"/>
+            <a:ext cx="2011680" cy="292608"/>
+          </a:xfrm>
+          <a:prstGeom prst="rect">
+            <a:avLst/>
+          </a:prstGeom>
+          <a:noFill/>
+        </p:spPr>
+        <p:txBody>
+          <a:bodyPr wrap="none" lIns="0" rIns="0" tIns="0" bIns="0">
+            <a:spAutoFit/>
+          </a:bodyPr>
+          <a:lstStyle/>
+          <a:p>
+            <a:pPr algn="r"/>
+            <a:r>
+              <a:rPr sz="1000">
+                <a:solidFill>
+                  <a:srgbClr val="8A939B"/>
+                </a:solidFill>
+                <a:hlinkClick r:id="rId3"/>
+              </a:rPr>
+              <a:t>cuinotes.com</a:t>
+            </a:r>
+            <a:r>
+              <a:rPr sz="1000">
+                <a:solidFill>
+                  <a:srgbClr val="8A939B"/>
+                </a:solidFill>
+              </a:rPr>
+              <a:t>  ·  8</a:t>
+            </a:r>
           </a:p>
         </p:txBody>
       </p:sp>
@@ -11970,6 +11388,10 @@
             </a:outerShdw>
           </a:effectLst>
         </p:spPr>
+        <p:txBody>
+          <a:bodyPr/>
+          <a:p/>
+        </p:txBody>
       </p:sp>
       <p:pic>
         <p:nvPicPr>
@@ -11997,79 +11419,44 @@
       </p:pic>
       <p:sp>
         <p:nvSpPr>
-          <p:cNvPr id="7" name="Text 4"/>
-          <p:cNvSpPr txBox="1"/>
-          <p:nvPr/>
-        </p:nvSpPr>
-        <p:spPr>
-          <a:xfrm>
-            <a:off x="640080" y="6446520"/>
-            <a:ext cx="8686800" cy="292608"/>
-          </a:xfrm>
-          <a:prstGeom prst="rect">
-            <a:avLst/>
-          </a:prstGeom>
-          <a:noFill/>
-          <a:ln/>
-        </p:spPr>
-        <p:txBody>
-          <a:bodyPr wrap="square" lIns="0" tIns="0" rIns="0" bIns="0" rtlCol="0" anchor="ctr"/>
-          <a:lstStyle/>
-          <a:p>
-            <a:pPr algn="l" indent="0" marL="0">
-              <a:buNone/>
-            </a:pPr>
-            <a:r>
-              <a:rPr lang="en-US" sz="900" dirty="0">
-                <a:solidFill>
-                  <a:srgbClr val="5D5D72"/>
-                </a:solidFill>
-                <a:latin typeface="Calibri" pitchFamily="34" charset="0"/>
-                <a:ea typeface="Calibri" pitchFamily="34" charset="-122"/>
-                <a:cs typeface="Calibri" pitchFamily="34" charset="-120"/>
-              </a:rPr>
-              <a:t>Usman Akram  •  COMSATS University Islamabad</a:t>
-            </a:r>
-            <a:endParaRPr lang="en-US" sz="900" dirty="0"/>
-          </a:p>
-        </p:txBody>
-      </p:sp>
-      <p:sp>
-        <p:nvSpPr>
-          <p:cNvPr id="8" name="Text 5"/>
-          <p:cNvSpPr txBox="1"/>
-          <p:nvPr/>
-        </p:nvSpPr>
-        <p:spPr>
-          <a:xfrm>
-            <a:off x="11155680" y="6446520"/>
-            <a:ext cx="457200" cy="292608"/>
-          </a:xfrm>
-          <a:prstGeom prst="rect">
-            <a:avLst/>
-          </a:prstGeom>
-          <a:noFill/>
-          <a:ln/>
-        </p:spPr>
-        <p:txBody>
-          <a:bodyPr wrap="square" lIns="0" tIns="0" rIns="0" bIns="0" rtlCol="0" anchor="ctr"/>
-          <a:lstStyle/>
-          <a:p>
-            <a:pPr algn="r" indent="0" marL="0">
-              <a:buNone/>
-            </a:pPr>
-            <a:r>
-              <a:rPr lang="en-US" sz="900" dirty="0">
-                <a:solidFill>
-                  <a:srgbClr val="5D5D72"/>
-                </a:solidFill>
-                <a:latin typeface="Calibri" pitchFamily="34" charset="0"/>
-                <a:ea typeface="Calibri" pitchFamily="34" charset="-122"/>
-                <a:cs typeface="Calibri" pitchFamily="34" charset="-120"/>
-              </a:rPr>
-              <a:t>9</a:t>
-            </a:r>
-            <a:endParaRPr lang="en-US" sz="900" dirty="0"/>
+          <p:cNvPr id="9" name="cuinotes-footer-mark"/>
+          <p:cNvSpPr txBox="1"/>
+          <p:nvPr/>
+        </p:nvSpPr>
+        <p:spPr>
+          <a:xfrm>
+            <a:off x="9951720" y="6455664"/>
+            <a:ext cx="2011680" cy="292608"/>
+          </a:xfrm>
+          <a:prstGeom prst="rect">
+            <a:avLst/>
+          </a:prstGeom>
+          <a:noFill/>
+        </p:spPr>
+        <p:txBody>
+          <a:bodyPr wrap="none" lIns="0" rIns="0" tIns="0" bIns="0">
+            <a:spAutoFit/>
+          </a:bodyPr>
+          <a:lstStyle/>
+          <a:p>
+            <a:pPr algn="r"/>
+            <a:r>
+              <a:rPr sz="1000">
+                <a:solidFill>
+                  <a:srgbClr val="8A939B"/>
+                </a:solidFill>
+                <a:hlinkClick r:id="rId4"/>
+              </a:rPr>
+              <a:t>cuinotes.com</a:t>
+            </a:r>
+            <a:r>
+              <a:rPr sz="1000">
+                <a:solidFill>
+                  <a:srgbClr val="8A939B"/>
+                </a:solidFill>
+              </a:rPr>
+              <a:t>  ·  9</a:t>
+            </a:r>
           </a:p>
         </p:txBody>
       </p:sp>

--- a/slides/CSC336-Lecture-06-CSS-Box-Model-and-Display.pptx
+++ b/slides/CSC336-Lecture-06-CSS-Box-Model-and-Display.pptx
@@ -3174,7 +3174,7 @@
         <p:spPr>
           <a:xfrm>
             <a:off x="640080" y="1965960"/>
-            <a:ext cx="10911535" cy="1554480"/>
+            <a:ext cx="10911535" cy="3657600"/>
           </a:xfrm>
           <a:prstGeom prst="roundRect">
             <a:avLst>
@@ -3205,7 +3205,7 @@
         <p:spPr>
           <a:xfrm>
             <a:off x="868680" y="2103120"/>
-            <a:ext cx="10454335" cy="274320"/>
+            <a:ext cx="10454335" cy="400000"/>
           </a:xfrm>
           <a:prstGeom prst="rect">
             <a:avLst/>
@@ -3221,7 +3221,7 @@
               <a:buNone/>
             </a:pPr>
             <a:r>
-              <a:rPr lang="en-US" sz="1000" b="1" spc="200" kern="0" dirty="0">
+              <a:rPr lang="en-US" sz="1800" b="1" spc="200" kern="0" dirty="0">
                 <a:solidFill>
                   <a:srgbClr val="1F7A46"/>
                 </a:solidFill>
@@ -3231,7 +3231,7 @@
               </a:rPr>
               <a:t>TIP</a:t>
             </a:r>
-            <a:endParaRPr lang="en-US" sz="1000" dirty="0"/>
+            <a:endParaRPr lang="en-US" sz="1800" dirty="0"/>
           </a:p>
         </p:txBody>
       </p:sp>
@@ -3243,24 +3243,24 @@
         </p:nvSpPr>
         <p:spPr>
           <a:xfrm>
-            <a:off x="868680" y="2404872"/>
-            <a:ext cx="10454335" cy="960120"/>
-          </a:xfrm>
-          <a:prstGeom prst="rect">
-            <a:avLst/>
-          </a:prstGeom>
-          <a:noFill/>
-          <a:ln/>
-        </p:spPr>
-        <p:txBody>
-          <a:bodyPr wrap="square" lIns="0" tIns="0" rIns="0" bIns="0" rtlCol="0" anchor="t"/>
+            <a:off x="868680" y="2795960"/>
+            <a:ext cx="10454335" cy="2500000"/>
+          </a:xfrm>
+          <a:prstGeom prst="rect">
+            <a:avLst/>
+          </a:prstGeom>
+          <a:noFill/>
+          <a:ln/>
+        </p:spPr>
+        <p:txBody>
+          <a:bodyPr wrap="square" lIns="0" tIns="0" rIns="0" bIns="0" rtlCol="0" anchor="ctr"/>
           <a:lstStyle/>
           <a:p>
             <a:pPr indent="0" marL="0">
               <a:buNone/>
             </a:pPr>
             <a:r>
-              <a:rPr lang="en-US" sz="1250" dirty="0">
+              <a:rPr lang="en-US" sz="2800" dirty="0">
                 <a:solidFill>
                   <a:srgbClr val="26262F"/>
                 </a:solidFill>
@@ -3270,7 +3270,7 @@
               </a:rPr>
               <a:t>Because border-box makes sizing far more predictable, most real style sheets start with *, *::before, *::after { box-sizing: border-box; } as a site-wide reset.</a:t>
             </a:r>
-            <a:endParaRPr lang="en-US" sz="1250" dirty="0"/>
+            <a:endParaRPr lang="en-US" sz="2800" dirty="0"/>
           </a:p>
         </p:txBody>
       </p:sp>
@@ -4347,9 +4347,13 @@
             </a:avLst>
           </a:prstGeom>
           <a:solidFill>
-            <a:srgbClr val="1E1E4C"/>
+            <a:srgbClr val="F7F8F9"/>
           </a:solidFill>
-          <a:ln/>
+          <a:ln w="9525">
+            <a:solidFill>
+              <a:srgbClr val="D0D5DD"/>
+            </a:solidFill>
+          </a:ln>
         </p:spPr>
         <p:txBody>
           <a:bodyPr/>
@@ -4386,7 +4390,7 @@
             <a:r>
               <a:rPr lang="en-US" sz="1250" dirty="0">
                 <a:solidFill>
-                  <a:srgbClr val="C9D3F5"/>
+                  <a:srgbClr val="1F2429"/>
                 </a:solidFill>
                 <a:latin typeface="Courier New" pitchFamily="34" charset="0"/>
                 <a:ea typeface="Courier New" pitchFamily="34" charset="-122"/>
@@ -4406,7 +4410,7 @@
             <a:r>
               <a:rPr lang="en-US" sz="1250" dirty="0">
                 <a:solidFill>
-                  <a:srgbClr val="C9D3F5"/>
+                  <a:srgbClr val="1F2429"/>
                 </a:solidFill>
                 <a:latin typeface="Courier New" pitchFamily="34" charset="0"/>
                 <a:ea typeface="Courier New" pitchFamily="34" charset="-122"/>
@@ -4426,7 +4430,7 @@
             <a:r>
               <a:rPr lang="en-US" sz="1250" dirty="0">
                 <a:solidFill>
-                  <a:srgbClr val="C9D3F5"/>
+                  <a:srgbClr val="1F2429"/>
                 </a:solidFill>
                 <a:latin typeface="Courier New" pitchFamily="34" charset="0"/>
                 <a:ea typeface="Courier New" pitchFamily="34" charset="-122"/>
@@ -4446,7 +4450,7 @@
             <a:r>
               <a:rPr lang="en-US" sz="1250" dirty="0">
                 <a:solidFill>
-                  <a:srgbClr val="C9D3F5"/>
+                  <a:srgbClr val="1F2429"/>
                 </a:solidFill>
                 <a:latin typeface="Courier New" pitchFamily="34" charset="0"/>
                 <a:ea typeface="Courier New" pitchFamily="34" charset="-122"/>
@@ -4466,7 +4470,7 @@
             <a:r>
               <a:rPr lang="en-US" sz="1250" dirty="0">
                 <a:solidFill>
-                  <a:srgbClr val="C9D3F5"/>
+                  <a:srgbClr val="1F2429"/>
                 </a:solidFill>
                 <a:latin typeface="Courier New" pitchFamily="34" charset="0"/>
                 <a:ea typeface="Courier New" pitchFamily="34" charset="-122"/>
@@ -4710,9 +4714,13 @@
             </a:avLst>
           </a:prstGeom>
           <a:solidFill>
-            <a:srgbClr val="1E1E4C"/>
+            <a:srgbClr val="F7F8F9"/>
           </a:solidFill>
-          <a:ln/>
+          <a:ln w="9525">
+            <a:solidFill>
+              <a:srgbClr val="D0D5DD"/>
+            </a:solidFill>
+          </a:ln>
         </p:spPr>
         <p:txBody>
           <a:bodyPr/>
@@ -4749,7 +4757,7 @@
             <a:r>
               <a:rPr lang="en-US" sz="1400" dirty="0">
                 <a:solidFill>
-                  <a:srgbClr val="C9D3F5"/>
+                  <a:srgbClr val="1F2429"/>
                 </a:solidFill>
                 <a:latin typeface="Courier New" pitchFamily="34" charset="0"/>
                 <a:ea typeface="Courier New" pitchFamily="34" charset="-122"/>
@@ -4769,7 +4777,7 @@
             <a:r>
               <a:rPr lang="en-US" sz="1400" dirty="0">
                 <a:solidFill>
-                  <a:srgbClr val="C9D3F5"/>
+                  <a:srgbClr val="1F2429"/>
                 </a:solidFill>
                 <a:latin typeface="Courier New" pitchFamily="34" charset="0"/>
                 <a:ea typeface="Courier New" pitchFamily="34" charset="-122"/>
@@ -4990,9 +4998,13 @@
             </a:avLst>
           </a:prstGeom>
           <a:solidFill>
-            <a:srgbClr val="1E1E4C"/>
+            <a:srgbClr val="F7F8F9"/>
           </a:solidFill>
-          <a:ln/>
+          <a:ln w="9525">
+            <a:solidFill>
+              <a:srgbClr val="D0D5DD"/>
+            </a:solidFill>
+          </a:ln>
         </p:spPr>
         <p:txBody>
           <a:bodyPr/>
@@ -5029,7 +5041,7 @@
             <a:r>
               <a:rPr lang="en-US" sz="1400" dirty="0">
                 <a:solidFill>
-                  <a:srgbClr val="C9D3F5"/>
+                  <a:srgbClr val="1F2429"/>
                 </a:solidFill>
                 <a:latin typeface="Courier New" pitchFamily="34" charset="0"/>
                 <a:ea typeface="Courier New" pitchFamily="34" charset="-122"/>
@@ -5049,7 +5061,7 @@
             <a:r>
               <a:rPr lang="en-US" sz="1400" dirty="0">
                 <a:solidFill>
-                  <a:srgbClr val="C9D3F5"/>
+                  <a:srgbClr val="1F2429"/>
                 </a:solidFill>
                 <a:latin typeface="Courier New" pitchFamily="34" charset="0"/>
                 <a:ea typeface="Courier New" pitchFamily="34" charset="-122"/>
@@ -5069,7 +5081,7 @@
             <a:r>
               <a:rPr lang="en-US" sz="1400" dirty="0">
                 <a:solidFill>
-                  <a:srgbClr val="C9D3F5"/>
+                  <a:srgbClr val="1F2429"/>
                 </a:solidFill>
                 <a:latin typeface="Courier New" pitchFamily="34" charset="0"/>
                 <a:ea typeface="Courier New" pitchFamily="34" charset="-122"/>
@@ -5089,7 +5101,7 @@
             <a:r>
               <a:rPr lang="en-US" sz="1400" dirty="0">
                 <a:solidFill>
-                  <a:srgbClr val="C9D3F5"/>
+                  <a:srgbClr val="1F2429"/>
                 </a:solidFill>
                 <a:latin typeface="Courier New" pitchFamily="34" charset="0"/>
                 <a:ea typeface="Courier New" pitchFamily="34" charset="-122"/>
@@ -5109,7 +5121,7 @@
             <a:r>
               <a:rPr lang="en-US" sz="1400" dirty="0">
                 <a:solidFill>
-                  <a:srgbClr val="C9D3F5"/>
+                  <a:srgbClr val="1F2429"/>
                 </a:solidFill>
                 <a:latin typeface="Courier New" pitchFamily="34" charset="0"/>
                 <a:ea typeface="Courier New" pitchFamily="34" charset="-122"/>
@@ -5129,7 +5141,7 @@
             <a:r>
               <a:rPr lang="en-US" sz="1400" dirty="0">
                 <a:solidFill>
-                  <a:srgbClr val="C9D3F5"/>
+                  <a:srgbClr val="1F2429"/>
                 </a:solidFill>
                 <a:latin typeface="Courier New" pitchFamily="34" charset="0"/>
                 <a:ea typeface="Courier New" pitchFamily="34" charset="-122"/>
@@ -5149,7 +5161,7 @@
             <a:r>
               <a:rPr lang="en-US" sz="1400" dirty="0">
                 <a:solidFill>
-                  <a:srgbClr val="C9D3F5"/>
+                  <a:srgbClr val="1F2429"/>
                 </a:solidFill>
                 <a:latin typeface="Courier New" pitchFamily="34" charset="0"/>
                 <a:ea typeface="Courier New" pitchFamily="34" charset="-122"/>
@@ -5370,9 +5382,13 @@
             </a:avLst>
           </a:prstGeom>
           <a:solidFill>
-            <a:srgbClr val="1E1E4C"/>
+            <a:srgbClr val="F7F8F9"/>
           </a:solidFill>
-          <a:ln/>
+          <a:ln w="9525">
+            <a:solidFill>
+              <a:srgbClr val="D0D5DD"/>
+            </a:solidFill>
+          </a:ln>
         </p:spPr>
         <p:txBody>
           <a:bodyPr/>
@@ -5409,7 +5425,7 @@
             <a:r>
               <a:rPr lang="en-US" sz="1400" dirty="0">
                 <a:solidFill>
-                  <a:srgbClr val="C9D3F5"/>
+                  <a:srgbClr val="1F2429"/>
                 </a:solidFill>
                 <a:latin typeface="Courier New" pitchFamily="34" charset="0"/>
                 <a:ea typeface="Courier New" pitchFamily="34" charset="-122"/>
@@ -5429,7 +5445,7 @@
             <a:r>
               <a:rPr lang="en-US" sz="1400" dirty="0">
                 <a:solidFill>
-                  <a:srgbClr val="C9D3F5"/>
+                  <a:srgbClr val="1F2429"/>
                 </a:solidFill>
                 <a:latin typeface="Courier New" pitchFamily="34" charset="0"/>
                 <a:ea typeface="Courier New" pitchFamily="34" charset="-122"/>
@@ -6207,9 +6223,13 @@
             </a:avLst>
           </a:prstGeom>
           <a:solidFill>
-            <a:srgbClr val="1E1E4C"/>
+            <a:srgbClr val="F7F8F9"/>
           </a:solidFill>
-          <a:ln/>
+          <a:ln w="9525">
+            <a:solidFill>
+              <a:srgbClr val="D0D5DD"/>
+            </a:solidFill>
+          </a:ln>
         </p:spPr>
         <p:txBody>
           <a:bodyPr/>
@@ -6246,7 +6266,7 @@
             <a:r>
               <a:rPr lang="en-US" sz="1400" dirty="0">
                 <a:solidFill>
-                  <a:srgbClr val="C9D3F5"/>
+                  <a:srgbClr val="1F2429"/>
                 </a:solidFill>
                 <a:latin typeface="Courier New" pitchFamily="34" charset="0"/>
                 <a:ea typeface="Courier New" pitchFamily="34" charset="-122"/>
@@ -6266,7 +6286,7 @@
             <a:r>
               <a:rPr lang="en-US" sz="1400" dirty="0">
                 <a:solidFill>
-                  <a:srgbClr val="C9D3F5"/>
+                  <a:srgbClr val="1F2429"/>
                 </a:solidFill>
                 <a:latin typeface="Courier New" pitchFamily="34" charset="0"/>
                 <a:ea typeface="Courier New" pitchFamily="34" charset="-122"/>
@@ -6286,7 +6306,7 @@
             <a:r>
               <a:rPr lang="en-US" sz="1400" dirty="0">
                 <a:solidFill>
-                  <a:srgbClr val="C9D3F5"/>
+                  <a:srgbClr val="1F2429"/>
                 </a:solidFill>
                 <a:latin typeface="Courier New" pitchFamily="34" charset="0"/>
                 <a:ea typeface="Courier New" pitchFamily="34" charset="-122"/>
@@ -6306,7 +6326,7 @@
             <a:r>
               <a:rPr lang="en-US" sz="1400" dirty="0">
                 <a:solidFill>
-                  <a:srgbClr val="C9D3F5"/>
+                  <a:srgbClr val="1F2429"/>
                 </a:solidFill>
                 <a:latin typeface="Courier New" pitchFamily="34" charset="0"/>
                 <a:ea typeface="Courier New" pitchFamily="34" charset="-122"/>
@@ -6326,7 +6346,7 @@
             <a:r>
               <a:rPr lang="en-US" sz="1400" dirty="0">
                 <a:solidFill>
-                  <a:srgbClr val="C9D3F5"/>
+                  <a:srgbClr val="1F2429"/>
                 </a:solidFill>
                 <a:latin typeface="Courier New" pitchFamily="34" charset="0"/>
                 <a:ea typeface="Courier New" pitchFamily="34" charset="-122"/>
@@ -6355,7 +6375,7 @@
             <a:r>
               <a:rPr lang="en-US" sz="1400" dirty="0">
                 <a:solidFill>
-                  <a:srgbClr val="C9D3F5"/>
+                  <a:srgbClr val="1F2429"/>
                 </a:solidFill>
                 <a:latin typeface="Courier New" pitchFamily="34" charset="0"/>
                 <a:ea typeface="Courier New" pitchFamily="34" charset="-122"/>
@@ -7302,9 +7322,13 @@
             </a:avLst>
           </a:prstGeom>
           <a:solidFill>
-            <a:srgbClr val="1E1E4C"/>
+            <a:srgbClr val="F7F8F9"/>
           </a:solidFill>
-          <a:ln/>
+          <a:ln w="9525">
+            <a:solidFill>
+              <a:srgbClr val="D0D5DD"/>
+            </a:solidFill>
+          </a:ln>
         </p:spPr>
         <p:txBody>
           <a:bodyPr/>
@@ -7341,7 +7365,7 @@
             <a:r>
               <a:rPr lang="en-US" sz="1300" dirty="0">
                 <a:solidFill>
-                  <a:srgbClr val="C9D3F5"/>
+                  <a:srgbClr val="1F2429"/>
                 </a:solidFill>
                 <a:latin typeface="Courier New" pitchFamily="34" charset="0"/>
                 <a:ea typeface="Courier New" pitchFamily="34" charset="-122"/>
@@ -7361,7 +7385,7 @@
             <a:r>
               <a:rPr lang="en-US" sz="1300" dirty="0">
                 <a:solidFill>
-                  <a:srgbClr val="C9D3F5"/>
+                  <a:srgbClr val="1F2429"/>
                 </a:solidFill>
                 <a:latin typeface="Courier New" pitchFamily="34" charset="0"/>
                 <a:ea typeface="Courier New" pitchFamily="34" charset="-122"/>
@@ -7381,7 +7405,7 @@
             <a:r>
               <a:rPr lang="en-US" sz="1300" dirty="0">
                 <a:solidFill>
-                  <a:srgbClr val="C9D3F5"/>
+                  <a:srgbClr val="1F2429"/>
                 </a:solidFill>
                 <a:latin typeface="Courier New" pitchFamily="34" charset="0"/>
                 <a:ea typeface="Courier New" pitchFamily="34" charset="-122"/>
@@ -7410,7 +7434,7 @@
             <a:r>
               <a:rPr lang="en-US" sz="1300" dirty="0">
                 <a:solidFill>
-                  <a:srgbClr val="C9D3F5"/>
+                  <a:srgbClr val="1F2429"/>
                 </a:solidFill>
                 <a:latin typeface="Courier New" pitchFamily="34" charset="0"/>
                 <a:ea typeface="Courier New" pitchFamily="34" charset="-122"/>
@@ -7430,7 +7454,7 @@
             <a:r>
               <a:rPr lang="en-US" sz="1300" dirty="0">
                 <a:solidFill>
-                  <a:srgbClr val="C9D3F5"/>
+                  <a:srgbClr val="1F2429"/>
                 </a:solidFill>
                 <a:latin typeface="Courier New" pitchFamily="34" charset="0"/>
                 <a:ea typeface="Courier New" pitchFamily="34" charset="-122"/>
@@ -7450,7 +7474,7 @@
             <a:r>
               <a:rPr lang="en-US" sz="1300" dirty="0">
                 <a:solidFill>
-                  <a:srgbClr val="C9D3F5"/>
+                  <a:srgbClr val="1F2429"/>
                 </a:solidFill>
                 <a:latin typeface="Courier New" pitchFamily="34" charset="0"/>
                 <a:ea typeface="Courier New" pitchFamily="34" charset="-122"/>
@@ -7479,7 +7503,7 @@
             <a:r>
               <a:rPr lang="en-US" sz="1300" dirty="0">
                 <a:solidFill>
-                  <a:srgbClr val="C9D3F5"/>
+                  <a:srgbClr val="1F2429"/>
                 </a:solidFill>
                 <a:latin typeface="Courier New" pitchFamily="34" charset="0"/>
                 <a:ea typeface="Courier New" pitchFamily="34" charset="-122"/>
@@ -7499,7 +7523,7 @@
             <a:r>
               <a:rPr lang="en-US" sz="1300" dirty="0">
                 <a:solidFill>
-                  <a:srgbClr val="C9D3F5"/>
+                  <a:srgbClr val="1F2429"/>
                 </a:solidFill>
                 <a:latin typeface="Courier New" pitchFamily="34" charset="0"/>
                 <a:ea typeface="Courier New" pitchFamily="34" charset="-122"/>
@@ -7519,7 +7543,7 @@
             <a:r>
               <a:rPr lang="en-US" sz="1300" dirty="0">
                 <a:solidFill>
-                  <a:srgbClr val="C9D3F5"/>
+                  <a:srgbClr val="1F2429"/>
                 </a:solidFill>
                 <a:latin typeface="Courier New" pitchFamily="34" charset="0"/>
                 <a:ea typeface="Courier New" pitchFamily="34" charset="-122"/>
@@ -7539,7 +7563,7 @@
             <a:r>
               <a:rPr lang="en-US" sz="1300" dirty="0">
                 <a:solidFill>
-                  <a:srgbClr val="C9D3F5"/>
+                  <a:srgbClr val="1F2429"/>
                 </a:solidFill>
                 <a:latin typeface="Courier New" pitchFamily="34" charset="0"/>
                 <a:ea typeface="Courier New" pitchFamily="34" charset="-122"/>
@@ -7783,9 +7807,13 @@
             </a:avLst>
           </a:prstGeom>
           <a:solidFill>
-            <a:srgbClr val="1E1E4C"/>
+            <a:srgbClr val="F7F8F9"/>
           </a:solidFill>
-          <a:ln/>
+          <a:ln w="9525">
+            <a:solidFill>
+              <a:srgbClr val="D0D5DD"/>
+            </a:solidFill>
+          </a:ln>
         </p:spPr>
         <p:txBody>
           <a:bodyPr/>
@@ -7822,7 +7850,7 @@
             <a:r>
               <a:rPr lang="en-US" sz="1300" dirty="0">
                 <a:solidFill>
-                  <a:srgbClr val="C9D3F5"/>
+                  <a:srgbClr val="1F2429"/>
                 </a:solidFill>
                 <a:latin typeface="Courier New" pitchFamily="34" charset="0"/>
                 <a:ea typeface="Courier New" pitchFamily="34" charset="-122"/>
@@ -7842,7 +7870,7 @@
             <a:r>
               <a:rPr lang="en-US" sz="1300" dirty="0">
                 <a:solidFill>
-                  <a:srgbClr val="C9D3F5"/>
+                  <a:srgbClr val="1F2429"/>
                 </a:solidFill>
                 <a:latin typeface="Courier New" pitchFamily="34" charset="0"/>
                 <a:ea typeface="Courier New" pitchFamily="34" charset="-122"/>
@@ -7862,7 +7890,7 @@
             <a:r>
               <a:rPr lang="en-US" sz="1300" dirty="0">
                 <a:solidFill>
-                  <a:srgbClr val="C9D3F5"/>
+                  <a:srgbClr val="1F2429"/>
                 </a:solidFill>
                 <a:latin typeface="Courier New" pitchFamily="34" charset="0"/>
                 <a:ea typeface="Courier New" pitchFamily="34" charset="-122"/>
@@ -7882,7 +7910,7 @@
             <a:r>
               <a:rPr lang="en-US" sz="1300" dirty="0">
                 <a:solidFill>
-                  <a:srgbClr val="C9D3F5"/>
+                  <a:srgbClr val="1F2429"/>
                 </a:solidFill>
                 <a:latin typeface="Courier New" pitchFamily="34" charset="0"/>
                 <a:ea typeface="Courier New" pitchFamily="34" charset="-122"/>
@@ -7902,7 +7930,7 @@
             <a:r>
               <a:rPr lang="en-US" sz="1300" dirty="0">
                 <a:solidFill>
-                  <a:srgbClr val="C9D3F5"/>
+                  <a:srgbClr val="1F2429"/>
                 </a:solidFill>
                 <a:latin typeface="Courier New" pitchFamily="34" charset="0"/>
                 <a:ea typeface="Courier New" pitchFamily="34" charset="-122"/>
@@ -7922,7 +7950,7 @@
             <a:r>
               <a:rPr lang="en-US" sz="1300" dirty="0">
                 <a:solidFill>
-                  <a:srgbClr val="C9D3F5"/>
+                  <a:srgbClr val="1F2429"/>
                 </a:solidFill>
                 <a:latin typeface="Courier New" pitchFamily="34" charset="0"/>
                 <a:ea typeface="Courier New" pitchFamily="34" charset="-122"/>
@@ -7951,7 +7979,7 @@
             <a:r>
               <a:rPr lang="en-US" sz="1300" dirty="0">
                 <a:solidFill>
-                  <a:srgbClr val="C9D3F5"/>
+                  <a:srgbClr val="1F2429"/>
                 </a:solidFill>
                 <a:latin typeface="Courier New" pitchFamily="34" charset="0"/>
                 <a:ea typeface="Courier New" pitchFamily="34" charset="-122"/>
@@ -7971,7 +7999,7 @@
             <a:r>
               <a:rPr lang="en-US" sz="1300" dirty="0">
                 <a:solidFill>
-                  <a:srgbClr val="C9D3F5"/>
+                  <a:srgbClr val="1F2429"/>
                 </a:solidFill>
                 <a:latin typeface="Courier New" pitchFamily="34" charset="0"/>
                 <a:ea typeface="Courier New" pitchFamily="34" charset="-122"/>
@@ -7991,7 +8019,7 @@
             <a:r>
               <a:rPr lang="en-US" sz="1300" dirty="0">
                 <a:solidFill>
-                  <a:srgbClr val="C9D3F5"/>
+                  <a:srgbClr val="1F2429"/>
                 </a:solidFill>
                 <a:latin typeface="Courier New" pitchFamily="34" charset="0"/>
                 <a:ea typeface="Courier New" pitchFamily="34" charset="-122"/>
@@ -9903,9 +9931,13 @@
             </a:avLst>
           </a:prstGeom>
           <a:solidFill>
-            <a:srgbClr val="1E1E4C"/>
+            <a:srgbClr val="F7F8F9"/>
           </a:solidFill>
-          <a:ln/>
+          <a:ln w="9525">
+            <a:solidFill>
+              <a:srgbClr val="D0D5DD"/>
+            </a:solidFill>
+          </a:ln>
         </p:spPr>
         <p:txBody>
           <a:bodyPr/>
@@ -9942,7 +9974,7 @@
             <a:r>
               <a:rPr lang="en-US" sz="1250" dirty="0">
                 <a:solidFill>
-                  <a:srgbClr val="C9D3F5"/>
+                  <a:srgbClr val="1F2429"/>
                 </a:solidFill>
                 <a:latin typeface="Courier New" pitchFamily="34" charset="0"/>
                 <a:ea typeface="Courier New" pitchFamily="34" charset="-122"/>
@@ -9962,7 +9994,7 @@
             <a:r>
               <a:rPr lang="en-US" sz="1250" dirty="0">
                 <a:solidFill>
-                  <a:srgbClr val="C9D3F5"/>
+                  <a:srgbClr val="1F2429"/>
                 </a:solidFill>
                 <a:latin typeface="Courier New" pitchFamily="34" charset="0"/>
                 <a:ea typeface="Courier New" pitchFamily="34" charset="-122"/>
@@ -9982,7 +10014,7 @@
             <a:r>
               <a:rPr lang="en-US" sz="1250" dirty="0">
                 <a:solidFill>
-                  <a:srgbClr val="C9D3F5"/>
+                  <a:srgbClr val="1F2429"/>
                 </a:solidFill>
                 <a:latin typeface="Courier New" pitchFamily="34" charset="0"/>
                 <a:ea typeface="Courier New" pitchFamily="34" charset="-122"/>
@@ -10002,7 +10034,7 @@
             <a:r>
               <a:rPr lang="en-US" sz="1250" dirty="0">
                 <a:solidFill>
-                  <a:srgbClr val="C9D3F5"/>
+                  <a:srgbClr val="1F2429"/>
                 </a:solidFill>
                 <a:latin typeface="Courier New" pitchFamily="34" charset="0"/>
                 <a:ea typeface="Courier New" pitchFamily="34" charset="-122"/>
@@ -10246,9 +10278,13 @@
             </a:avLst>
           </a:prstGeom>
           <a:solidFill>
-            <a:srgbClr val="1E1E4C"/>
+            <a:srgbClr val="F7F8F9"/>
           </a:solidFill>
-          <a:ln/>
+          <a:ln w="9525">
+            <a:solidFill>
+              <a:srgbClr val="D0D5DD"/>
+            </a:solidFill>
+          </a:ln>
         </p:spPr>
         <p:txBody>
           <a:bodyPr/>
@@ -10285,7 +10321,7 @@
             <a:r>
               <a:rPr lang="en-US" sz="1400" dirty="0">
                 <a:solidFill>
-                  <a:srgbClr val="C9D3F5"/>
+                  <a:srgbClr val="1F2429"/>
                 </a:solidFill>
                 <a:latin typeface="Courier New" pitchFamily="34" charset="0"/>
                 <a:ea typeface="Courier New" pitchFamily="34" charset="-122"/>
@@ -10305,7 +10341,7 @@
             <a:r>
               <a:rPr lang="en-US" sz="1400" dirty="0">
                 <a:solidFill>
-                  <a:srgbClr val="C9D3F5"/>
+                  <a:srgbClr val="1F2429"/>
                 </a:solidFill>
                 <a:latin typeface="Courier New" pitchFamily="34" charset="0"/>
                 <a:ea typeface="Courier New" pitchFamily="34" charset="-122"/>
@@ -10733,7 +10769,7 @@
         <p:spPr>
           <a:xfrm>
             <a:off x="640080" y="1965960"/>
-            <a:ext cx="10911535" cy="1737360"/>
+            <a:ext cx="10911535" cy="3657600"/>
           </a:xfrm>
           <a:prstGeom prst="roundRect">
             <a:avLst>
@@ -10764,7 +10800,7 @@
         <p:spPr>
           <a:xfrm>
             <a:off x="868680" y="2103120"/>
-            <a:ext cx="10454335" cy="274320"/>
+            <a:ext cx="10454335" cy="400000"/>
           </a:xfrm>
           <a:prstGeom prst="rect">
             <a:avLst/>
@@ -10780,7 +10816,7 @@
               <a:buNone/>
             </a:pPr>
             <a:r>
-              <a:rPr lang="en-US" sz="1000" b="1" spc="200" kern="0" dirty="0">
+              <a:rPr lang="en-US" sz="1800" b="1" spc="200" kern="0" dirty="0">
                 <a:solidFill>
                   <a:srgbClr val="8A3A12"/>
                 </a:solidFill>
@@ -10790,7 +10826,7 @@
               </a:rPr>
               <a:t>WARNING</a:t>
             </a:r>
-            <a:endParaRPr lang="en-US" sz="1000" dirty="0"/>
+            <a:endParaRPr lang="en-US" sz="1800" dirty="0"/>
           </a:p>
         </p:txBody>
       </p:sp>
@@ -10802,24 +10838,24 @@
         </p:nvSpPr>
         <p:spPr>
           <a:xfrm>
-            <a:off x="868680" y="2404872"/>
-            <a:ext cx="10454335" cy="1143000"/>
-          </a:xfrm>
-          <a:prstGeom prst="rect">
-            <a:avLst/>
-          </a:prstGeom>
-          <a:noFill/>
-          <a:ln/>
-        </p:spPr>
-        <p:txBody>
-          <a:bodyPr wrap="square" lIns="0" tIns="0" rIns="0" bIns="0" rtlCol="0" anchor="t"/>
+            <a:off x="868680" y="2795960"/>
+            <a:ext cx="10454335" cy="2500000"/>
+          </a:xfrm>
+          <a:prstGeom prst="rect">
+            <a:avLst/>
+          </a:prstGeom>
+          <a:noFill/>
+          <a:ln/>
+        </p:spPr>
+        <p:txBody>
+          <a:bodyPr wrap="square" lIns="0" tIns="0" rIns="0" bIns="0" rtlCol="0" anchor="ctr"/>
           <a:lstStyle/>
           <a:p>
             <a:pPr indent="0" marL="0">
               <a:buNone/>
             </a:pPr>
             <a:r>
-              <a:rPr lang="en-US" sz="1250" dirty="0">
+              <a:rPr lang="en-US" sz="2800" dirty="0">
                 <a:solidFill>
                   <a:srgbClr val="26262F"/>
                 </a:solidFill>
@@ -10829,7 +10865,7 @@
               </a:rPr>
               <a:t>Margin collapsing applies only to top/bottom margins of block elements in normal flow. It never happens with left/right margins, or with flex, grid, floats, or absolute positioning.</a:t>
             </a:r>
-            <a:endParaRPr lang="en-US" sz="1250" dirty="0"/>
+            <a:endParaRPr lang="en-US" sz="2800" dirty="0"/>
           </a:p>
         </p:txBody>
       </p:sp>
@@ -11003,9 +11039,13 @@
             </a:avLst>
           </a:prstGeom>
           <a:solidFill>
-            <a:srgbClr val="1E1E4C"/>
+            <a:srgbClr val="F7F8F9"/>
           </a:solidFill>
-          <a:ln/>
+          <a:ln w="9525">
+            <a:solidFill>
+              <a:srgbClr val="D0D5DD"/>
+            </a:solidFill>
+          </a:ln>
         </p:spPr>
         <p:txBody>
           <a:bodyPr/>
@@ -11042,7 +11082,7 @@
             <a:r>
               <a:rPr lang="en-US" sz="1400" dirty="0">
                 <a:solidFill>
-                  <a:srgbClr val="C9D3F5"/>
+                  <a:srgbClr val="1F2429"/>
                 </a:solidFill>
                 <a:latin typeface="Courier New" pitchFamily="34" charset="0"/>
                 <a:ea typeface="Courier New" pitchFamily="34" charset="-122"/>
@@ -11062,7 +11102,7 @@
             <a:r>
               <a:rPr lang="en-US" sz="1400" dirty="0">
                 <a:solidFill>
-                  <a:srgbClr val="C9D3F5"/>
+                  <a:srgbClr val="1F2429"/>
                 </a:solidFill>
                 <a:latin typeface="Courier New" pitchFamily="34" charset="0"/>
                 <a:ea typeface="Courier New" pitchFamily="34" charset="-122"/>
@@ -11082,7 +11122,7 @@
             <a:r>
               <a:rPr lang="en-US" sz="1400" dirty="0">
                 <a:solidFill>
-                  <a:srgbClr val="C9D3F5"/>
+                  <a:srgbClr val="1F2429"/>
                 </a:solidFill>
                 <a:latin typeface="Courier New" pitchFamily="34" charset="0"/>
                 <a:ea typeface="Courier New" pitchFamily="34" charset="-122"/>
@@ -11111,7 +11151,7 @@
             <a:r>
               <a:rPr lang="en-US" sz="1400" dirty="0">
                 <a:solidFill>
-                  <a:srgbClr val="C9D3F5"/>
+                  <a:srgbClr val="1F2429"/>
                 </a:solidFill>
                 <a:latin typeface="Courier New" pitchFamily="34" charset="0"/>
                 <a:ea typeface="Courier New" pitchFamily="34" charset="-122"/>
@@ -11131,7 +11171,7 @@
             <a:r>
               <a:rPr lang="en-US" sz="1400" dirty="0">
                 <a:solidFill>
-                  <a:srgbClr val="C9D3F5"/>
+                  <a:srgbClr val="1F2429"/>
                 </a:solidFill>
                 <a:latin typeface="Courier New" pitchFamily="34" charset="0"/>
                 <a:ea typeface="Courier New" pitchFamily="34" charset="-122"/>
@@ -11151,7 +11191,7 @@
             <a:r>
               <a:rPr lang="en-US" sz="1400" dirty="0">
                 <a:solidFill>
-                  <a:srgbClr val="C9D3F5"/>
+                  <a:srgbClr val="1F2429"/>
                 </a:solidFill>
                 <a:latin typeface="Courier New" pitchFamily="34" charset="0"/>
                 <a:ea typeface="Courier New" pitchFamily="34" charset="-122"/>
